--- a/figures/Nephromaths figures.pptx
+++ b/figures/Nephromaths figures.pptx
@@ -5,26 +5,27 @@
     <p:sldMasterId id="2147483684" r:id="rId1"/>
   </p:sldMasterIdLst>
   <p:notesMasterIdLst>
-    <p:notesMasterId r:id="rId19"/>
+    <p:notesMasterId r:id="rId20"/>
   </p:notesMasterIdLst>
   <p:sldIdLst>
     <p:sldId id="314" r:id="rId2"/>
-    <p:sldId id="294" r:id="rId3"/>
-    <p:sldId id="310" r:id="rId4"/>
-    <p:sldId id="321" r:id="rId5"/>
-    <p:sldId id="322" r:id="rId6"/>
-    <p:sldId id="315" r:id="rId7"/>
-    <p:sldId id="323" r:id="rId8"/>
-    <p:sldId id="324" r:id="rId9"/>
-    <p:sldId id="325" r:id="rId10"/>
-    <p:sldId id="326" r:id="rId11"/>
-    <p:sldId id="327" r:id="rId12"/>
-    <p:sldId id="328" r:id="rId13"/>
-    <p:sldId id="329" r:id="rId14"/>
-    <p:sldId id="330" r:id="rId15"/>
-    <p:sldId id="331" r:id="rId16"/>
-    <p:sldId id="278" r:id="rId17"/>
-    <p:sldId id="333" r:id="rId18"/>
+    <p:sldId id="334" r:id="rId3"/>
+    <p:sldId id="294" r:id="rId4"/>
+    <p:sldId id="310" r:id="rId5"/>
+    <p:sldId id="321" r:id="rId6"/>
+    <p:sldId id="322" r:id="rId7"/>
+    <p:sldId id="315" r:id="rId8"/>
+    <p:sldId id="323" r:id="rId9"/>
+    <p:sldId id="324" r:id="rId10"/>
+    <p:sldId id="325" r:id="rId11"/>
+    <p:sldId id="326" r:id="rId12"/>
+    <p:sldId id="327" r:id="rId13"/>
+    <p:sldId id="328" r:id="rId14"/>
+    <p:sldId id="329" r:id="rId15"/>
+    <p:sldId id="330" r:id="rId16"/>
+    <p:sldId id="331" r:id="rId17"/>
+    <p:sldId id="278" r:id="rId18"/>
+    <p:sldId id="333" r:id="rId19"/>
   </p:sldIdLst>
   <p:sldSz cx="9144000" cy="6858000" type="screen4x3"/>
   <p:notesSz cx="6858000" cy="9144000"/>
@@ -145,7 +146,7 @@
 <file path=ppt/revisionInfo.xml><?xml version="1.0" encoding="utf-8"?>
 <p1510:revInfo xmlns:a="http://schemas.openxmlformats.org/drawingml/2006/main" xmlns:r="http://schemas.openxmlformats.org/officeDocument/2006/relationships" xmlns:p1510="http://schemas.microsoft.com/office/powerpoint/2015/10/main">
   <p1510:revLst>
-    <p1510:client id="{D1EBBEB6-E0C3-2E4C-A3ED-9ABFED806046}" v="43" dt="2024-12-18T12:11:50.637"/>
+    <p1510:client id="{3085B2D0-72C2-0848-91DE-F85C4101AB3A}" v="2" dt="2026-05-11T21:27:03.608"/>
   </p1510:revLst>
 </p1510:revInfo>
 </file>
@@ -153,608 +154,106 @@
 <file path=ppt/changesInfos/changesInfo1.xml><?xml version="1.0" encoding="utf-8"?>
 <pc:chgInfo xmlns:a="http://schemas.openxmlformats.org/drawingml/2006/main" xmlns:r="http://schemas.openxmlformats.org/officeDocument/2006/relationships" xmlns:ac="http://schemas.microsoft.com/office/drawing/2013/main/command" xmlns:pc="http://schemas.microsoft.com/office/powerpoint/2013/main/command">
   <pc:docChgLst>
-    <pc:chgData name="Robert Hunter" userId="0c412f1c-a1dd-4c74-a882-7f803c38f654" providerId="ADAL" clId="{D1EBBEB6-E0C3-2E4C-A3ED-9ABFED806046}"/>
-    <pc:docChg chg="undo custSel addSld delSld modSld">
-      <pc:chgData name="Robert Hunter" userId="0c412f1c-a1dd-4c74-a882-7f803c38f654" providerId="ADAL" clId="{D1EBBEB6-E0C3-2E4C-A3ED-9ABFED806046}" dt="2024-12-18T12:13:59.975" v="707" actId="208"/>
+    <pc:chgData name="Robert Hunter" userId="0c412f1c-a1dd-4c74-a882-7f803c38f654" providerId="ADAL" clId="{F558113F-E682-5E60-8308-96F35A7FD0D7}"/>
+    <pc:docChg chg="undo custSel addSld modSld">
+      <pc:chgData name="Robert Hunter" userId="0c412f1c-a1dd-4c74-a882-7f803c38f654" providerId="ADAL" clId="{F558113F-E682-5E60-8308-96F35A7FD0D7}" dt="2026-05-11T21:27:34.650" v="33" actId="478"/>
       <pc:docMkLst>
         <pc:docMk/>
       </pc:docMkLst>
-      <pc:sldChg chg="addSp modSp add mod">
-        <pc:chgData name="Robert Hunter" userId="0c412f1c-a1dd-4c74-a882-7f803c38f654" providerId="ADAL" clId="{D1EBBEB6-E0C3-2E4C-A3ED-9ABFED806046}" dt="2024-12-18T09:21:42.473" v="39" actId="1076"/>
+      <pc:sldChg chg="addSp delSp modSp add mod delAnim">
+        <pc:chgData name="Robert Hunter" userId="0c412f1c-a1dd-4c74-a882-7f803c38f654" providerId="ADAL" clId="{F558113F-E682-5E60-8308-96F35A7FD0D7}" dt="2026-05-11T21:27:34.650" v="33" actId="478"/>
         <pc:sldMkLst>
           <pc:docMk/>
-          <pc:sldMk cId="4194734517" sldId="278"/>
+          <pc:sldMk cId="2892234403" sldId="334"/>
         </pc:sldMkLst>
-        <pc:spChg chg="add mod">
-          <ac:chgData name="Robert Hunter" userId="0c412f1c-a1dd-4c74-a882-7f803c38f654" providerId="ADAL" clId="{D1EBBEB6-E0C3-2E4C-A3ED-9ABFED806046}" dt="2024-12-18T09:21:22.577" v="26"/>
+        <pc:spChg chg="mod">
+          <ac:chgData name="Robert Hunter" userId="0c412f1c-a1dd-4c74-a882-7f803c38f654" providerId="ADAL" clId="{F558113F-E682-5E60-8308-96F35A7FD0D7}" dt="2026-05-11T21:27:22.676" v="26" actId="20577"/>
           <ac:spMkLst>
             <pc:docMk/>
-            <pc:sldMk cId="4194734517" sldId="278"/>
-            <ac:spMk id="11" creationId="{01524FFA-13D9-D96A-CE7A-BBBE41EB56B3}"/>
+            <pc:sldMk cId="2892234403" sldId="334"/>
+            <ac:spMk id="2" creationId="{00000000-0000-0000-0000-000000000000}"/>
+          </ac:spMkLst>
+        </pc:spChg>
+        <pc:spChg chg="mod">
+          <ac:chgData name="Robert Hunter" userId="0c412f1c-a1dd-4c74-a882-7f803c38f654" providerId="ADAL" clId="{F558113F-E682-5E60-8308-96F35A7FD0D7}" dt="2026-05-11T21:16:52.166" v="7" actId="207"/>
+          <ac:spMkLst>
+            <pc:docMk/>
+            <pc:sldMk cId="2892234403" sldId="334"/>
+            <ac:spMk id="4" creationId="{85438EBF-0C2F-549D-9E7C-1183D0E5218E}"/>
+          </ac:spMkLst>
+        </pc:spChg>
+        <pc:spChg chg="del">
+          <ac:chgData name="Robert Hunter" userId="0c412f1c-a1dd-4c74-a882-7f803c38f654" providerId="ADAL" clId="{F558113F-E682-5E60-8308-96F35A7FD0D7}" dt="2026-05-11T21:15:49.778" v="2" actId="478"/>
+          <ac:spMkLst>
+            <pc:docMk/>
+            <pc:sldMk cId="2892234403" sldId="334"/>
+            <ac:spMk id="5" creationId="{00000000-0000-0000-0000-000000000000}"/>
           </ac:spMkLst>
         </pc:spChg>
         <pc:spChg chg="add mod">
-          <ac:chgData name="Robert Hunter" userId="0c412f1c-a1dd-4c74-a882-7f803c38f654" providerId="ADAL" clId="{D1EBBEB6-E0C3-2E4C-A3ED-9ABFED806046}" dt="2024-12-18T09:21:42.473" v="39" actId="1076"/>
+          <ac:chgData name="Robert Hunter" userId="0c412f1c-a1dd-4c74-a882-7f803c38f654" providerId="ADAL" clId="{F558113F-E682-5E60-8308-96F35A7FD0D7}" dt="2026-05-11T21:27:25.824" v="28" actId="20577"/>
           <ac:spMkLst>
             <pc:docMk/>
-            <pc:sldMk cId="4194734517" sldId="278"/>
-            <ac:spMk id="12" creationId="{DE6437E1-2062-48EA-4A7E-D14A6A7F2BEF}"/>
+            <pc:sldMk cId="2892234403" sldId="334"/>
+            <ac:spMk id="6" creationId="{AF8F9BE6-D720-E0DC-4703-346A3C0063B3}"/>
           </ac:spMkLst>
         </pc:spChg>
-        <pc:grpChg chg="mod">
-          <ac:chgData name="Robert Hunter" userId="0c412f1c-a1dd-4c74-a882-7f803c38f654" providerId="ADAL" clId="{D1EBBEB6-E0C3-2E4C-A3ED-9ABFED806046}" dt="2024-12-18T09:20:53.571" v="21" actId="1076"/>
+        <pc:spChg chg="mod">
+          <ac:chgData name="Robert Hunter" userId="0c412f1c-a1dd-4c74-a882-7f803c38f654" providerId="ADAL" clId="{F558113F-E682-5E60-8308-96F35A7FD0D7}" dt="2026-05-11T21:16:21.922" v="6" actId="12789"/>
+          <ac:spMkLst>
+            <pc:docMk/>
+            <pc:sldMk cId="2892234403" sldId="334"/>
+            <ac:spMk id="18" creationId="{76097729-61A2-636E-F713-5E2E5B5C65AD}"/>
+          </ac:spMkLst>
+        </pc:spChg>
+        <pc:spChg chg="mod">
+          <ac:chgData name="Robert Hunter" userId="0c412f1c-a1dd-4c74-a882-7f803c38f654" providerId="ADAL" clId="{F558113F-E682-5E60-8308-96F35A7FD0D7}" dt="2026-05-11T21:16:21.922" v="6" actId="12789"/>
+          <ac:spMkLst>
+            <pc:docMk/>
+            <pc:sldMk cId="2892234403" sldId="334"/>
+            <ac:spMk id="19" creationId="{E8F767AD-9C16-9202-96AA-5F34F014A9C1}"/>
+          </ac:spMkLst>
+        </pc:spChg>
+        <pc:spChg chg="mod">
+          <ac:chgData name="Robert Hunter" userId="0c412f1c-a1dd-4c74-a882-7f803c38f654" providerId="ADAL" clId="{F558113F-E682-5E60-8308-96F35A7FD0D7}" dt="2026-05-11T21:16:21.922" v="6" actId="12789"/>
+          <ac:spMkLst>
+            <pc:docMk/>
+            <pc:sldMk cId="2892234403" sldId="334"/>
+            <ac:spMk id="20" creationId="{B4F6B8C5-76A9-D19E-C4E2-1D3E534A491A}"/>
+          </ac:spMkLst>
+        </pc:spChg>
+        <pc:spChg chg="mod">
+          <ac:chgData name="Robert Hunter" userId="0c412f1c-a1dd-4c74-a882-7f803c38f654" providerId="ADAL" clId="{F558113F-E682-5E60-8308-96F35A7FD0D7}" dt="2026-05-11T21:27:27.708" v="30" actId="20577"/>
+          <ac:spMkLst>
+            <pc:docMk/>
+            <pc:sldMk cId="2892234403" sldId="334"/>
+            <ac:spMk id="37" creationId="{00000000-0000-0000-0000-000000000000}"/>
+          </ac:spMkLst>
+        </pc:spChg>
+        <pc:spChg chg="mod">
+          <ac:chgData name="Robert Hunter" userId="0c412f1c-a1dd-4c74-a882-7f803c38f654" providerId="ADAL" clId="{F558113F-E682-5E60-8308-96F35A7FD0D7}" dt="2026-05-11T21:27:29.979" v="32" actId="20577"/>
+          <ac:spMkLst>
+            <pc:docMk/>
+            <pc:sldMk cId="2892234403" sldId="334"/>
+            <ac:spMk id="38" creationId="{00000000-0000-0000-0000-000000000000}"/>
+          </ac:spMkLst>
+        </pc:spChg>
+        <pc:spChg chg="del">
+          <ac:chgData name="Robert Hunter" userId="0c412f1c-a1dd-4c74-a882-7f803c38f654" providerId="ADAL" clId="{F558113F-E682-5E60-8308-96F35A7FD0D7}" dt="2026-05-11T21:27:34.650" v="33" actId="478"/>
+          <ac:spMkLst>
+            <pc:docMk/>
+            <pc:sldMk cId="2892234403" sldId="334"/>
+            <ac:spMk id="39" creationId="{00000000-0000-0000-0000-000000000000}"/>
+          </ac:spMkLst>
+        </pc:spChg>
+        <pc:grpChg chg="del">
+          <ac:chgData name="Robert Hunter" userId="0c412f1c-a1dd-4c74-a882-7f803c38f654" providerId="ADAL" clId="{F558113F-E682-5E60-8308-96F35A7FD0D7}" dt="2026-05-11T21:15:46.708" v="1" actId="478"/>
           <ac:grpSpMkLst>
             <pc:docMk/>
-            <pc:sldMk cId="4194734517" sldId="278"/>
-            <ac:grpSpMk id="35" creationId="{1D1A118A-CF87-384E-999E-9E2FF0F80A63}"/>
+            <pc:sldMk cId="2892234403" sldId="334"/>
+            <ac:grpSpMk id="30" creationId="{5CDFE41B-2225-9427-A93B-6511393A0686}"/>
           </ac:grpSpMkLst>
         </pc:grpChg>
-        <pc:cxnChg chg="add mod">
-          <ac:chgData name="Robert Hunter" userId="0c412f1c-a1dd-4c74-a882-7f803c38f654" providerId="ADAL" clId="{D1EBBEB6-E0C3-2E4C-A3ED-9ABFED806046}" dt="2024-12-18T09:21:17.422" v="25" actId="14100"/>
-          <ac:cxnSpMkLst>
-            <pc:docMk/>
-            <pc:sldMk cId="4194734517" sldId="278"/>
-            <ac:cxnSpMk id="2" creationId="{55518CEB-4CEE-14BB-27D7-30190E4C62E1}"/>
-          </ac:cxnSpMkLst>
-        </pc:cxnChg>
-      </pc:sldChg>
-      <pc:sldChg chg="new del">
-        <pc:chgData name="Robert Hunter" userId="0c412f1c-a1dd-4c74-a882-7f803c38f654" providerId="ADAL" clId="{D1EBBEB6-E0C3-2E4C-A3ED-9ABFED806046}" dt="2024-12-18T09:51:20.494" v="590" actId="2696"/>
-        <pc:sldMkLst>
-          <pc:docMk/>
-          <pc:sldMk cId="781460610" sldId="332"/>
-        </pc:sldMkLst>
-      </pc:sldChg>
-      <pc:sldChg chg="addSp delSp modSp add mod">
-        <pc:chgData name="Robert Hunter" userId="0c412f1c-a1dd-4c74-a882-7f803c38f654" providerId="ADAL" clId="{D1EBBEB6-E0C3-2E4C-A3ED-9ABFED806046}" dt="2024-12-18T12:13:59.975" v="707" actId="208"/>
-        <pc:sldMkLst>
-          <pc:docMk/>
-          <pc:sldMk cId="1412051409" sldId="333"/>
-        </pc:sldMkLst>
-        <pc:spChg chg="add del mod topLvl">
-          <ac:chgData name="Robert Hunter" userId="0c412f1c-a1dd-4c74-a882-7f803c38f654" providerId="ADAL" clId="{D1EBBEB6-E0C3-2E4C-A3ED-9ABFED806046}" dt="2024-12-18T09:41:16.876" v="330" actId="478"/>
-          <ac:spMkLst>
-            <pc:docMk/>
-            <pc:sldMk cId="1412051409" sldId="333"/>
-            <ac:spMk id="2" creationId="{EFF3492C-263B-847C-C6CA-ED9E3DB3424E}"/>
-          </ac:spMkLst>
-        </pc:spChg>
-        <pc:spChg chg="add del mod">
-          <ac:chgData name="Robert Hunter" userId="0c412f1c-a1dd-4c74-a882-7f803c38f654" providerId="ADAL" clId="{D1EBBEB6-E0C3-2E4C-A3ED-9ABFED806046}" dt="2024-12-18T09:24:33.558" v="55" actId="478"/>
-          <ac:spMkLst>
-            <pc:docMk/>
-            <pc:sldMk cId="1412051409" sldId="333"/>
-            <ac:spMk id="3" creationId="{CCB90B48-2784-5A17-54A0-C7D5A88EEA39}"/>
-          </ac:spMkLst>
-        </pc:spChg>
-        <pc:spChg chg="mod topLvl">
-          <ac:chgData name="Robert Hunter" userId="0c412f1c-a1dd-4c74-a882-7f803c38f654" providerId="ADAL" clId="{D1EBBEB6-E0C3-2E4C-A3ED-9ABFED806046}" dt="2024-12-18T09:35:20.159" v="187" actId="20577"/>
-          <ac:spMkLst>
-            <pc:docMk/>
-            <pc:sldMk cId="1412051409" sldId="333"/>
-            <ac:spMk id="6" creationId="{9C2EAC0A-A7A8-9341-8C33-002078C9E95D}"/>
-          </ac:spMkLst>
-        </pc:spChg>
-        <pc:spChg chg="mod topLvl">
-          <ac:chgData name="Robert Hunter" userId="0c412f1c-a1dd-4c74-a882-7f803c38f654" providerId="ADAL" clId="{D1EBBEB6-E0C3-2E4C-A3ED-9ABFED806046}" dt="2024-12-18T09:48:06.821" v="469" actId="1076"/>
-          <ac:spMkLst>
-            <pc:docMk/>
-            <pc:sldMk cId="1412051409" sldId="333"/>
-            <ac:spMk id="7" creationId="{DCED646A-69AB-FF43-9757-284E305C01AC}"/>
-          </ac:spMkLst>
-        </pc:spChg>
-        <pc:spChg chg="del mod topLvl">
-          <ac:chgData name="Robert Hunter" userId="0c412f1c-a1dd-4c74-a882-7f803c38f654" providerId="ADAL" clId="{D1EBBEB6-E0C3-2E4C-A3ED-9ABFED806046}" dt="2024-12-18T09:26:55.746" v="130" actId="478"/>
-          <ac:spMkLst>
-            <pc:docMk/>
-            <pc:sldMk cId="1412051409" sldId="333"/>
-            <ac:spMk id="8" creationId="{8E8DE660-A880-8242-BC36-1B7D2E08AA14}"/>
-          </ac:spMkLst>
-        </pc:spChg>
-        <pc:spChg chg="mod topLvl">
-          <ac:chgData name="Robert Hunter" userId="0c412f1c-a1dd-4c74-a882-7f803c38f654" providerId="ADAL" clId="{D1EBBEB6-E0C3-2E4C-A3ED-9ABFED806046}" dt="2024-12-18T09:55:54.591" v="603" actId="1076"/>
-          <ac:spMkLst>
-            <pc:docMk/>
-            <pc:sldMk cId="1412051409" sldId="333"/>
-            <ac:spMk id="9" creationId="{B384938B-A43B-694D-A140-D185485DCF69}"/>
-          </ac:spMkLst>
-        </pc:spChg>
-        <pc:spChg chg="add mod topLvl">
-          <ac:chgData name="Robert Hunter" userId="0c412f1c-a1dd-4c74-a882-7f803c38f654" providerId="ADAL" clId="{D1EBBEB6-E0C3-2E4C-A3ED-9ABFED806046}" dt="2024-12-18T09:46:57.822" v="463" actId="1076"/>
-          <ac:spMkLst>
-            <pc:docMk/>
-            <pc:sldMk cId="1412051409" sldId="333"/>
-            <ac:spMk id="10" creationId="{CCD8AD02-8F3B-9F3D-4398-4E6ECC09A8A5}"/>
-          </ac:spMkLst>
-        </pc:spChg>
-        <pc:spChg chg="add del mod">
-          <ac:chgData name="Robert Hunter" userId="0c412f1c-a1dd-4c74-a882-7f803c38f654" providerId="ADAL" clId="{D1EBBEB6-E0C3-2E4C-A3ED-9ABFED806046}" dt="2024-12-18T09:24:38.115" v="57" actId="478"/>
-          <ac:spMkLst>
-            <pc:docMk/>
-            <pc:sldMk cId="1412051409" sldId="333"/>
-            <ac:spMk id="11" creationId="{65ADFD9D-8E71-CD6D-CE38-7452B0E73267}"/>
-          </ac:spMkLst>
-        </pc:spChg>
-        <pc:spChg chg="add mod">
-          <ac:chgData name="Robert Hunter" userId="0c412f1c-a1dd-4c74-a882-7f803c38f654" providerId="ADAL" clId="{D1EBBEB6-E0C3-2E4C-A3ED-9ABFED806046}" dt="2024-12-18T09:48:10.907" v="470" actId="1076"/>
-          <ac:spMkLst>
-            <pc:docMk/>
-            <pc:sldMk cId="1412051409" sldId="333"/>
-            <ac:spMk id="18" creationId="{BA728E2A-52BC-12FC-D0AA-B5B00CBD10CA}"/>
-          </ac:spMkLst>
-        </pc:spChg>
-        <pc:spChg chg="del mod topLvl">
-          <ac:chgData name="Robert Hunter" userId="0c412f1c-a1dd-4c74-a882-7f803c38f654" providerId="ADAL" clId="{D1EBBEB6-E0C3-2E4C-A3ED-9ABFED806046}" dt="2024-12-18T09:24:36.180" v="56" actId="478"/>
-          <ac:spMkLst>
-            <pc:docMk/>
-            <pc:sldMk cId="1412051409" sldId="333"/>
-            <ac:spMk id="19" creationId="{A4F6A482-8533-4F40-B81C-8B43DCA2763C}"/>
-          </ac:spMkLst>
-        </pc:spChg>
-        <pc:spChg chg="del mod">
-          <ac:chgData name="Robert Hunter" userId="0c412f1c-a1dd-4c74-a882-7f803c38f654" providerId="ADAL" clId="{D1EBBEB6-E0C3-2E4C-A3ED-9ABFED806046}" dt="2024-12-18T09:24:40.376" v="58" actId="478"/>
-          <ac:spMkLst>
-            <pc:docMk/>
-            <pc:sldMk cId="1412051409" sldId="333"/>
-            <ac:spMk id="20" creationId="{197902AA-47D2-514A-BB1F-DF2890973866}"/>
-          </ac:spMkLst>
-        </pc:spChg>
-        <pc:spChg chg="add mod">
-          <ac:chgData name="Robert Hunter" userId="0c412f1c-a1dd-4c74-a882-7f803c38f654" providerId="ADAL" clId="{D1EBBEB6-E0C3-2E4C-A3ED-9ABFED806046}" dt="2024-12-18T09:46:57.822" v="463" actId="1076"/>
-          <ac:spMkLst>
-            <pc:docMk/>
-            <pc:sldMk cId="1412051409" sldId="333"/>
-            <ac:spMk id="21" creationId="{788F3E30-BACB-9EE3-6165-61AAC0C439EE}"/>
-          </ac:spMkLst>
-        </pc:spChg>
-        <pc:spChg chg="del mod topLvl">
-          <ac:chgData name="Robert Hunter" userId="0c412f1c-a1dd-4c74-a882-7f803c38f654" providerId="ADAL" clId="{D1EBBEB6-E0C3-2E4C-A3ED-9ABFED806046}" dt="2024-12-18T09:24:45.844" v="59" actId="478"/>
-          <ac:spMkLst>
-            <pc:docMk/>
-            <pc:sldMk cId="1412051409" sldId="333"/>
-            <ac:spMk id="23" creationId="{001ACC23-C143-0948-A2DA-EA0493FF3E87}"/>
-          </ac:spMkLst>
-        </pc:spChg>
-        <pc:spChg chg="del mod topLvl">
-          <ac:chgData name="Robert Hunter" userId="0c412f1c-a1dd-4c74-a882-7f803c38f654" providerId="ADAL" clId="{D1EBBEB6-E0C3-2E4C-A3ED-9ABFED806046}" dt="2024-12-18T09:34:34.465" v="177" actId="478"/>
-          <ac:spMkLst>
-            <pc:docMk/>
-            <pc:sldMk cId="1412051409" sldId="333"/>
-            <ac:spMk id="24" creationId="{5FF3D410-9B45-7D48-807F-ABCC7B8BF2C1}"/>
-          </ac:spMkLst>
-        </pc:spChg>
-        <pc:spChg chg="del mod topLvl">
-          <ac:chgData name="Robert Hunter" userId="0c412f1c-a1dd-4c74-a882-7f803c38f654" providerId="ADAL" clId="{D1EBBEB6-E0C3-2E4C-A3ED-9ABFED806046}" dt="2024-12-18T09:34:33.138" v="176" actId="478"/>
-          <ac:spMkLst>
-            <pc:docMk/>
-            <pc:sldMk cId="1412051409" sldId="333"/>
-            <ac:spMk id="25" creationId="{FCF5F39F-2856-EA46-BA58-637B53685D49}"/>
-          </ac:spMkLst>
-        </pc:spChg>
-        <pc:spChg chg="del mod topLvl">
-          <ac:chgData name="Robert Hunter" userId="0c412f1c-a1dd-4c74-a882-7f803c38f654" providerId="ADAL" clId="{D1EBBEB6-E0C3-2E4C-A3ED-9ABFED806046}" dt="2024-12-18T09:34:31.439" v="175" actId="478"/>
-          <ac:spMkLst>
-            <pc:docMk/>
-            <pc:sldMk cId="1412051409" sldId="333"/>
-            <ac:spMk id="26" creationId="{2E15A9EC-25FB-AF4E-83E2-8FDA6C3DA208}"/>
-          </ac:spMkLst>
-        </pc:spChg>
-        <pc:spChg chg="del mod topLvl">
-          <ac:chgData name="Robert Hunter" userId="0c412f1c-a1dd-4c74-a882-7f803c38f654" providerId="ADAL" clId="{D1EBBEB6-E0C3-2E4C-A3ED-9ABFED806046}" dt="2024-12-18T09:22:43.291" v="41" actId="478"/>
-          <ac:spMkLst>
-            <pc:docMk/>
-            <pc:sldMk cId="1412051409" sldId="333"/>
-            <ac:spMk id="27" creationId="{9BCB30BD-7C1F-1D45-89A5-B32F962DB62B}"/>
-          </ac:spMkLst>
-        </pc:spChg>
-        <pc:spChg chg="add del">
-          <ac:chgData name="Robert Hunter" userId="0c412f1c-a1dd-4c74-a882-7f803c38f654" providerId="ADAL" clId="{D1EBBEB6-E0C3-2E4C-A3ED-9ABFED806046}" dt="2024-12-18T09:33:21.091" v="165" actId="478"/>
-          <ac:spMkLst>
-            <pc:docMk/>
-            <pc:sldMk cId="1412051409" sldId="333"/>
-            <ac:spMk id="30" creationId="{11705DC0-5259-50F9-07DA-5F7A36583555}"/>
-          </ac:spMkLst>
-        </pc:spChg>
-        <pc:spChg chg="add del">
-          <ac:chgData name="Robert Hunter" userId="0c412f1c-a1dd-4c74-a882-7f803c38f654" providerId="ADAL" clId="{D1EBBEB6-E0C3-2E4C-A3ED-9ABFED806046}" dt="2024-12-18T09:28:26.004" v="138" actId="11529"/>
-          <ac:spMkLst>
-            <pc:docMk/>
-            <pc:sldMk cId="1412051409" sldId="333"/>
-            <ac:spMk id="31" creationId="{F41C9228-E4EB-3CFF-61C3-8963AD997506}"/>
-          </ac:spMkLst>
-        </pc:spChg>
-        <pc:spChg chg="mod topLvl">
-          <ac:chgData name="Robert Hunter" userId="0c412f1c-a1dd-4c74-a882-7f803c38f654" providerId="ADAL" clId="{D1EBBEB6-E0C3-2E4C-A3ED-9ABFED806046}" dt="2024-12-18T09:46:57.822" v="463" actId="1076"/>
-          <ac:spMkLst>
-            <pc:docMk/>
-            <pc:sldMk cId="1412051409" sldId="333"/>
-            <ac:spMk id="32" creationId="{98E07249-CA09-6E44-830F-73562E883885}"/>
-          </ac:spMkLst>
-        </pc:spChg>
-        <pc:spChg chg="mod topLvl">
-          <ac:chgData name="Robert Hunter" userId="0c412f1c-a1dd-4c74-a882-7f803c38f654" providerId="ADAL" clId="{D1EBBEB6-E0C3-2E4C-A3ED-9ABFED806046}" dt="2024-12-18T09:43:42.580" v="423" actId="1076"/>
-          <ac:spMkLst>
-            <pc:docMk/>
-            <pc:sldMk cId="1412051409" sldId="333"/>
-            <ac:spMk id="33" creationId="{83DF7B6A-2824-354B-9B3F-F2254F08663B}"/>
-          </ac:spMkLst>
-        </pc:spChg>
-        <pc:spChg chg="add del mod">
-          <ac:chgData name="Robert Hunter" userId="0c412f1c-a1dd-4c74-a882-7f803c38f654" providerId="ADAL" clId="{D1EBBEB6-E0C3-2E4C-A3ED-9ABFED806046}" dt="2024-12-18T09:33:20.313" v="164" actId="478"/>
-          <ac:spMkLst>
-            <pc:docMk/>
-            <pc:sldMk cId="1412051409" sldId="333"/>
-            <ac:spMk id="34" creationId="{8AC2FE67-08F0-E0ED-ED6C-818B3E1F3CC1}"/>
-          </ac:spMkLst>
-        </pc:spChg>
-        <pc:spChg chg="add del mod">
-          <ac:chgData name="Robert Hunter" userId="0c412f1c-a1dd-4c74-a882-7f803c38f654" providerId="ADAL" clId="{D1EBBEB6-E0C3-2E4C-A3ED-9ABFED806046}" dt="2024-12-18T09:33:19.222" v="163" actId="478"/>
-          <ac:spMkLst>
-            <pc:docMk/>
-            <pc:sldMk cId="1412051409" sldId="333"/>
-            <ac:spMk id="36" creationId="{0C4FD999-8BB4-CC40-A849-587C7C9FF3BB}"/>
-          </ac:spMkLst>
-        </pc:spChg>
-        <pc:spChg chg="add mod">
-          <ac:chgData name="Robert Hunter" userId="0c412f1c-a1dd-4c74-a882-7f803c38f654" providerId="ADAL" clId="{D1EBBEB6-E0C3-2E4C-A3ED-9ABFED806046}" dt="2024-12-18T09:54:57.893" v="597" actId="167"/>
-          <ac:spMkLst>
-            <pc:docMk/>
-            <pc:sldMk cId="1412051409" sldId="333"/>
-            <ac:spMk id="37" creationId="{B49001CD-A1DC-8141-7C50-E87452BE33DB}"/>
-          </ac:spMkLst>
-        </pc:spChg>
-        <pc:spChg chg="add del mod">
-          <ac:chgData name="Robert Hunter" userId="0c412f1c-a1dd-4c74-a882-7f803c38f654" providerId="ADAL" clId="{D1EBBEB6-E0C3-2E4C-A3ED-9ABFED806046}" dt="2024-12-18T09:37:11.726" v="304" actId="478"/>
-          <ac:spMkLst>
-            <pc:docMk/>
-            <pc:sldMk cId="1412051409" sldId="333"/>
-            <ac:spMk id="38" creationId="{AFF7E4DC-452A-CCEE-D6D6-58CCB5AFE198}"/>
-          </ac:spMkLst>
-        </pc:spChg>
-        <pc:spChg chg="add mod">
-          <ac:chgData name="Robert Hunter" userId="0c412f1c-a1dd-4c74-a882-7f803c38f654" providerId="ADAL" clId="{D1EBBEB6-E0C3-2E4C-A3ED-9ABFED806046}" dt="2024-12-18T09:37:58.356" v="312" actId="167"/>
-          <ac:spMkLst>
-            <pc:docMk/>
-            <pc:sldMk cId="1412051409" sldId="333"/>
-            <ac:spMk id="39" creationId="{AB2E6CE0-6060-28D3-1568-F10843F776FC}"/>
-          </ac:spMkLst>
-        </pc:spChg>
-        <pc:spChg chg="add mod">
-          <ac:chgData name="Robert Hunter" userId="0c412f1c-a1dd-4c74-a882-7f803c38f654" providerId="ADAL" clId="{D1EBBEB6-E0C3-2E4C-A3ED-9ABFED806046}" dt="2024-12-18T09:56:33.303" v="607" actId="166"/>
-          <ac:spMkLst>
-            <pc:docMk/>
-            <pc:sldMk cId="1412051409" sldId="333"/>
-            <ac:spMk id="43" creationId="{E1067A28-D536-0773-6D0F-AC5B1A2E9AA0}"/>
-          </ac:spMkLst>
-        </pc:spChg>
-        <pc:spChg chg="add del mod">
-          <ac:chgData name="Robert Hunter" userId="0c412f1c-a1dd-4c74-a882-7f803c38f654" providerId="ADAL" clId="{D1EBBEB6-E0C3-2E4C-A3ED-9ABFED806046}" dt="2024-12-18T09:36:06.285" v="299" actId="478"/>
-          <ac:spMkLst>
-            <pc:docMk/>
-            <pc:sldMk cId="1412051409" sldId="333"/>
-            <ac:spMk id="44" creationId="{9A0B5721-0DF6-6864-A9BB-1B3677DE85E7}"/>
-          </ac:spMkLst>
-        </pc:spChg>
-        <pc:spChg chg="add del mod">
-          <ac:chgData name="Robert Hunter" userId="0c412f1c-a1dd-4c74-a882-7f803c38f654" providerId="ADAL" clId="{D1EBBEB6-E0C3-2E4C-A3ED-9ABFED806046}" dt="2024-12-18T09:54:46.357" v="595" actId="478"/>
-          <ac:spMkLst>
-            <pc:docMk/>
-            <pc:sldMk cId="1412051409" sldId="333"/>
-            <ac:spMk id="46" creationId="{9D38E712-404B-9DAD-5238-ABF69ECB0584}"/>
-          </ac:spMkLst>
-        </pc:spChg>
-        <pc:spChg chg="add mod">
-          <ac:chgData name="Robert Hunter" userId="0c412f1c-a1dd-4c74-a882-7f803c38f654" providerId="ADAL" clId="{D1EBBEB6-E0C3-2E4C-A3ED-9ABFED806046}" dt="2024-12-18T09:37:49.683" v="311" actId="167"/>
-          <ac:spMkLst>
-            <pc:docMk/>
-            <pc:sldMk cId="1412051409" sldId="333"/>
-            <ac:spMk id="47" creationId="{37DC8A0C-1053-5F3A-30FF-306A482FBDAC}"/>
-          </ac:spMkLst>
-        </pc:spChg>
-        <pc:spChg chg="add mod">
-          <ac:chgData name="Robert Hunter" userId="0c412f1c-a1dd-4c74-a882-7f803c38f654" providerId="ADAL" clId="{D1EBBEB6-E0C3-2E4C-A3ED-9ABFED806046}" dt="2024-12-18T12:11:38.970" v="694" actId="108"/>
-          <ac:spMkLst>
-            <pc:docMk/>
-            <pc:sldMk cId="1412051409" sldId="333"/>
-            <ac:spMk id="48" creationId="{50D94841-7B56-2395-A729-024E14058B8D}"/>
-          </ac:spMkLst>
-        </pc:spChg>
-        <pc:spChg chg="add del">
-          <ac:chgData name="Robert Hunter" userId="0c412f1c-a1dd-4c74-a882-7f803c38f654" providerId="ADAL" clId="{D1EBBEB6-E0C3-2E4C-A3ED-9ABFED806046}" dt="2024-12-18T09:39:03.727" v="318" actId="478"/>
-          <ac:spMkLst>
-            <pc:docMk/>
-            <pc:sldMk cId="1412051409" sldId="333"/>
-            <ac:spMk id="49" creationId="{99B31578-D699-0DAB-3528-1066C6D7E364}"/>
-          </ac:spMkLst>
-        </pc:spChg>
-        <pc:spChg chg="add del">
-          <ac:chgData name="Robert Hunter" userId="0c412f1c-a1dd-4c74-a882-7f803c38f654" providerId="ADAL" clId="{D1EBBEB6-E0C3-2E4C-A3ED-9ABFED806046}" dt="2024-12-18T09:39:47.557" v="321" actId="478"/>
-          <ac:spMkLst>
-            <pc:docMk/>
-            <pc:sldMk cId="1412051409" sldId="333"/>
-            <ac:spMk id="50" creationId="{A7463875-67EB-8D9F-028E-7D453E017F0D}"/>
-          </ac:spMkLst>
-        </pc:spChg>
-        <pc:spChg chg="add del mod">
-          <ac:chgData name="Robert Hunter" userId="0c412f1c-a1dd-4c74-a882-7f803c38f654" providerId="ADAL" clId="{D1EBBEB6-E0C3-2E4C-A3ED-9ABFED806046}" dt="2024-12-18T09:40:36.675" v="325" actId="478"/>
-          <ac:spMkLst>
-            <pc:docMk/>
-            <pc:sldMk cId="1412051409" sldId="333"/>
-            <ac:spMk id="51" creationId="{657929C2-9DC6-0772-85F2-98D244EEF45C}"/>
-          </ac:spMkLst>
-        </pc:spChg>
-        <pc:spChg chg="add mod">
-          <ac:chgData name="Robert Hunter" userId="0c412f1c-a1dd-4c74-a882-7f803c38f654" providerId="ADAL" clId="{D1EBBEB6-E0C3-2E4C-A3ED-9ABFED806046}" dt="2024-12-18T12:11:04.903" v="688" actId="108"/>
-          <ac:spMkLst>
-            <pc:docMk/>
-            <pc:sldMk cId="1412051409" sldId="333"/>
-            <ac:spMk id="52" creationId="{D3EBE77E-F3EE-2657-E8F0-0F409C1D85C2}"/>
-          </ac:spMkLst>
-        </pc:spChg>
-        <pc:spChg chg="add mod">
-          <ac:chgData name="Robert Hunter" userId="0c412f1c-a1dd-4c74-a882-7f803c38f654" providerId="ADAL" clId="{D1EBBEB6-E0C3-2E4C-A3ED-9ABFED806046}" dt="2024-12-18T09:57:56.264" v="619" actId="1076"/>
-          <ac:spMkLst>
-            <pc:docMk/>
-            <pc:sldMk cId="1412051409" sldId="333"/>
-            <ac:spMk id="53" creationId="{1A346600-1928-96DD-BB45-74A49EB3456B}"/>
-          </ac:spMkLst>
-        </pc:spChg>
-        <pc:spChg chg="add mod">
-          <ac:chgData name="Robert Hunter" userId="0c412f1c-a1dd-4c74-a882-7f803c38f654" providerId="ADAL" clId="{D1EBBEB6-E0C3-2E4C-A3ED-9ABFED806046}" dt="2024-12-18T09:58:05.152" v="620" actId="1076"/>
-          <ac:spMkLst>
-            <pc:docMk/>
-            <pc:sldMk cId="1412051409" sldId="333"/>
-            <ac:spMk id="54" creationId="{964E6323-1DB4-F967-9DFE-C1630DFF9F5A}"/>
-          </ac:spMkLst>
-        </pc:spChg>
-        <pc:spChg chg="add mod">
-          <ac:chgData name="Robert Hunter" userId="0c412f1c-a1dd-4c74-a882-7f803c38f654" providerId="ADAL" clId="{D1EBBEB6-E0C3-2E4C-A3ED-9ABFED806046}" dt="2024-12-18T09:55:11.567" v="599" actId="404"/>
-          <ac:spMkLst>
-            <pc:docMk/>
-            <pc:sldMk cId="1412051409" sldId="333"/>
-            <ac:spMk id="55" creationId="{89F99431-CC28-B29B-C0E4-B2BB04FB6399}"/>
-          </ac:spMkLst>
-        </pc:spChg>
-        <pc:spChg chg="add mod">
-          <ac:chgData name="Robert Hunter" userId="0c412f1c-a1dd-4c74-a882-7f803c38f654" providerId="ADAL" clId="{D1EBBEB6-E0C3-2E4C-A3ED-9ABFED806046}" dt="2024-12-18T09:55:16.187" v="600" actId="404"/>
-          <ac:spMkLst>
-            <pc:docMk/>
-            <pc:sldMk cId="1412051409" sldId="333"/>
-            <ac:spMk id="56" creationId="{E74A7EE2-C709-AF8E-0397-56C2D6829665}"/>
-          </ac:spMkLst>
-        </pc:spChg>
-        <pc:spChg chg="add mod">
-          <ac:chgData name="Robert Hunter" userId="0c412f1c-a1dd-4c74-a882-7f803c38f654" providerId="ADAL" clId="{D1EBBEB6-E0C3-2E4C-A3ED-9ABFED806046}" dt="2024-12-18T09:55:16.187" v="600" actId="404"/>
-          <ac:spMkLst>
-            <pc:docMk/>
-            <pc:sldMk cId="1412051409" sldId="333"/>
-            <ac:spMk id="57" creationId="{8C917DF9-8BC9-0C33-A67B-4B07C4FEACCF}"/>
-          </ac:spMkLst>
-        </pc:spChg>
-        <pc:spChg chg="add mod">
-          <ac:chgData name="Robert Hunter" userId="0c412f1c-a1dd-4c74-a882-7f803c38f654" providerId="ADAL" clId="{D1EBBEB6-E0C3-2E4C-A3ED-9ABFED806046}" dt="2024-12-18T09:48:51.419" v="491" actId="1076"/>
-          <ac:spMkLst>
-            <pc:docMk/>
-            <pc:sldMk cId="1412051409" sldId="333"/>
-            <ac:spMk id="78" creationId="{ED076559-E107-E04B-C181-63F4D713E3FA}"/>
-          </ac:spMkLst>
-        </pc:spChg>
-        <pc:spChg chg="add mod">
-          <ac:chgData name="Robert Hunter" userId="0c412f1c-a1dd-4c74-a882-7f803c38f654" providerId="ADAL" clId="{D1EBBEB6-E0C3-2E4C-A3ED-9ABFED806046}" dt="2024-12-18T09:49:48.960" v="521" actId="1076"/>
-          <ac:spMkLst>
-            <pc:docMk/>
-            <pc:sldMk cId="1412051409" sldId="333"/>
-            <ac:spMk id="80" creationId="{FE327135-FAF4-98B9-5F6A-FB1207BCA3E4}"/>
-          </ac:spMkLst>
-        </pc:spChg>
-        <pc:spChg chg="add mod">
-          <ac:chgData name="Robert Hunter" userId="0c412f1c-a1dd-4c74-a882-7f803c38f654" providerId="ADAL" clId="{D1EBBEB6-E0C3-2E4C-A3ED-9ABFED806046}" dt="2024-12-18T09:55:41.770" v="602" actId="1076"/>
-          <ac:spMkLst>
-            <pc:docMk/>
-            <pc:sldMk cId="1412051409" sldId="333"/>
-            <ac:spMk id="81" creationId="{2601446B-0BB4-2BD2-434D-79140B4F7137}"/>
-          </ac:spMkLst>
-        </pc:spChg>
-        <pc:spChg chg="add mod">
-          <ac:chgData name="Robert Hunter" userId="0c412f1c-a1dd-4c74-a882-7f803c38f654" providerId="ADAL" clId="{D1EBBEB6-E0C3-2E4C-A3ED-9ABFED806046}" dt="2024-12-18T12:13:35.885" v="704" actId="207"/>
-          <ac:spMkLst>
-            <pc:docMk/>
-            <pc:sldMk cId="1412051409" sldId="333"/>
-            <ac:spMk id="82" creationId="{12658567-DBE8-CD06-59B7-3105FC492A8D}"/>
-          </ac:spMkLst>
-        </pc:spChg>
-        <pc:spChg chg="add mod">
-          <ac:chgData name="Robert Hunter" userId="0c412f1c-a1dd-4c74-a882-7f803c38f654" providerId="ADAL" clId="{D1EBBEB6-E0C3-2E4C-A3ED-9ABFED806046}" dt="2024-12-18T12:13:38.984" v="705" actId="207"/>
-          <ac:spMkLst>
-            <pc:docMk/>
-            <pc:sldMk cId="1412051409" sldId="333"/>
-            <ac:spMk id="83" creationId="{9AF02466-F092-BB5A-FC17-45E360D095AD}"/>
-          </ac:spMkLst>
-        </pc:spChg>
-        <pc:spChg chg="add mod">
-          <ac:chgData name="Robert Hunter" userId="0c412f1c-a1dd-4c74-a882-7f803c38f654" providerId="ADAL" clId="{D1EBBEB6-E0C3-2E4C-A3ED-9ABFED806046}" dt="2024-12-18T09:54:50.728" v="596" actId="167"/>
-          <ac:spMkLst>
-            <pc:docMk/>
-            <pc:sldMk cId="1412051409" sldId="333"/>
-            <ac:spMk id="84" creationId="{BB8DB68C-BA6C-2195-EFDF-F90431038565}"/>
-          </ac:spMkLst>
-        </pc:spChg>
-        <pc:spChg chg="add mod">
-          <ac:chgData name="Robert Hunter" userId="0c412f1c-a1dd-4c74-a882-7f803c38f654" providerId="ADAL" clId="{D1EBBEB6-E0C3-2E4C-A3ED-9ABFED806046}" dt="2024-12-18T09:56:49.981" v="612" actId="14100"/>
-          <ac:spMkLst>
-            <pc:docMk/>
-            <pc:sldMk cId="1412051409" sldId="333"/>
-            <ac:spMk id="85" creationId="{9FEFAED8-1F44-4943-4CB7-AD330F7E2374}"/>
-          </ac:spMkLst>
-        </pc:spChg>
-        <pc:spChg chg="add mod">
-          <ac:chgData name="Robert Hunter" userId="0c412f1c-a1dd-4c74-a882-7f803c38f654" providerId="ADAL" clId="{D1EBBEB6-E0C3-2E4C-A3ED-9ABFED806046}" dt="2024-12-18T12:09:30.349" v="676" actId="122"/>
-          <ac:spMkLst>
-            <pc:docMk/>
-            <pc:sldMk cId="1412051409" sldId="333"/>
-            <ac:spMk id="89" creationId="{AAEA0DBB-CEB2-A097-30BC-77956B63F11F}"/>
-          </ac:spMkLst>
-        </pc:spChg>
-        <pc:spChg chg="add del">
-          <ac:chgData name="Robert Hunter" userId="0c412f1c-a1dd-4c74-a882-7f803c38f654" providerId="ADAL" clId="{D1EBBEB6-E0C3-2E4C-A3ED-9ABFED806046}" dt="2024-12-18T12:09:58.711" v="678" actId="478"/>
-          <ac:spMkLst>
-            <pc:docMk/>
-            <pc:sldMk cId="1412051409" sldId="333"/>
-            <ac:spMk id="90" creationId="{05219033-5D04-9AC4-C535-5F3FB6134CAB}"/>
-          </ac:spMkLst>
-        </pc:spChg>
-        <pc:spChg chg="add mod">
-          <ac:chgData name="Robert Hunter" userId="0c412f1c-a1dd-4c74-a882-7f803c38f654" providerId="ADAL" clId="{D1EBBEB6-E0C3-2E4C-A3ED-9ABFED806046}" dt="2024-12-18T12:11:20.294" v="690"/>
-          <ac:spMkLst>
-            <pc:docMk/>
-            <pc:sldMk cId="1412051409" sldId="333"/>
-            <ac:spMk id="91" creationId="{92E55129-58F0-F08F-3912-4471182DF810}"/>
-          </ac:spMkLst>
-        </pc:spChg>
-        <pc:spChg chg="add del">
-          <ac:chgData name="Robert Hunter" userId="0c412f1c-a1dd-4c74-a882-7f803c38f654" providerId="ADAL" clId="{D1EBBEB6-E0C3-2E4C-A3ED-9ABFED806046}" dt="2024-12-18T12:10:27.820" v="681" actId="478"/>
-          <ac:spMkLst>
-            <pc:docMk/>
-            <pc:sldMk cId="1412051409" sldId="333"/>
-            <ac:spMk id="92" creationId="{AB6BA561-4588-4ABA-62B2-C4224D3F3E6C}"/>
-          </ac:spMkLst>
-        </pc:spChg>
-        <pc:spChg chg="add mod">
-          <ac:chgData name="Robert Hunter" userId="0c412f1c-a1dd-4c74-a882-7f803c38f654" providerId="ADAL" clId="{D1EBBEB6-E0C3-2E4C-A3ED-9ABFED806046}" dt="2024-12-18T12:11:54.903" v="697" actId="1582"/>
-          <ac:spMkLst>
-            <pc:docMk/>
-            <pc:sldMk cId="1412051409" sldId="333"/>
-            <ac:spMk id="93" creationId="{621629FA-45E2-845D-F538-AF02831C1EDE}"/>
-          </ac:spMkLst>
-        </pc:spChg>
-        <pc:grpChg chg="add del mod">
-          <ac:chgData name="Robert Hunter" userId="0c412f1c-a1dd-4c74-a882-7f803c38f654" providerId="ADAL" clId="{D1EBBEB6-E0C3-2E4C-A3ED-9ABFED806046}" dt="2024-12-18T09:35:34.109" v="190" actId="165"/>
-          <ac:grpSpMkLst>
-            <pc:docMk/>
-            <pc:sldMk cId="1412051409" sldId="333"/>
-            <ac:grpSpMk id="41" creationId="{3B683A98-BB3B-5000-8D1A-21E2F8525274}"/>
-          </ac:grpSpMkLst>
-        </pc:grpChg>
-        <pc:cxnChg chg="mod topLvl">
-          <ac:chgData name="Robert Hunter" userId="0c412f1c-a1dd-4c74-a882-7f803c38f654" providerId="ADAL" clId="{D1EBBEB6-E0C3-2E4C-A3ED-9ABFED806046}" dt="2024-12-18T09:35:34.109" v="190" actId="165"/>
-          <ac:cxnSpMkLst>
-            <pc:docMk/>
-            <pc:sldMk cId="1412051409" sldId="333"/>
-            <ac:cxnSpMk id="4" creationId="{CCE5E792-9FD4-8A4C-9768-7BEEC0348EFB}"/>
-          </ac:cxnSpMkLst>
-        </pc:cxnChg>
-        <pc:cxnChg chg="mod topLvl">
-          <ac:chgData name="Robert Hunter" userId="0c412f1c-a1dd-4c74-a882-7f803c38f654" providerId="ADAL" clId="{D1EBBEB6-E0C3-2E4C-A3ED-9ABFED806046}" dt="2024-12-18T09:35:34.109" v="190" actId="165"/>
-          <ac:cxnSpMkLst>
-            <pc:docMk/>
-            <pc:sldMk cId="1412051409" sldId="333"/>
-            <ac:cxnSpMk id="5" creationId="{04D59E32-07D7-A346-B4CF-2B474DFA1C41}"/>
-          </ac:cxnSpMkLst>
-        </pc:cxnChg>
-        <pc:cxnChg chg="add mod">
-          <ac:chgData name="Robert Hunter" userId="0c412f1c-a1dd-4c74-a882-7f803c38f654" providerId="ADAL" clId="{D1EBBEB6-E0C3-2E4C-A3ED-9ABFED806046}" dt="2024-12-18T09:35:06.584" v="180" actId="1076"/>
-          <ac:cxnSpMkLst>
-            <pc:docMk/>
-            <pc:sldMk cId="1412051409" sldId="333"/>
-            <ac:cxnSpMk id="15" creationId="{55FECE09-F555-EEE8-E442-CB5970299793}"/>
-          </ac:cxnSpMkLst>
-        </pc:cxnChg>
-        <pc:cxnChg chg="mod topLvl">
-          <ac:chgData name="Robert Hunter" userId="0c412f1c-a1dd-4c74-a882-7f803c38f654" providerId="ADAL" clId="{D1EBBEB6-E0C3-2E4C-A3ED-9ABFED806046}" dt="2024-12-18T09:47:47.740" v="466" actId="693"/>
-          <ac:cxnSpMkLst>
-            <pc:docMk/>
-            <pc:sldMk cId="1412051409" sldId="333"/>
-            <ac:cxnSpMk id="16" creationId="{9B2859F6-DF1D-8C4F-A08B-0D72BB729250}"/>
-          </ac:cxnSpMkLst>
-        </pc:cxnChg>
-        <pc:cxnChg chg="del">
-          <ac:chgData name="Robert Hunter" userId="0c412f1c-a1dd-4c74-a882-7f803c38f654" providerId="ADAL" clId="{D1EBBEB6-E0C3-2E4C-A3ED-9ABFED806046}" dt="2024-12-18T09:22:41.401" v="40" actId="478"/>
-          <ac:cxnSpMkLst>
-            <pc:docMk/>
-            <pc:sldMk cId="1412051409" sldId="333"/>
-            <ac:cxnSpMk id="29" creationId="{274919B4-1E62-3E43-9AAD-4024094ECBF0}"/>
-          </ac:cxnSpMkLst>
-        </pc:cxnChg>
-        <pc:cxnChg chg="add mod">
-          <ac:chgData name="Robert Hunter" userId="0c412f1c-a1dd-4c74-a882-7f803c38f654" providerId="ADAL" clId="{D1EBBEB6-E0C3-2E4C-A3ED-9ABFED806046}" dt="2024-12-18T09:36:02.080" v="298" actId="1076"/>
-          <ac:cxnSpMkLst>
-            <pc:docMk/>
-            <pc:sldMk cId="1412051409" sldId="333"/>
-            <ac:cxnSpMk id="45" creationId="{F048E8BA-7A8F-0366-3AD3-1013B28DA664}"/>
-          </ac:cxnSpMkLst>
-        </pc:cxnChg>
-        <pc:cxnChg chg="add mod">
-          <ac:chgData name="Robert Hunter" userId="0c412f1c-a1dd-4c74-a882-7f803c38f654" providerId="ADAL" clId="{D1EBBEB6-E0C3-2E4C-A3ED-9ABFED806046}" dt="2024-12-18T12:12:55.860" v="701" actId="208"/>
-          <ac:cxnSpMkLst>
-            <pc:docMk/>
-            <pc:sldMk cId="1412051409" sldId="333"/>
-            <ac:cxnSpMk id="59" creationId="{AE145418-A085-A909-058A-67E8412506EF}"/>
-          </ac:cxnSpMkLst>
-        </pc:cxnChg>
-        <pc:cxnChg chg="add mod">
-          <ac:chgData name="Robert Hunter" userId="0c412f1c-a1dd-4c74-a882-7f803c38f654" providerId="ADAL" clId="{D1EBBEB6-E0C3-2E4C-A3ED-9ABFED806046}" dt="2024-12-18T12:13:00.454" v="702" actId="208"/>
-          <ac:cxnSpMkLst>
-            <pc:docMk/>
-            <pc:sldMk cId="1412051409" sldId="333"/>
-            <ac:cxnSpMk id="60" creationId="{E8B38541-B1AC-A8A5-514C-9CCDCD4D4C4F}"/>
-          </ac:cxnSpMkLst>
-        </pc:cxnChg>
-        <pc:cxnChg chg="add mod">
-          <ac:chgData name="Robert Hunter" userId="0c412f1c-a1dd-4c74-a882-7f803c38f654" providerId="ADAL" clId="{D1EBBEB6-E0C3-2E4C-A3ED-9ABFED806046}" dt="2024-12-18T12:13:17.214" v="703" actId="208"/>
-          <ac:cxnSpMkLst>
-            <pc:docMk/>
-            <pc:sldMk cId="1412051409" sldId="333"/>
-            <ac:cxnSpMk id="62" creationId="{3CDCF2E8-BDD4-7E7B-DE4B-D885A177F35B}"/>
-          </ac:cxnSpMkLst>
-        </pc:cxnChg>
-        <pc:cxnChg chg="add del mod">
-          <ac:chgData name="Robert Hunter" userId="0c412f1c-a1dd-4c74-a882-7f803c38f654" providerId="ADAL" clId="{D1EBBEB6-E0C3-2E4C-A3ED-9ABFED806046}" dt="2024-12-18T09:45:35.944" v="444" actId="478"/>
-          <ac:cxnSpMkLst>
-            <pc:docMk/>
-            <pc:sldMk cId="1412051409" sldId="333"/>
-            <ac:cxnSpMk id="63" creationId="{43345CF5-73F1-3A47-B026-2103B4B9485A}"/>
-          </ac:cxnSpMkLst>
-        </pc:cxnChg>
-        <pc:cxnChg chg="add del mod">
-          <ac:chgData name="Robert Hunter" userId="0c412f1c-a1dd-4c74-a882-7f803c38f654" providerId="ADAL" clId="{D1EBBEB6-E0C3-2E4C-A3ED-9ABFED806046}" dt="2024-12-18T12:12:43.907" v="698" actId="208"/>
-          <ac:cxnSpMkLst>
-            <pc:docMk/>
-            <pc:sldMk cId="1412051409" sldId="333"/>
-            <ac:cxnSpMk id="64" creationId="{EDC9C9F1-99E6-A4B0-119C-403CE90AA559}"/>
-          </ac:cxnSpMkLst>
-        </pc:cxnChg>
-        <pc:cxnChg chg="add mod">
-          <ac:chgData name="Robert Hunter" userId="0c412f1c-a1dd-4c74-a882-7f803c38f654" providerId="ADAL" clId="{D1EBBEB6-E0C3-2E4C-A3ED-9ABFED806046}" dt="2024-12-18T12:12:48.344" v="699" actId="208"/>
-          <ac:cxnSpMkLst>
-            <pc:docMk/>
-            <pc:sldMk cId="1412051409" sldId="333"/>
-            <ac:cxnSpMk id="68" creationId="{6C442C80-C8C1-D6F7-686D-63259BD3A710}"/>
-          </ac:cxnSpMkLst>
-        </pc:cxnChg>
-        <pc:cxnChg chg="add mod">
-          <ac:chgData name="Robert Hunter" userId="0c412f1c-a1dd-4c74-a882-7f803c38f654" providerId="ADAL" clId="{D1EBBEB6-E0C3-2E4C-A3ED-9ABFED806046}" dt="2024-12-18T12:13:42.865" v="706" actId="208"/>
-          <ac:cxnSpMkLst>
-            <pc:docMk/>
-            <pc:sldMk cId="1412051409" sldId="333"/>
-            <ac:cxnSpMk id="69" creationId="{015ED370-A00C-13F7-696E-A05185C55162}"/>
-          </ac:cxnSpMkLst>
-        </pc:cxnChg>
-        <pc:cxnChg chg="add del mod">
-          <ac:chgData name="Robert Hunter" userId="0c412f1c-a1dd-4c74-a882-7f803c38f654" providerId="ADAL" clId="{D1EBBEB6-E0C3-2E4C-A3ED-9ABFED806046}" dt="2024-12-18T09:48:59.637" v="493" actId="478"/>
-          <ac:cxnSpMkLst>
-            <pc:docMk/>
-            <pc:sldMk cId="1412051409" sldId="333"/>
-            <ac:cxnSpMk id="79" creationId="{B05C84C3-9BBE-7C6A-0F69-5206AB548CF2}"/>
-          </ac:cxnSpMkLst>
-        </pc:cxnChg>
-        <pc:cxnChg chg="add mod">
-          <ac:chgData name="Robert Hunter" userId="0c412f1c-a1dd-4c74-a882-7f803c38f654" providerId="ADAL" clId="{D1EBBEB6-E0C3-2E4C-A3ED-9ABFED806046}" dt="2024-12-18T12:13:59.975" v="707" actId="208"/>
-          <ac:cxnSpMkLst>
-            <pc:docMk/>
-            <pc:sldMk cId="1412051409" sldId="333"/>
-            <ac:cxnSpMk id="87" creationId="{ED2C04DD-6FAA-065E-A191-57C431EE00F1}"/>
-          </ac:cxnSpMkLst>
-        </pc:cxnChg>
       </pc:sldChg>
     </pc:docChg>
   </pc:docChgLst>
@@ -843,7 +342,7 @@
           <a:p>
             <a:fld id="{127C5AEA-E3F8-8D45-90D3-D641212FD6AD}" type="datetimeFigureOut">
               <a:rPr lang="en-GB" smtClean="0"/>
-              <a:t>18/12/2024</a:t>
+              <a:t>11/05/2026</a:t>
             </a:fld>
             <a:endParaRPr lang="en-GB"/>
           </a:p>
@@ -1374,33 +873,100 @@
           <a:bodyPr/>
           <a:lstStyle/>
           <a:p>
+            <a:pPr marL="228600" indent="-228600">
+              <a:buAutoNum type="arabicParenR"/>
+            </a:pPr>
             <a:r>
               <a:rPr lang="en-US" dirty="0"/>
-              <a:t>Plasmalyte-148 = 27 </a:t>
-            </a:r>
-            <a:r>
-              <a:rPr lang="en-US" dirty="0" err="1"/>
-              <a:t>mM</a:t>
-            </a:r>
-            <a:r>
-              <a:rPr lang="en-US" dirty="0"/>
-              <a:t> acetate + </a:t>
-            </a:r>
-            <a:r>
-              <a:rPr lang="en-US" dirty="0" err="1"/>
-              <a:t>gluconate</a:t>
-            </a:r>
-            <a:r>
-              <a:rPr lang="en-US" dirty="0"/>
-              <a:t> 23 </a:t>
-            </a:r>
-            <a:r>
-              <a:rPr lang="en-US" dirty="0" err="1"/>
-              <a:t>mM</a:t>
-            </a:r>
-            <a:r>
-              <a:rPr lang="en-US" dirty="0"/>
-              <a:t>= 50</a:t>
+              <a:t>= volume depletion</a:t>
+            </a:r>
+            <a:r>
+              <a:rPr lang="en-US" baseline="0" dirty="0"/>
+              <a:t> causes increased NHE3 activity</a:t>
+            </a:r>
+          </a:p>
+          <a:p>
+            <a:pPr marL="228600" indent="-228600">
+              <a:buAutoNum type="arabicParenR"/>
+            </a:pPr>
+            <a:r>
+              <a:rPr lang="en-US" baseline="0" dirty="0"/>
+              <a:t>= low [</a:t>
+            </a:r>
+            <a:r>
+              <a:rPr lang="en-US" baseline="0" dirty="0" err="1"/>
+              <a:t>Cl</a:t>
+            </a:r>
+            <a:r>
+              <a:rPr lang="en-US" baseline="0" dirty="0"/>
+              <a:t>] at MD stimulates renin release (and hence </a:t>
+            </a:r>
+            <a:r>
+              <a:rPr lang="en-US" baseline="0" dirty="0" err="1"/>
+              <a:t>aldo</a:t>
+            </a:r>
+            <a:r>
+              <a:rPr lang="en-US" baseline="0" dirty="0"/>
+              <a:t>); </a:t>
+            </a:r>
+            <a:r>
+              <a:rPr lang="en-US" baseline="0" dirty="0" err="1"/>
+              <a:t>aldo</a:t>
+            </a:r>
+            <a:r>
+              <a:rPr lang="en-US" baseline="0" dirty="0"/>
+              <a:t> also directly stimulated by volume depletion</a:t>
+            </a:r>
+          </a:p>
+          <a:p>
+            <a:pPr marL="228600" indent="-228600">
+              <a:buAutoNum type="arabicParenR"/>
+            </a:pPr>
+            <a:r>
+              <a:rPr lang="en-US" baseline="0" dirty="0"/>
+              <a:t>= lack of </a:t>
+            </a:r>
+            <a:r>
+              <a:rPr lang="en-US" baseline="0" dirty="0" err="1"/>
+              <a:t>Cl</a:t>
+            </a:r>
+            <a:r>
+              <a:rPr lang="en-US" baseline="0" dirty="0"/>
+              <a:t> inhibits </a:t>
+            </a:r>
+            <a:r>
+              <a:rPr lang="en-US" baseline="0" dirty="0" err="1"/>
+              <a:t>Cl</a:t>
+            </a:r>
+            <a:r>
+              <a:rPr lang="en-US" baseline="0" dirty="0"/>
+              <a:t>/HCO3 exchange by </a:t>
+            </a:r>
+            <a:r>
+              <a:rPr lang="en-US" baseline="0" dirty="0" err="1"/>
+              <a:t>pendrin</a:t>
+            </a:r>
+            <a:r>
+              <a:rPr lang="en-US" baseline="0" dirty="0"/>
+              <a:t> and hence stops HCO3 secretion by B-type </a:t>
+            </a:r>
+            <a:r>
+              <a:rPr lang="en-US" baseline="0" dirty="0" err="1"/>
+              <a:t>Ics</a:t>
+            </a:r>
+            <a:endParaRPr lang="en-US" baseline="0" dirty="0"/>
+          </a:p>
+          <a:p>
+            <a:pPr marL="228600" indent="-228600">
+              <a:buAutoNum type="arabicParenR"/>
+            </a:pPr>
+            <a:r>
+              <a:rPr lang="en-US" baseline="0" dirty="0"/>
+              <a:t>= lack of </a:t>
+            </a:r>
+            <a:r>
+              <a:rPr lang="en-US" baseline="0" dirty="0" err="1"/>
+              <a:t>Cl</a:t>
             </a:r>
             <a:r>
               <a:rPr lang="en-US" baseline="0" dirty="0"/>
@@ -1408,97 +974,35 @@
             </a:r>
             <a:r>
               <a:rPr lang="en-US" baseline="0" dirty="0" err="1"/>
-              <a:t>mM</a:t>
+              <a:t>favours</a:t>
             </a:r>
             <a:r>
               <a:rPr lang="en-US" baseline="0" dirty="0"/>
-              <a:t> HCO3 equivalents</a:t>
-            </a:r>
-          </a:p>
-          <a:p>
-            <a:pPr marL="0" marR="0" indent="0" algn="l" defTabSz="457200" rtl="0" eaLnBrk="1" fontAlgn="auto" latinLnBrk="0" hangingPunct="1">
-              <a:lnSpc>
-                <a:spcPct val="100000"/>
-              </a:lnSpc>
-              <a:spcBef>
-                <a:spcPts val="0"/>
-              </a:spcBef>
-              <a:spcAft>
-                <a:spcPts val="0"/>
-              </a:spcAft>
-              <a:buClrTx/>
-              <a:buSzTx/>
-              <a:buFontTx/>
+              <a:t> </a:t>
+            </a:r>
+            <a:r>
+              <a:rPr lang="en-US" baseline="0" dirty="0" err="1"/>
+              <a:t>electrogenic</a:t>
+            </a:r>
+            <a:r>
+              <a:rPr lang="en-US" baseline="0" dirty="0"/>
+              <a:t> Na exchange – hence H+ excretion and K+ excretion</a:t>
+            </a:r>
+          </a:p>
+          <a:p>
+            <a:pPr marL="0" indent="0">
               <a:buNone/>
-              <a:tabLst/>
-              <a:defRPr/>
             </a:pPr>
             <a:r>
-              <a:rPr lang="en-US" baseline="0" dirty="0"/>
-              <a:t>Think of lactate etc. as ‘potential bicarbonate’ (</a:t>
-            </a:r>
-            <a:r>
-              <a:rPr lang="en-US" dirty="0">
-                <a:solidFill>
-                  <a:srgbClr val="2C7C9F"/>
-                </a:solidFill>
-              </a:rPr>
-              <a:t>Sabatini &amp; </a:t>
-            </a:r>
-            <a:r>
-              <a:rPr lang="en-US" dirty="0" err="1">
-                <a:solidFill>
-                  <a:srgbClr val="2C7C9F"/>
-                </a:solidFill>
-              </a:rPr>
-              <a:t>Kurtzman</a:t>
-            </a:r>
-            <a:r>
-              <a:rPr lang="en-US" dirty="0">
-                <a:solidFill>
-                  <a:srgbClr val="2C7C9F"/>
-                </a:solidFill>
-              </a:rPr>
-              <a:t>,</a:t>
-            </a:r>
-            <a:r>
-              <a:rPr lang="en-US" baseline="0" dirty="0">
-                <a:solidFill>
-                  <a:srgbClr val="2C7C9F"/>
-                </a:solidFill>
-              </a:rPr>
-              <a:t> </a:t>
-            </a:r>
-            <a:r>
-              <a:rPr lang="en-US" dirty="0">
-                <a:solidFill>
-                  <a:srgbClr val="2C7C9F"/>
-                </a:solidFill>
-              </a:rPr>
-              <a:t>JASN 2008)</a:t>
-            </a:r>
-          </a:p>
-          <a:p>
-            <a:r>
-              <a:rPr lang="en-US" dirty="0"/>
-              <a:t>Lactate is </a:t>
-            </a:r>
-            <a:r>
-              <a:rPr lang="en-US" dirty="0" err="1"/>
-              <a:t>metabolised</a:t>
-            </a:r>
-            <a:r>
-              <a:rPr lang="en-US" baseline="0" dirty="0"/>
-              <a:t> predominantly by the liver (90%); acetate is </a:t>
-            </a:r>
-            <a:r>
-              <a:rPr lang="en-US" baseline="0" dirty="0" err="1"/>
-              <a:t>metabolised</a:t>
-            </a:r>
-            <a:r>
-              <a:rPr lang="en-US" baseline="0" dirty="0"/>
-              <a:t> by most tissues.  </a:t>
-            </a:r>
+              <a:rPr lang="is-IS" baseline="0" dirty="0"/>
+              <a:t>…therefore paradoxical acid urine and kaliuresis</a:t>
+            </a:r>
+            <a:endParaRPr lang="en-US" baseline="0" dirty="0"/>
+          </a:p>
+          <a:p>
+            <a:pPr marL="228600" indent="-228600">
+              <a:buAutoNum type="arabicParenR"/>
+            </a:pPr>
             <a:endParaRPr lang="en-US" dirty="0"/>
           </a:p>
         </p:txBody>
@@ -1520,7 +1024,7 @@
           <a:p>
             <a:fld id="{006D3E59-5A04-AE42-A523-BB1A5D6CC948}" type="slidenum">
               <a:rPr lang="en-US" smtClean="0"/>
-              <a:t>3</a:t>
+              <a:t>2</a:t>
             </a:fld>
             <a:endParaRPr lang="en-US"/>
           </a:p>
@@ -1529,7 +1033,7 @@
     </p:spTree>
     <p:extLst>
       <p:ext uri="{BB962C8B-B14F-4D97-AF65-F5344CB8AC3E}">
-        <p14:creationId xmlns:p14="http://schemas.microsoft.com/office/powerpoint/2010/main" val="1170205008"/>
+        <p14:creationId xmlns:p14="http://schemas.microsoft.com/office/powerpoint/2010/main" val="3312940456"/>
       </p:ext>
     </p:extLst>
   </p:cSld>
@@ -1583,6 +1087,131 @@
           <a:bodyPr/>
           <a:lstStyle/>
           <a:p>
+            <a:r>
+              <a:rPr lang="en-US" dirty="0"/>
+              <a:t>Plasmalyte-148 = 27 </a:t>
+            </a:r>
+            <a:r>
+              <a:rPr lang="en-US" dirty="0" err="1"/>
+              <a:t>mM</a:t>
+            </a:r>
+            <a:r>
+              <a:rPr lang="en-US" dirty="0"/>
+              <a:t> acetate + </a:t>
+            </a:r>
+            <a:r>
+              <a:rPr lang="en-US" dirty="0" err="1"/>
+              <a:t>gluconate</a:t>
+            </a:r>
+            <a:r>
+              <a:rPr lang="en-US" dirty="0"/>
+              <a:t> 23 </a:t>
+            </a:r>
+            <a:r>
+              <a:rPr lang="en-US" dirty="0" err="1"/>
+              <a:t>mM</a:t>
+            </a:r>
+            <a:r>
+              <a:rPr lang="en-US" dirty="0"/>
+              <a:t>= 50</a:t>
+            </a:r>
+            <a:r>
+              <a:rPr lang="en-US" baseline="0" dirty="0"/>
+              <a:t> </a:t>
+            </a:r>
+            <a:r>
+              <a:rPr lang="en-US" baseline="0" dirty="0" err="1"/>
+              <a:t>mM</a:t>
+            </a:r>
+            <a:r>
+              <a:rPr lang="en-US" baseline="0" dirty="0"/>
+              <a:t> HCO3 equivalents</a:t>
+            </a:r>
+          </a:p>
+          <a:p>
+            <a:pPr marL="0" marR="0" indent="0" algn="l" defTabSz="457200" rtl="0" eaLnBrk="1" fontAlgn="auto" latinLnBrk="0" hangingPunct="1">
+              <a:lnSpc>
+                <a:spcPct val="100000"/>
+              </a:lnSpc>
+              <a:spcBef>
+                <a:spcPts val="0"/>
+              </a:spcBef>
+              <a:spcAft>
+                <a:spcPts val="0"/>
+              </a:spcAft>
+              <a:buClrTx/>
+              <a:buSzTx/>
+              <a:buFontTx/>
+              <a:buNone/>
+              <a:tabLst/>
+              <a:defRPr/>
+            </a:pPr>
+            <a:r>
+              <a:rPr lang="en-US" baseline="0" dirty="0"/>
+              <a:t>Think of lactate etc. as ‘potential bicarbonate’ (</a:t>
+            </a:r>
+            <a:r>
+              <a:rPr lang="en-US" dirty="0">
+                <a:solidFill>
+                  <a:srgbClr val="2C7C9F"/>
+                </a:solidFill>
+              </a:rPr>
+              <a:t>Sabatini &amp; </a:t>
+            </a:r>
+            <a:r>
+              <a:rPr lang="en-US" dirty="0" err="1">
+                <a:solidFill>
+                  <a:srgbClr val="2C7C9F"/>
+                </a:solidFill>
+              </a:rPr>
+              <a:t>Kurtzman</a:t>
+            </a:r>
+            <a:r>
+              <a:rPr lang="en-US" dirty="0">
+                <a:solidFill>
+                  <a:srgbClr val="2C7C9F"/>
+                </a:solidFill>
+              </a:rPr>
+              <a:t>,</a:t>
+            </a:r>
+            <a:r>
+              <a:rPr lang="en-US" baseline="0" dirty="0">
+                <a:solidFill>
+                  <a:srgbClr val="2C7C9F"/>
+                </a:solidFill>
+              </a:rPr>
+              <a:t> </a:t>
+            </a:r>
+            <a:r>
+              <a:rPr lang="en-US" dirty="0">
+                <a:solidFill>
+                  <a:srgbClr val="2C7C9F"/>
+                </a:solidFill>
+              </a:rPr>
+              <a:t>JASN 2008)</a:t>
+            </a:r>
+          </a:p>
+          <a:p>
+            <a:r>
+              <a:rPr lang="en-US" dirty="0"/>
+              <a:t>Lactate is </a:t>
+            </a:r>
+            <a:r>
+              <a:rPr lang="en-US" dirty="0" err="1"/>
+              <a:t>metabolised</a:t>
+            </a:r>
+            <a:r>
+              <a:rPr lang="en-US" baseline="0" dirty="0"/>
+              <a:t> predominantly by the liver (90%); acetate is </a:t>
+            </a:r>
+            <a:r>
+              <a:rPr lang="en-US" baseline="0" dirty="0" err="1"/>
+              <a:t>metabolised</a:t>
+            </a:r>
+            <a:r>
+              <a:rPr lang="en-US" baseline="0" dirty="0"/>
+              <a:t> by most tissues.  </a:t>
+            </a:r>
             <a:endParaRPr lang="en-US" dirty="0"/>
           </a:p>
         </p:txBody>
@@ -1604,7 +1233,7 @@
           <a:p>
             <a:fld id="{006D3E59-5A04-AE42-A523-BB1A5D6CC948}" type="slidenum">
               <a:rPr lang="en-US" smtClean="0"/>
-              <a:t>6</a:t>
+              <a:t>4</a:t>
             </a:fld>
             <a:endParaRPr lang="en-US"/>
           </a:p>
@@ -1613,7 +1242,7 @@
     </p:spTree>
     <p:extLst>
       <p:ext uri="{BB962C8B-B14F-4D97-AF65-F5344CB8AC3E}">
-        <p14:creationId xmlns:p14="http://schemas.microsoft.com/office/powerpoint/2010/main" val="3764828158"/>
+        <p14:creationId xmlns:p14="http://schemas.microsoft.com/office/powerpoint/2010/main" val="1170205008"/>
       </p:ext>
     </p:extLst>
   </p:cSld>
@@ -1667,22 +1296,6 @@
           <a:bodyPr/>
           <a:lstStyle/>
           <a:p>
-            <a:r>
-              <a:rPr lang="en-US" dirty="0"/>
-              <a:t>Low Na in CCF / cirrhosis</a:t>
-            </a:r>
-            <a:r>
-              <a:rPr lang="en-US" baseline="0" dirty="0"/>
-              <a:t> = poor survival (Kim et al, NEJM 2008; </a:t>
-            </a:r>
-            <a:r>
-              <a:rPr lang="en-US" baseline="0" dirty="0" err="1"/>
-              <a:t>Rusinaru</a:t>
-            </a:r>
-            <a:r>
-              <a:rPr lang="en-US" baseline="0" dirty="0"/>
-              <a:t> et al, EJH 2012).  </a:t>
-            </a:r>
             <a:endParaRPr lang="en-US" dirty="0"/>
           </a:p>
         </p:txBody>
@@ -1702,9 +1315,9 @@
           <a:bodyPr/>
           <a:lstStyle/>
           <a:p>
-            <a:fld id="{C8DA16D7-9203-FC49-A2B3-F4DD40A5B0F6}" type="slidenum">
+            <a:fld id="{006D3E59-5A04-AE42-A523-BB1A5D6CC948}" type="slidenum">
               <a:rPr lang="en-US" smtClean="0"/>
-              <a:t>10</a:t>
+              <a:t>7</a:t>
             </a:fld>
             <a:endParaRPr lang="en-US"/>
           </a:p>
@@ -1713,7 +1326,7 @@
     </p:spTree>
     <p:extLst>
       <p:ext uri="{BB962C8B-B14F-4D97-AF65-F5344CB8AC3E}">
-        <p14:creationId xmlns:p14="http://schemas.microsoft.com/office/powerpoint/2010/main" val="435870064"/>
+        <p14:creationId xmlns:p14="http://schemas.microsoft.com/office/powerpoint/2010/main" val="3764828158"/>
       </p:ext>
     </p:extLst>
   </p:cSld>
@@ -1767,7 +1380,23 @@
           <a:bodyPr/>
           <a:lstStyle/>
           <a:p>
-            <a:endParaRPr lang="en-GB" dirty="0"/>
+            <a:r>
+              <a:rPr lang="en-US" dirty="0"/>
+              <a:t>Low Na in CCF / cirrhosis</a:t>
+            </a:r>
+            <a:r>
+              <a:rPr lang="en-US" baseline="0" dirty="0"/>
+              <a:t> = poor survival (Kim et al, NEJM 2008; </a:t>
+            </a:r>
+            <a:r>
+              <a:rPr lang="en-US" baseline="0" dirty="0" err="1"/>
+              <a:t>Rusinaru</a:t>
+            </a:r>
+            <a:r>
+              <a:rPr lang="en-US" baseline="0" dirty="0"/>
+              <a:t> et al, EJH 2012).  </a:t>
+            </a:r>
+            <a:endParaRPr lang="en-US" dirty="0"/>
           </a:p>
         </p:txBody>
       </p:sp>
@@ -1778,7 +1407,7 @@
             <a:spLocks noGrp="1"/>
           </p:cNvSpPr>
           <p:nvPr>
-            <p:ph type="sldNum" sz="quarter" idx="5"/>
+            <p:ph type="sldNum" sz="quarter" idx="10"/>
           </p:nvPr>
         </p:nvSpPr>
         <p:spPr/>
@@ -1786,9 +1415,9 @@
           <a:bodyPr/>
           <a:lstStyle/>
           <a:p>
-            <a:fld id="{C8546EAE-35C6-544C-85F4-27C4359C6327}" type="slidenum">
+            <a:fld id="{C8DA16D7-9203-FC49-A2B3-F4DD40A5B0F6}" type="slidenum">
               <a:rPr lang="en-US" smtClean="0"/>
-              <a:t>16</a:t>
+              <a:t>11</a:t>
             </a:fld>
             <a:endParaRPr lang="en-US"/>
           </a:p>
@@ -1797,7 +1426,7 @@
     </p:spTree>
     <p:extLst>
       <p:ext uri="{BB962C8B-B14F-4D97-AF65-F5344CB8AC3E}">
-        <p14:creationId xmlns:p14="http://schemas.microsoft.com/office/powerpoint/2010/main" val="786417184"/>
+        <p14:creationId xmlns:p14="http://schemas.microsoft.com/office/powerpoint/2010/main" val="435870064"/>
       </p:ext>
     </p:extLst>
   </p:cSld>
@@ -1873,6 +1502,90 @@
             <a:fld id="{C8546EAE-35C6-544C-85F4-27C4359C6327}" type="slidenum">
               <a:rPr lang="en-US" smtClean="0"/>
               <a:t>17</a:t>
+            </a:fld>
+            <a:endParaRPr lang="en-US"/>
+          </a:p>
+        </p:txBody>
+      </p:sp>
+    </p:spTree>
+    <p:extLst>
+      <p:ext uri="{BB962C8B-B14F-4D97-AF65-F5344CB8AC3E}">
+        <p14:creationId xmlns:p14="http://schemas.microsoft.com/office/powerpoint/2010/main" val="786417184"/>
+      </p:ext>
+    </p:extLst>
+  </p:cSld>
+  <p:clrMapOvr>
+    <a:masterClrMapping/>
+  </p:clrMapOvr>
+</p:notes>
+</file>
+
+<file path=ppt/notesSlides/notesSlide7.xml><?xml version="1.0" encoding="utf-8"?>
+<p:notes xmlns:a="http://schemas.openxmlformats.org/drawingml/2006/main" xmlns:r="http://schemas.openxmlformats.org/officeDocument/2006/relationships" xmlns:p="http://schemas.openxmlformats.org/presentationml/2006/main">
+  <p:cSld>
+    <p:spTree>
+      <p:nvGrpSpPr>
+        <p:cNvPr id="1" name=""/>
+        <p:cNvGrpSpPr/>
+        <p:nvPr/>
+      </p:nvGrpSpPr>
+      <p:grpSpPr>
+        <a:xfrm>
+          <a:off x="0" y="0"/>
+          <a:ext cx="0" cy="0"/>
+          <a:chOff x="0" y="0"/>
+          <a:chExt cx="0" cy="0"/>
+        </a:xfrm>
+      </p:grpSpPr>
+      <p:sp>
+        <p:nvSpPr>
+          <p:cNvPr id="2" name="Slide Image Placeholder 1"/>
+          <p:cNvSpPr>
+            <a:spLocks noGrp="1" noRot="1" noChangeAspect="1"/>
+          </p:cNvSpPr>
+          <p:nvPr>
+            <p:ph type="sldImg"/>
+          </p:nvPr>
+        </p:nvSpPr>
+        <p:spPr/>
+      </p:sp>
+      <p:sp>
+        <p:nvSpPr>
+          <p:cNvPr id="3" name="Notes Placeholder 2"/>
+          <p:cNvSpPr>
+            <a:spLocks noGrp="1"/>
+          </p:cNvSpPr>
+          <p:nvPr>
+            <p:ph type="body" idx="1"/>
+          </p:nvPr>
+        </p:nvSpPr>
+        <p:spPr/>
+        <p:txBody>
+          <a:bodyPr/>
+          <a:lstStyle/>
+          <a:p>
+            <a:endParaRPr lang="en-GB" dirty="0"/>
+          </a:p>
+        </p:txBody>
+      </p:sp>
+      <p:sp>
+        <p:nvSpPr>
+          <p:cNvPr id="4" name="Slide Number Placeholder 3"/>
+          <p:cNvSpPr>
+            <a:spLocks noGrp="1"/>
+          </p:cNvSpPr>
+          <p:nvPr>
+            <p:ph type="sldNum" sz="quarter" idx="5"/>
+          </p:nvPr>
+        </p:nvSpPr>
+        <p:spPr/>
+        <p:txBody>
+          <a:bodyPr/>
+          <a:lstStyle/>
+          <a:p>
+            <a:fld id="{C8546EAE-35C6-544C-85F4-27C4359C6327}" type="slidenum">
+              <a:rPr lang="en-US" smtClean="0"/>
+              <a:t>18</a:t>
             </a:fld>
             <a:endParaRPr lang="en-US"/>
           </a:p>
@@ -2022,7 +1735,7 @@
           <a:p>
             <a:fld id="{421C066B-DB43-CF4F-8541-8454BEF32DA5}" type="datetimeFigureOut">
               <a:rPr lang="en-GB" smtClean="0"/>
-              <a:t>18/12/2024</a:t>
+              <a:t>11/05/2026</a:t>
             </a:fld>
             <a:endParaRPr lang="en-GB"/>
           </a:p>
@@ -2192,7 +1905,7 @@
           <a:p>
             <a:fld id="{421C066B-DB43-CF4F-8541-8454BEF32DA5}" type="datetimeFigureOut">
               <a:rPr lang="en-GB" smtClean="0"/>
-              <a:t>18/12/2024</a:t>
+              <a:t>11/05/2026</a:t>
             </a:fld>
             <a:endParaRPr lang="en-GB"/>
           </a:p>
@@ -2372,7 +2085,7 @@
           <a:p>
             <a:fld id="{421C066B-DB43-CF4F-8541-8454BEF32DA5}" type="datetimeFigureOut">
               <a:rPr lang="en-GB" smtClean="0"/>
-              <a:t>18/12/2024</a:t>
+              <a:t>11/05/2026</a:t>
             </a:fld>
             <a:endParaRPr lang="en-GB"/>
           </a:p>
@@ -2542,7 +2255,7 @@
           <a:p>
             <a:fld id="{421C066B-DB43-CF4F-8541-8454BEF32DA5}" type="datetimeFigureOut">
               <a:rPr lang="en-GB" smtClean="0"/>
-              <a:t>18/12/2024</a:t>
+              <a:t>11/05/2026</a:t>
             </a:fld>
             <a:endParaRPr lang="en-GB"/>
           </a:p>
@@ -2786,7 +2499,7 @@
           <a:p>
             <a:fld id="{421C066B-DB43-CF4F-8541-8454BEF32DA5}" type="datetimeFigureOut">
               <a:rPr lang="en-GB" smtClean="0"/>
-              <a:t>18/12/2024</a:t>
+              <a:t>11/05/2026</a:t>
             </a:fld>
             <a:endParaRPr lang="en-GB"/>
           </a:p>
@@ -3018,7 +2731,7 @@
           <a:p>
             <a:fld id="{421C066B-DB43-CF4F-8541-8454BEF32DA5}" type="datetimeFigureOut">
               <a:rPr lang="en-GB" smtClean="0"/>
-              <a:t>18/12/2024</a:t>
+              <a:t>11/05/2026</a:t>
             </a:fld>
             <a:endParaRPr lang="en-GB"/>
           </a:p>
@@ -3385,7 +3098,7 @@
           <a:p>
             <a:fld id="{421C066B-DB43-CF4F-8541-8454BEF32DA5}" type="datetimeFigureOut">
               <a:rPr lang="en-GB" smtClean="0"/>
-              <a:t>18/12/2024</a:t>
+              <a:t>11/05/2026</a:t>
             </a:fld>
             <a:endParaRPr lang="en-GB"/>
           </a:p>
@@ -3503,7 +3216,7 @@
           <a:p>
             <a:fld id="{421C066B-DB43-CF4F-8541-8454BEF32DA5}" type="datetimeFigureOut">
               <a:rPr lang="en-GB" smtClean="0"/>
-              <a:t>18/12/2024</a:t>
+              <a:t>11/05/2026</a:t>
             </a:fld>
             <a:endParaRPr lang="en-GB"/>
           </a:p>
@@ -3598,7 +3311,7 @@
           <a:p>
             <a:fld id="{421C066B-DB43-CF4F-8541-8454BEF32DA5}" type="datetimeFigureOut">
               <a:rPr lang="en-GB" smtClean="0"/>
-              <a:t>18/12/2024</a:t>
+              <a:t>11/05/2026</a:t>
             </a:fld>
             <a:endParaRPr lang="en-GB"/>
           </a:p>
@@ -3875,7 +3588,7 @@
           <a:p>
             <a:fld id="{421C066B-DB43-CF4F-8541-8454BEF32DA5}" type="datetimeFigureOut">
               <a:rPr lang="en-GB" smtClean="0"/>
-              <a:t>18/12/2024</a:t>
+              <a:t>11/05/2026</a:t>
             </a:fld>
             <a:endParaRPr lang="en-GB"/>
           </a:p>
@@ -4132,7 +3845,7 @@
           <a:p>
             <a:fld id="{421C066B-DB43-CF4F-8541-8454BEF32DA5}" type="datetimeFigureOut">
               <a:rPr lang="en-GB" smtClean="0"/>
-              <a:t>18/12/2024</a:t>
+              <a:t>11/05/2026</a:t>
             </a:fld>
             <a:endParaRPr lang="en-GB"/>
           </a:p>
@@ -4345,7 +4058,7 @@
           <a:p>
             <a:fld id="{421C066B-DB43-CF4F-8541-8454BEF32DA5}" type="datetimeFigureOut">
               <a:rPr lang="en-GB" smtClean="0"/>
-              <a:t>18/12/2024</a:t>
+              <a:t>11/05/2026</a:t>
             </a:fld>
             <a:endParaRPr lang="en-GB"/>
           </a:p>
@@ -4785,14 +4498,14 @@
           </a:ln>
           <a:extLst>
             <a:ext uri="{909E8E84-426E-40dd-AFC4-6F175D3DCCD1}">
-              <a14:hiddenFill xmlns:a14="http://schemas.microsoft.com/office/drawing/2010/main" xmlns="">
+              <a14:hiddenFill xmlns="" xmlns:a14="http://schemas.microsoft.com/office/drawing/2010/main">
                 <a:solidFill>
                   <a:srgbClr val="FFFFFF"/>
                 </a:solidFill>
               </a14:hiddenFill>
             </a:ext>
             <a:ext uri="{91240B29-F687-4f45-9708-019B960494DF}">
-              <a14:hiddenLine xmlns:a14="http://schemas.microsoft.com/office/drawing/2010/main" xmlns="" w="9525">
+              <a14:hiddenLine xmlns="" xmlns:a14="http://schemas.microsoft.com/office/drawing/2010/main" w="9525">
                 <a:solidFill>
                   <a:srgbClr val="000000"/>
                 </a:solidFill>
@@ -6973,6 +6686,706 @@
           </a:p>
         </p:txBody>
       </p:sp>
+    </p:spTree>
+    <p:extLst>
+      <p:ext uri="{BB962C8B-B14F-4D97-AF65-F5344CB8AC3E}">
+        <p14:creationId xmlns:p14="http://schemas.microsoft.com/office/powerpoint/2010/main" val="2853650850"/>
+      </p:ext>
+    </p:extLst>
+  </p:cSld>
+  <p:clrMapOvr>
+    <a:masterClrMapping/>
+  </p:clrMapOvr>
+</p:sld>
+</file>
+
+<file path=ppt/slides/slide11.xml><?xml version="1.0" encoding="utf-8"?>
+<p:sld xmlns:a="http://schemas.openxmlformats.org/drawingml/2006/main" xmlns:r="http://schemas.openxmlformats.org/officeDocument/2006/relationships" xmlns:p="http://schemas.openxmlformats.org/presentationml/2006/main">
+  <p:cSld>
+    <p:spTree>
+      <p:nvGrpSpPr>
+        <p:cNvPr id="1" name=""/>
+        <p:cNvGrpSpPr/>
+        <p:nvPr/>
+      </p:nvGrpSpPr>
+      <p:grpSpPr>
+        <a:xfrm>
+          <a:off x="0" y="0"/>
+          <a:ext cx="0" cy="0"/>
+          <a:chOff x="0" y="0"/>
+          <a:chExt cx="0" cy="0"/>
+        </a:xfrm>
+      </p:grpSpPr>
+      <p:cxnSp>
+        <p:nvCxnSpPr>
+          <p:cNvPr id="5" name="Straight Arrow Connector 4"/>
+          <p:cNvCxnSpPr/>
+          <p:nvPr/>
+        </p:nvCxnSpPr>
+        <p:spPr>
+          <a:xfrm flipV="1">
+            <a:off x="2078551" y="2901428"/>
+            <a:ext cx="0" cy="1078840"/>
+          </a:xfrm>
+          <a:prstGeom prst="straightConnector1">
+            <a:avLst/>
+          </a:prstGeom>
+          <a:ln w="38100" cmpd="sng">
+            <a:solidFill>
+              <a:schemeClr val="tx1"/>
+            </a:solidFill>
+            <a:tailEnd type="arrow"/>
+          </a:ln>
+          <a:effectLst/>
+        </p:spPr>
+        <p:style>
+          <a:lnRef idx="2">
+            <a:schemeClr val="accent1"/>
+          </a:lnRef>
+          <a:fillRef idx="0">
+            <a:schemeClr val="accent1"/>
+          </a:fillRef>
+          <a:effectRef idx="1">
+            <a:schemeClr val="accent1"/>
+          </a:effectRef>
+          <a:fontRef idx="minor">
+            <a:schemeClr val="tx1"/>
+          </a:fontRef>
+        </p:style>
+      </p:cxnSp>
+      <p:cxnSp>
+        <p:nvCxnSpPr>
+          <p:cNvPr id="7" name="Straight Arrow Connector 6"/>
+          <p:cNvCxnSpPr/>
+          <p:nvPr/>
+        </p:nvCxnSpPr>
+        <p:spPr>
+          <a:xfrm>
+            <a:off x="627736" y="2290201"/>
+            <a:ext cx="833528" cy="0"/>
+          </a:xfrm>
+          <a:prstGeom prst="straightConnector1">
+            <a:avLst/>
+          </a:prstGeom>
+          <a:ln w="38100" cmpd="sng">
+            <a:solidFill>
+              <a:schemeClr val="tx1"/>
+            </a:solidFill>
+            <a:tailEnd type="arrow"/>
+          </a:ln>
+          <a:effectLst/>
+        </p:spPr>
+        <p:style>
+          <a:lnRef idx="2">
+            <a:schemeClr val="accent1"/>
+          </a:lnRef>
+          <a:fillRef idx="0">
+            <a:schemeClr val="accent1"/>
+          </a:fillRef>
+          <a:effectRef idx="1">
+            <a:schemeClr val="accent1"/>
+          </a:effectRef>
+          <a:fontRef idx="minor">
+            <a:schemeClr val="tx1"/>
+          </a:fontRef>
+        </p:style>
+      </p:cxnSp>
+      <p:cxnSp>
+        <p:nvCxnSpPr>
+          <p:cNvPr id="9" name="Straight Connector 8"/>
+          <p:cNvCxnSpPr/>
+          <p:nvPr/>
+        </p:nvCxnSpPr>
+        <p:spPr>
+          <a:xfrm>
+            <a:off x="2656015" y="2290201"/>
+            <a:ext cx="3568612" cy="0"/>
+          </a:xfrm>
+          <a:prstGeom prst="line">
+            <a:avLst/>
+          </a:prstGeom>
+          <a:ln w="38100" cmpd="sng">
+            <a:solidFill>
+              <a:schemeClr val="tx1"/>
+            </a:solidFill>
+          </a:ln>
+          <a:effectLst/>
+        </p:spPr>
+        <p:style>
+          <a:lnRef idx="2">
+            <a:schemeClr val="accent1"/>
+          </a:lnRef>
+          <a:fillRef idx="0">
+            <a:schemeClr val="accent1"/>
+          </a:fillRef>
+          <a:effectRef idx="1">
+            <a:schemeClr val="accent1"/>
+          </a:effectRef>
+          <a:fontRef idx="minor">
+            <a:schemeClr val="tx1"/>
+          </a:fontRef>
+        </p:style>
+      </p:cxnSp>
+      <p:cxnSp>
+        <p:nvCxnSpPr>
+          <p:cNvPr id="11" name="Straight Arrow Connector 10"/>
+          <p:cNvCxnSpPr/>
+          <p:nvPr/>
+        </p:nvCxnSpPr>
+        <p:spPr>
+          <a:xfrm>
+            <a:off x="6224627" y="2290201"/>
+            <a:ext cx="0" cy="938135"/>
+          </a:xfrm>
+          <a:prstGeom prst="straightConnector1">
+            <a:avLst/>
+          </a:prstGeom>
+          <a:ln w="38100" cmpd="sng">
+            <a:solidFill>
+              <a:schemeClr val="tx1"/>
+            </a:solidFill>
+            <a:tailEnd type="arrow"/>
+          </a:ln>
+          <a:effectLst/>
+        </p:spPr>
+        <p:style>
+          <a:lnRef idx="2">
+            <a:schemeClr val="accent1"/>
+          </a:lnRef>
+          <a:fillRef idx="0">
+            <a:schemeClr val="accent1"/>
+          </a:fillRef>
+          <a:effectRef idx="1">
+            <a:schemeClr val="accent1"/>
+          </a:effectRef>
+          <a:fontRef idx="minor">
+            <a:schemeClr val="tx1"/>
+          </a:fontRef>
+        </p:style>
+      </p:cxnSp>
+      <p:cxnSp>
+        <p:nvCxnSpPr>
+          <p:cNvPr id="13" name="Straight Arrow Connector 12"/>
+          <p:cNvCxnSpPr/>
+          <p:nvPr/>
+        </p:nvCxnSpPr>
+        <p:spPr>
+          <a:xfrm flipH="1">
+            <a:off x="2695707" y="4423745"/>
+            <a:ext cx="2339991" cy="0"/>
+          </a:xfrm>
+          <a:prstGeom prst="straightConnector1">
+            <a:avLst/>
+          </a:prstGeom>
+          <a:ln w="38100" cmpd="sng">
+            <a:solidFill>
+              <a:schemeClr val="tx1"/>
+            </a:solidFill>
+            <a:tailEnd type="arrow"/>
+          </a:ln>
+          <a:effectLst/>
+        </p:spPr>
+        <p:style>
+          <a:lnRef idx="2">
+            <a:schemeClr val="accent1"/>
+          </a:lnRef>
+          <a:fillRef idx="0">
+            <a:schemeClr val="accent1"/>
+          </a:fillRef>
+          <a:effectRef idx="1">
+            <a:schemeClr val="accent1"/>
+          </a:effectRef>
+          <a:fontRef idx="minor">
+            <a:schemeClr val="tx1"/>
+          </a:fontRef>
+        </p:style>
+      </p:cxnSp>
+      <p:sp>
+        <p:nvSpPr>
+          <p:cNvPr id="2" name="Oval 1"/>
+          <p:cNvSpPr/>
+          <p:nvPr/>
+        </p:nvSpPr>
+        <p:spPr>
+          <a:xfrm>
+            <a:off x="1642044" y="1827921"/>
+            <a:ext cx="872883" cy="872883"/>
+          </a:xfrm>
+          <a:prstGeom prst="ellipse">
+            <a:avLst/>
+          </a:prstGeom>
+          <a:noFill/>
+          <a:ln w="38100" cmpd="sng">
+            <a:solidFill>
+              <a:schemeClr val="tx1"/>
+            </a:solidFill>
+          </a:ln>
+          <a:effectLst/>
+        </p:spPr>
+        <p:style>
+          <a:lnRef idx="1">
+            <a:schemeClr val="accent1"/>
+          </a:lnRef>
+          <a:fillRef idx="3">
+            <a:schemeClr val="accent1"/>
+          </a:fillRef>
+          <a:effectRef idx="2">
+            <a:schemeClr val="accent1"/>
+          </a:effectRef>
+          <a:fontRef idx="minor">
+            <a:schemeClr val="lt1"/>
+          </a:fontRef>
+        </p:style>
+        <p:txBody>
+          <a:bodyPr rtlCol="0" anchor="ctr"/>
+          <a:lstStyle/>
+          <a:p>
+            <a:pPr algn="ctr"/>
+            <a:endParaRPr lang="en-US"/>
+          </a:p>
+        </p:txBody>
+      </p:sp>
+      <p:sp>
+        <p:nvSpPr>
+          <p:cNvPr id="3" name="Cross 2"/>
+          <p:cNvSpPr/>
+          <p:nvPr/>
+        </p:nvSpPr>
+        <p:spPr>
+          <a:xfrm rot="2700000">
+            <a:off x="1642044" y="1827921"/>
+            <a:ext cx="872883" cy="872883"/>
+          </a:xfrm>
+          <a:prstGeom prst="plus">
+            <a:avLst>
+              <a:gd name="adj" fmla="val 50000"/>
+            </a:avLst>
+          </a:prstGeom>
+          <a:ln w="38100" cmpd="sng">
+            <a:solidFill>
+              <a:srgbClr val="000000"/>
+            </a:solidFill>
+          </a:ln>
+          <a:effectLst/>
+        </p:spPr>
+        <p:style>
+          <a:lnRef idx="1">
+            <a:schemeClr val="accent1"/>
+          </a:lnRef>
+          <a:fillRef idx="3">
+            <a:schemeClr val="accent1"/>
+          </a:fillRef>
+          <a:effectRef idx="2">
+            <a:schemeClr val="accent1"/>
+          </a:effectRef>
+          <a:fontRef idx="minor">
+            <a:schemeClr val="lt1"/>
+          </a:fontRef>
+        </p:style>
+        <p:txBody>
+          <a:bodyPr rtlCol="0" anchor="ctr"/>
+          <a:lstStyle/>
+          <a:p>
+            <a:pPr algn="ctr"/>
+            <a:endParaRPr lang="en-US"/>
+          </a:p>
+        </p:txBody>
+      </p:sp>
+      <p:sp>
+        <p:nvSpPr>
+          <p:cNvPr id="15" name="TextBox 14"/>
+          <p:cNvSpPr txBox="1"/>
+          <p:nvPr/>
+        </p:nvSpPr>
+        <p:spPr>
+          <a:xfrm>
+            <a:off x="1659617" y="2085693"/>
+            <a:ext cx="319468" cy="369332"/>
+          </a:xfrm>
+          <a:prstGeom prst="rect">
+            <a:avLst/>
+          </a:prstGeom>
+          <a:noFill/>
+        </p:spPr>
+        <p:txBody>
+          <a:bodyPr wrap="none" rtlCol="0">
+            <a:spAutoFit/>
+          </a:bodyPr>
+          <a:lstStyle/>
+          <a:p>
+            <a:r>
+              <a:rPr lang="en-US" dirty="0"/>
+              <a:t>+</a:t>
+            </a:r>
+          </a:p>
+        </p:txBody>
+      </p:sp>
+      <p:sp>
+        <p:nvSpPr>
+          <p:cNvPr id="16" name="TextBox 15"/>
+          <p:cNvSpPr txBox="1"/>
+          <p:nvPr/>
+        </p:nvSpPr>
+        <p:spPr>
+          <a:xfrm>
+            <a:off x="1880091" y="2329885"/>
+            <a:ext cx="383601" cy="369332"/>
+          </a:xfrm>
+          <a:prstGeom prst="rect">
+            <a:avLst/>
+          </a:prstGeom>
+          <a:noFill/>
+        </p:spPr>
+        <p:txBody>
+          <a:bodyPr wrap="none" rtlCol="0">
+            <a:spAutoFit/>
+          </a:bodyPr>
+          <a:lstStyle/>
+          <a:p>
+            <a:r>
+              <a:rPr lang="en-US" dirty="0"/>
+              <a:t> </a:t>
+            </a:r>
+            <a:r>
+              <a:rPr lang="en-GB" dirty="0"/>
+              <a:t>+</a:t>
+            </a:r>
+            <a:r>
+              <a:rPr lang="en-US" dirty="0"/>
+              <a:t> </a:t>
+            </a:r>
+          </a:p>
+        </p:txBody>
+      </p:sp>
+      <p:sp>
+        <p:nvSpPr>
+          <p:cNvPr id="18" name="TextBox 17"/>
+          <p:cNvSpPr txBox="1"/>
+          <p:nvPr/>
+        </p:nvSpPr>
+        <p:spPr>
+          <a:xfrm>
+            <a:off x="1375962" y="1404968"/>
+            <a:ext cx="1422322" cy="369332"/>
+          </a:xfrm>
+          <a:prstGeom prst="rect">
+            <a:avLst/>
+          </a:prstGeom>
+          <a:noFill/>
+        </p:spPr>
+        <p:txBody>
+          <a:bodyPr wrap="none" rtlCol="0">
+            <a:spAutoFit/>
+          </a:bodyPr>
+          <a:lstStyle/>
+          <a:p>
+            <a:pPr algn="ctr"/>
+            <a:r>
+              <a:rPr lang="en-US" i="1" dirty="0"/>
+              <a:t>hypothalamus</a:t>
+            </a:r>
+          </a:p>
+        </p:txBody>
+      </p:sp>
+      <p:sp>
+        <p:nvSpPr>
+          <p:cNvPr id="20" name="Rounded Rectangle 19"/>
+          <p:cNvSpPr/>
+          <p:nvPr/>
+        </p:nvSpPr>
+        <p:spPr>
+          <a:xfrm>
+            <a:off x="5254003" y="3418129"/>
+            <a:ext cx="3499861" cy="2105236"/>
+          </a:xfrm>
+          <a:prstGeom prst="roundRect">
+            <a:avLst>
+              <a:gd name="adj" fmla="val 10481"/>
+            </a:avLst>
+          </a:prstGeom>
+          <a:noFill/>
+          <a:ln w="38100" cmpd="sng">
+            <a:solidFill>
+              <a:schemeClr val="tx1"/>
+            </a:solidFill>
+          </a:ln>
+          <a:effectLst/>
+        </p:spPr>
+        <p:style>
+          <a:lnRef idx="1">
+            <a:schemeClr val="accent1"/>
+          </a:lnRef>
+          <a:fillRef idx="3">
+            <a:schemeClr val="accent1"/>
+          </a:fillRef>
+          <a:effectRef idx="2">
+            <a:schemeClr val="accent1"/>
+          </a:effectRef>
+          <a:fontRef idx="minor">
+            <a:schemeClr val="lt1"/>
+          </a:fontRef>
+        </p:style>
+        <p:txBody>
+          <a:bodyPr rtlCol="0" anchor="ctr"/>
+          <a:lstStyle/>
+          <a:p>
+            <a:pPr algn="ctr"/>
+            <a:endParaRPr lang="en-US"/>
+          </a:p>
+        </p:txBody>
+      </p:sp>
+      <p:sp>
+        <p:nvSpPr>
+          <p:cNvPr id="21" name="TextBox 20"/>
+          <p:cNvSpPr txBox="1"/>
+          <p:nvPr/>
+        </p:nvSpPr>
+        <p:spPr>
+          <a:xfrm>
+            <a:off x="5412341" y="3570528"/>
+            <a:ext cx="3052826" cy="369332"/>
+          </a:xfrm>
+          <a:prstGeom prst="rect">
+            <a:avLst/>
+          </a:prstGeom>
+          <a:noFill/>
+        </p:spPr>
+        <p:txBody>
+          <a:bodyPr wrap="none" rtlCol="0">
+            <a:spAutoFit/>
+          </a:bodyPr>
+          <a:lstStyle/>
+          <a:p>
+            <a:pPr algn="ctr"/>
+            <a:r>
+              <a:rPr lang="en-US" b="1" dirty="0"/>
+              <a:t>Renal free water excretion</a:t>
+            </a:r>
+          </a:p>
+        </p:txBody>
+      </p:sp>
+      <p:sp>
+        <p:nvSpPr>
+          <p:cNvPr id="22" name="TextBox 21"/>
+          <p:cNvSpPr txBox="1"/>
+          <p:nvPr/>
+        </p:nvSpPr>
+        <p:spPr>
+          <a:xfrm>
+            <a:off x="1084539" y="4133386"/>
+            <a:ext cx="1937854" cy="966418"/>
+          </a:xfrm>
+          <a:prstGeom prst="rect">
+            <a:avLst/>
+          </a:prstGeom>
+          <a:noFill/>
+        </p:spPr>
+        <p:txBody>
+          <a:bodyPr wrap="square" rtlCol="0">
+            <a:spAutoFit/>
+          </a:bodyPr>
+          <a:lstStyle/>
+          <a:p>
+            <a:pPr algn="ctr">
+              <a:lnSpc>
+                <a:spcPct val="120000"/>
+              </a:lnSpc>
+            </a:pPr>
+            <a:r>
+              <a:rPr lang="en-US" sz="2400" dirty="0"/>
+              <a:t>[Na</a:t>
+            </a:r>
+            <a:r>
+              <a:rPr lang="en-US" sz="2400" baseline="30000" dirty="0"/>
+              <a:t>+</a:t>
+            </a:r>
+            <a:r>
+              <a:rPr lang="en-US" sz="2400" dirty="0"/>
+              <a:t>]</a:t>
+            </a:r>
+          </a:p>
+          <a:p>
+            <a:pPr algn="ctr">
+              <a:lnSpc>
+                <a:spcPct val="120000"/>
+              </a:lnSpc>
+            </a:pPr>
+            <a:r>
+              <a:rPr lang="en-US" sz="2400" dirty="0"/>
+              <a:t>(tonicity)</a:t>
+            </a:r>
+          </a:p>
+        </p:txBody>
+      </p:sp>
+      <p:sp>
+        <p:nvSpPr>
+          <p:cNvPr id="26" name="TextBox 25"/>
+          <p:cNvSpPr txBox="1"/>
+          <p:nvPr/>
+        </p:nvSpPr>
+        <p:spPr>
+          <a:xfrm>
+            <a:off x="5037215" y="1774300"/>
+            <a:ext cx="1187412" cy="369332"/>
+          </a:xfrm>
+          <a:prstGeom prst="rect">
+            <a:avLst/>
+          </a:prstGeom>
+          <a:noFill/>
+        </p:spPr>
+        <p:txBody>
+          <a:bodyPr wrap="none" rtlCol="0">
+            <a:spAutoFit/>
+          </a:bodyPr>
+          <a:lstStyle/>
+          <a:p>
+            <a:pPr algn="ctr"/>
+            <a:r>
+              <a:rPr lang="en-US" i="1" dirty="0"/>
+              <a:t>ADH (AVP)</a:t>
+            </a:r>
+          </a:p>
+        </p:txBody>
+      </p:sp>
+      <p:sp>
+        <p:nvSpPr>
+          <p:cNvPr id="4" name="TextBox 3"/>
+          <p:cNvSpPr txBox="1"/>
+          <p:nvPr/>
+        </p:nvSpPr>
+        <p:spPr>
+          <a:xfrm>
+            <a:off x="5472106" y="3994492"/>
+            <a:ext cx="3281758" cy="1412694"/>
+          </a:xfrm>
+          <a:prstGeom prst="rect">
+            <a:avLst/>
+          </a:prstGeom>
+          <a:noFill/>
+        </p:spPr>
+        <p:txBody>
+          <a:bodyPr wrap="square" rtlCol="0">
+            <a:spAutoFit/>
+          </a:bodyPr>
+          <a:lstStyle/>
+          <a:p>
+            <a:pPr marL="285750" indent="-285750">
+              <a:lnSpc>
+                <a:spcPct val="120000"/>
+              </a:lnSpc>
+              <a:buFont typeface="Arial"/>
+              <a:buChar char="•"/>
+            </a:pPr>
+            <a:r>
+              <a:rPr lang="en-US" dirty="0"/>
+              <a:t>GFR</a:t>
+            </a:r>
+          </a:p>
+          <a:p>
+            <a:pPr marL="285750" indent="-285750">
+              <a:lnSpc>
+                <a:spcPct val="120000"/>
+              </a:lnSpc>
+              <a:buFont typeface="Arial"/>
+              <a:buChar char="•"/>
+            </a:pPr>
+            <a:r>
+              <a:rPr lang="en-US" dirty="0"/>
+              <a:t>diluting segment</a:t>
+            </a:r>
+          </a:p>
+          <a:p>
+            <a:pPr marL="285750" indent="-285750">
+              <a:lnSpc>
+                <a:spcPct val="120000"/>
+              </a:lnSpc>
+              <a:buFont typeface="Arial"/>
+              <a:buChar char="•"/>
+            </a:pPr>
+            <a:r>
+              <a:rPr lang="en-US" dirty="0"/>
+              <a:t>ADH-responsive CDs</a:t>
+            </a:r>
+          </a:p>
+          <a:p>
+            <a:pPr marL="285750" indent="-285750">
+              <a:lnSpc>
+                <a:spcPct val="120000"/>
+              </a:lnSpc>
+              <a:buFont typeface="Arial"/>
+              <a:buChar char="•"/>
+            </a:pPr>
+            <a:r>
+              <a:rPr lang="en-US" dirty="0" err="1"/>
+              <a:t>osmolar</a:t>
+            </a:r>
+            <a:r>
+              <a:rPr lang="en-US" dirty="0"/>
+              <a:t> load</a:t>
+            </a:r>
+          </a:p>
+        </p:txBody>
+      </p:sp>
+      <p:sp>
+        <p:nvSpPr>
+          <p:cNvPr id="42" name="TextBox 41"/>
+          <p:cNvSpPr txBox="1"/>
+          <p:nvPr/>
+        </p:nvSpPr>
+        <p:spPr>
+          <a:xfrm>
+            <a:off x="6327932" y="2859004"/>
+            <a:ext cx="300082" cy="369332"/>
+          </a:xfrm>
+          <a:prstGeom prst="rect">
+            <a:avLst/>
+          </a:prstGeom>
+          <a:noFill/>
+        </p:spPr>
+        <p:txBody>
+          <a:bodyPr wrap="none" rtlCol="0">
+            <a:spAutoFit/>
+          </a:bodyPr>
+          <a:lstStyle/>
+          <a:p>
+            <a:r>
+              <a:rPr lang="mr-IN" dirty="0"/>
+              <a:t>–</a:t>
+            </a:r>
+            <a:endParaRPr lang="en-US" dirty="0"/>
+          </a:p>
+        </p:txBody>
+      </p:sp>
+      <p:sp>
+        <p:nvSpPr>
+          <p:cNvPr id="43" name="TextBox 42"/>
+          <p:cNvSpPr txBox="1"/>
+          <p:nvPr/>
+        </p:nvSpPr>
+        <p:spPr>
+          <a:xfrm>
+            <a:off x="2654046" y="3959702"/>
+            <a:ext cx="319468" cy="369332"/>
+          </a:xfrm>
+          <a:prstGeom prst="rect">
+            <a:avLst/>
+          </a:prstGeom>
+          <a:noFill/>
+        </p:spPr>
+        <p:txBody>
+          <a:bodyPr wrap="none" rtlCol="0">
+            <a:spAutoFit/>
+          </a:bodyPr>
+          <a:lstStyle/>
+          <a:p>
+            <a:r>
+              <a:rPr lang="en-GB" dirty="0"/>
+              <a:t>+</a:t>
+            </a:r>
+            <a:endParaRPr lang="en-US" dirty="0"/>
+          </a:p>
+        </p:txBody>
+      </p:sp>
       <p:sp>
         <p:nvSpPr>
           <p:cNvPr id="6" name="TextBox 5"/>
@@ -7977,7 +8390,7 @@
 </p:sld>
 </file>
 
-<file path=ppt/slides/slide11.xml><?xml version="1.0" encoding="utf-8"?>
+<file path=ppt/slides/slide12.xml><?xml version="1.0" encoding="utf-8"?>
 <p:sld xmlns:a="http://schemas.openxmlformats.org/drawingml/2006/main" xmlns:r="http://schemas.openxmlformats.org/officeDocument/2006/relationships" xmlns:p="http://schemas.openxmlformats.org/presentationml/2006/main">
   <p:cSld>
     <p:spTree>
@@ -9195,7 +9608,7 @@
 </p:sld>
 </file>
 
-<file path=ppt/slides/slide12.xml><?xml version="1.0" encoding="utf-8"?>
+<file path=ppt/slides/slide13.xml><?xml version="1.0" encoding="utf-8"?>
 <p:sld xmlns:a="http://schemas.openxmlformats.org/drawingml/2006/main" xmlns:r="http://schemas.openxmlformats.org/officeDocument/2006/relationships" xmlns:p="http://schemas.openxmlformats.org/presentationml/2006/main">
   <p:cSld>
     <p:spTree>
@@ -11004,7 +11417,7 @@
 </p:sld>
 </file>
 
-<file path=ppt/slides/slide13.xml><?xml version="1.0" encoding="utf-8"?>
+<file path=ppt/slides/slide14.xml><?xml version="1.0" encoding="utf-8"?>
 <p:sld xmlns:a="http://schemas.openxmlformats.org/drawingml/2006/main" xmlns:r="http://schemas.openxmlformats.org/officeDocument/2006/relationships" xmlns:p="http://schemas.openxmlformats.org/presentationml/2006/main">
   <p:cSld>
     <p:spTree>
@@ -12238,7 +12651,7 @@
 </p:sld>
 </file>
 
-<file path=ppt/slides/slide14.xml><?xml version="1.0" encoding="utf-8"?>
+<file path=ppt/slides/slide15.xml><?xml version="1.0" encoding="utf-8"?>
 <p:sld xmlns:a="http://schemas.openxmlformats.org/drawingml/2006/main" xmlns:r="http://schemas.openxmlformats.org/officeDocument/2006/relationships" xmlns:p="http://schemas.openxmlformats.org/presentationml/2006/main">
   <p:cSld>
     <p:spTree>
@@ -13918,7 +14331,7 @@
 </p:sld>
 </file>
 
-<file path=ppt/slides/slide15.xml><?xml version="1.0" encoding="utf-8"?>
+<file path=ppt/slides/slide16.xml><?xml version="1.0" encoding="utf-8"?>
 <p:sld xmlns:a="http://schemas.openxmlformats.org/drawingml/2006/main" xmlns:r="http://schemas.openxmlformats.org/officeDocument/2006/relationships" xmlns:p="http://schemas.openxmlformats.org/presentationml/2006/main">
   <p:cSld>
     <p:spTree>
@@ -14012,7 +14425,7 @@
 </p:sld>
 </file>
 
-<file path=ppt/slides/slide16.xml><?xml version="1.0" encoding="utf-8"?>
+<file path=ppt/slides/slide17.xml><?xml version="1.0" encoding="utf-8"?>
 <p:sld xmlns:a="http://schemas.openxmlformats.org/drawingml/2006/main" xmlns:r="http://schemas.openxmlformats.org/officeDocument/2006/relationships" xmlns:p="http://schemas.openxmlformats.org/presentationml/2006/main">
   <p:cSld>
     <p:spTree>
@@ -15594,7 +16007,7 @@
 </p:sld>
 </file>
 
-<file path=ppt/slides/slide17.xml><?xml version="1.0" encoding="utf-8"?>
+<file path=ppt/slides/slide18.xml><?xml version="1.0" encoding="utf-8"?>
 <p:sld xmlns:a="http://schemas.openxmlformats.org/drawingml/2006/main" xmlns:r="http://schemas.openxmlformats.org/officeDocument/2006/relationships" xmlns:p="http://schemas.openxmlformats.org/presentationml/2006/main">
   <p:cSld>
     <p:spTree>
@@ -19043,6 +19456,1902 @@
 </file>
 
 <file path=ppt/slides/slide2.xml><?xml version="1.0" encoding="utf-8"?>
+<p:sld xmlns:a="http://schemas.openxmlformats.org/drawingml/2006/main" xmlns:r="http://schemas.openxmlformats.org/officeDocument/2006/relationships" xmlns:p="http://schemas.openxmlformats.org/presentationml/2006/main">
+  <p:cSld>
+    <p:spTree>
+      <p:nvGrpSpPr>
+        <p:cNvPr id="1" name=""/>
+        <p:cNvGrpSpPr/>
+        <p:nvPr/>
+      </p:nvGrpSpPr>
+      <p:grpSpPr>
+        <a:xfrm>
+          <a:off x="0" y="0"/>
+          <a:ext cx="0" cy="0"/>
+          <a:chOff x="0" y="0"/>
+          <a:chExt cx="0" cy="0"/>
+        </a:xfrm>
+      </p:grpSpPr>
+      <p:grpSp>
+        <p:nvGrpSpPr>
+          <p:cNvPr id="25" name="Group 24">
+            <a:extLst>
+              <a:ext uri="{FF2B5EF4-FFF2-40B4-BE49-F238E27FC236}">
+                <a16:creationId xmlns:a16="http://schemas.microsoft.com/office/drawing/2014/main" id="{62A4D259-101E-6594-864F-09DBF18AD166}"/>
+              </a:ext>
+            </a:extLst>
+          </p:cNvPr>
+          <p:cNvGrpSpPr/>
+          <p:nvPr/>
+        </p:nvGrpSpPr>
+        <p:grpSpPr>
+          <a:xfrm>
+            <a:off x="4900845" y="1609630"/>
+            <a:ext cx="4108802" cy="5309946"/>
+            <a:chOff x="4733570" y="1898933"/>
+            <a:chExt cx="4108802" cy="5309946"/>
+          </a:xfrm>
+        </p:grpSpPr>
+        <p:pic>
+          <p:nvPicPr>
+            <p:cNvPr id="36" name="Picture 2" descr="N2 colour 1"/>
+            <p:cNvPicPr>
+              <a:picLocks noChangeAspect="1" noChangeArrowheads="1"/>
+            </p:cNvPicPr>
+            <p:nvPr/>
+          </p:nvPicPr>
+          <p:blipFill>
+            <a:blip r:embed="rId3" cstate="screen">
+              <a:extLst>
+                <a:ext uri="{28A0092B-C50C-407E-A947-70E740481C1C}">
+                  <a14:useLocalDpi xmlns:a14="http://schemas.microsoft.com/office/drawing/2010/main"/>
+                </a:ext>
+              </a:extLst>
+            </a:blip>
+            <a:srcRect/>
+            <a:stretch>
+              <a:fillRect/>
+            </a:stretch>
+          </p:blipFill>
+          <p:spPr bwMode="auto">
+            <a:xfrm>
+              <a:off x="4733570" y="1898933"/>
+              <a:ext cx="4108802" cy="5309946"/>
+            </a:xfrm>
+            <a:prstGeom prst="rect">
+              <a:avLst/>
+            </a:prstGeom>
+            <a:noFill/>
+            <a:ln>
+              <a:noFill/>
+            </a:ln>
+            <a:extLst>
+              <a:ext uri="{909E8E84-426E-40dd-AFC4-6F175D3DCCD1}">
+                <a14:hiddenFill xmlns="" xmlns:a14="http://schemas.microsoft.com/office/drawing/2010/main">
+                  <a:solidFill>
+                    <a:srgbClr val="FFFFFF"/>
+                  </a:solidFill>
+                </a14:hiddenFill>
+              </a:ext>
+              <a:ext uri="{91240B29-F687-4f45-9708-019B960494DF}">
+                <a14:hiddenLine xmlns="" xmlns:a14="http://schemas.microsoft.com/office/drawing/2010/main" w="9525">
+                  <a:solidFill>
+                    <a:srgbClr val="000000"/>
+                  </a:solidFill>
+                  <a:miter lim="800000"/>
+                  <a:headEnd/>
+                  <a:tailEnd/>
+                </a14:hiddenLine>
+              </a:ext>
+            </a:extLst>
+          </p:spPr>
+        </p:pic>
+        <p:grpSp>
+          <p:nvGrpSpPr>
+            <p:cNvPr id="64" name="Group 63"/>
+            <p:cNvGrpSpPr/>
+            <p:nvPr/>
+          </p:nvGrpSpPr>
+          <p:grpSpPr>
+            <a:xfrm>
+              <a:off x="5026641" y="2860544"/>
+              <a:ext cx="3558594" cy="2469157"/>
+              <a:chOff x="975073" y="2384962"/>
+              <a:chExt cx="3558594" cy="2469157"/>
+            </a:xfrm>
+          </p:grpSpPr>
+          <p:sp>
+            <p:nvSpPr>
+              <p:cNvPr id="2" name="Oval 1"/>
+              <p:cNvSpPr/>
+              <p:nvPr/>
+            </p:nvSpPr>
+            <p:spPr>
+              <a:xfrm>
+                <a:off x="975073" y="2384962"/>
+                <a:ext cx="540000" cy="540000"/>
+              </a:xfrm>
+              <a:prstGeom prst="ellipse">
+                <a:avLst/>
+              </a:prstGeom>
+              <a:solidFill>
+                <a:srgbClr val="0070C0"/>
+              </a:solidFill>
+              <a:ln>
+                <a:noFill/>
+              </a:ln>
+              <a:effectLst/>
+            </p:spPr>
+            <p:style>
+              <a:lnRef idx="1">
+                <a:schemeClr val="accent1"/>
+              </a:lnRef>
+              <a:fillRef idx="3">
+                <a:schemeClr val="accent1"/>
+              </a:fillRef>
+              <a:effectRef idx="2">
+                <a:schemeClr val="accent1"/>
+              </a:effectRef>
+              <a:fontRef idx="minor">
+                <a:schemeClr val="lt1"/>
+              </a:fontRef>
+            </p:style>
+            <p:txBody>
+              <a:bodyPr rtlCol="0" anchor="ctr"/>
+              <a:lstStyle/>
+              <a:p>
+                <a:pPr algn="ctr"/>
+                <a:r>
+                  <a:rPr lang="en-US" dirty="0"/>
+                  <a:t>1</a:t>
+                </a:r>
+              </a:p>
+            </p:txBody>
+          </p:sp>
+          <p:sp>
+            <p:nvSpPr>
+              <p:cNvPr id="37" name="Oval 36"/>
+              <p:cNvSpPr/>
+              <p:nvPr/>
+            </p:nvSpPr>
+            <p:spPr>
+              <a:xfrm>
+                <a:off x="2379788" y="3699400"/>
+                <a:ext cx="540000" cy="540000"/>
+              </a:xfrm>
+              <a:prstGeom prst="ellipse">
+                <a:avLst/>
+              </a:prstGeom>
+              <a:solidFill>
+                <a:srgbClr val="0070C0"/>
+              </a:solidFill>
+              <a:ln>
+                <a:noFill/>
+              </a:ln>
+              <a:effectLst/>
+            </p:spPr>
+            <p:style>
+              <a:lnRef idx="1">
+                <a:schemeClr val="accent1"/>
+              </a:lnRef>
+              <a:fillRef idx="3">
+                <a:schemeClr val="accent1"/>
+              </a:fillRef>
+              <a:effectRef idx="2">
+                <a:schemeClr val="accent1"/>
+              </a:effectRef>
+              <a:fontRef idx="minor">
+                <a:schemeClr val="lt1"/>
+              </a:fontRef>
+            </p:style>
+            <p:txBody>
+              <a:bodyPr rtlCol="0" anchor="ctr"/>
+              <a:lstStyle/>
+              <a:p>
+                <a:pPr algn="ctr"/>
+                <a:r>
+                  <a:rPr lang="en-US" dirty="0"/>
+                  <a:t>3</a:t>
+                </a:r>
+              </a:p>
+            </p:txBody>
+          </p:sp>
+          <p:sp>
+            <p:nvSpPr>
+              <p:cNvPr id="38" name="Oval 37"/>
+              <p:cNvSpPr/>
+              <p:nvPr/>
+            </p:nvSpPr>
+            <p:spPr>
+              <a:xfrm>
+                <a:off x="3993667" y="4314119"/>
+                <a:ext cx="540000" cy="540000"/>
+              </a:xfrm>
+              <a:prstGeom prst="ellipse">
+                <a:avLst/>
+              </a:prstGeom>
+              <a:solidFill>
+                <a:srgbClr val="0070C0"/>
+              </a:solidFill>
+              <a:ln>
+                <a:noFill/>
+              </a:ln>
+              <a:effectLst/>
+            </p:spPr>
+            <p:style>
+              <a:lnRef idx="1">
+                <a:schemeClr val="accent1"/>
+              </a:lnRef>
+              <a:fillRef idx="3">
+                <a:schemeClr val="accent1"/>
+              </a:fillRef>
+              <a:effectRef idx="2">
+                <a:schemeClr val="accent1"/>
+              </a:effectRef>
+              <a:fontRef idx="minor">
+                <a:schemeClr val="lt1"/>
+              </a:fontRef>
+            </p:style>
+            <p:txBody>
+              <a:bodyPr rtlCol="0" anchor="ctr"/>
+              <a:lstStyle/>
+              <a:p>
+                <a:pPr algn="ctr"/>
+                <a:r>
+                  <a:rPr lang="en-US" dirty="0"/>
+                  <a:t>4</a:t>
+                </a:r>
+              </a:p>
+            </p:txBody>
+          </p:sp>
+        </p:grpSp>
+        <p:sp>
+          <p:nvSpPr>
+            <p:cNvPr id="21" name="TextBox 20">
+              <a:extLst>
+                <a:ext uri="{FF2B5EF4-FFF2-40B4-BE49-F238E27FC236}">
+                  <a16:creationId xmlns:a16="http://schemas.microsoft.com/office/drawing/2014/main" id="{FF80581A-8164-D626-BD1D-75AB36DEA4F5}"/>
+                </a:ext>
+              </a:extLst>
+            </p:cNvPr>
+            <p:cNvSpPr txBox="1"/>
+            <p:nvPr/>
+          </p:nvSpPr>
+          <p:spPr>
+            <a:xfrm>
+              <a:off x="6943880" y="6084901"/>
+              <a:ext cx="785793" cy="338554"/>
+            </a:xfrm>
+            <a:prstGeom prst="rect">
+              <a:avLst/>
+            </a:prstGeom>
+            <a:noFill/>
+          </p:spPr>
+          <p:txBody>
+            <a:bodyPr wrap="none" rtlCol="0">
+              <a:spAutoFit/>
+            </a:bodyPr>
+            <a:lstStyle/>
+            <a:p>
+              <a:r>
+                <a:rPr lang="en-US" sz="1600" dirty="0"/>
+                <a:t>HCO</a:t>
+              </a:r>
+              <a:r>
+                <a:rPr lang="en-US" sz="1600" baseline="-25000" dirty="0"/>
+                <a:t>3</a:t>
+              </a:r>
+              <a:r>
+                <a:rPr lang="en-US" sz="1600" baseline="30000" dirty="0"/>
+                <a:t>–</a:t>
+              </a:r>
+            </a:p>
+          </p:txBody>
+        </p:sp>
+        <p:sp>
+          <p:nvSpPr>
+            <p:cNvPr id="22" name="TextBox 21">
+              <a:extLst>
+                <a:ext uri="{FF2B5EF4-FFF2-40B4-BE49-F238E27FC236}">
+                  <a16:creationId xmlns:a16="http://schemas.microsoft.com/office/drawing/2014/main" id="{A785D9C2-0E84-2B5C-3FA5-ECDB5E23A59E}"/>
+                </a:ext>
+              </a:extLst>
+            </p:cNvPr>
+            <p:cNvSpPr txBox="1"/>
+            <p:nvPr/>
+          </p:nvSpPr>
+          <p:spPr>
+            <a:xfrm>
+              <a:off x="7090182" y="6525615"/>
+              <a:ext cx="785793" cy="338554"/>
+            </a:xfrm>
+            <a:prstGeom prst="rect">
+              <a:avLst/>
+            </a:prstGeom>
+            <a:noFill/>
+          </p:spPr>
+          <p:txBody>
+            <a:bodyPr wrap="none" rtlCol="0">
+              <a:spAutoFit/>
+            </a:bodyPr>
+            <a:lstStyle/>
+            <a:p>
+              <a:r>
+                <a:rPr lang="en-US" sz="1600" dirty="0"/>
+                <a:t>HCO</a:t>
+              </a:r>
+              <a:r>
+                <a:rPr lang="en-US" sz="1600" baseline="-25000" dirty="0"/>
+                <a:t>3</a:t>
+              </a:r>
+              <a:r>
+                <a:rPr lang="en-US" sz="1600" baseline="30000" dirty="0"/>
+                <a:t>–</a:t>
+              </a:r>
+            </a:p>
+          </p:txBody>
+        </p:sp>
+        <p:sp>
+          <p:nvSpPr>
+            <p:cNvPr id="23" name="TextBox 22">
+              <a:extLst>
+                <a:ext uri="{FF2B5EF4-FFF2-40B4-BE49-F238E27FC236}">
+                  <a16:creationId xmlns:a16="http://schemas.microsoft.com/office/drawing/2014/main" id="{B9093391-9C8D-29C4-8D8E-8E4B35C9ADFB}"/>
+                </a:ext>
+              </a:extLst>
+            </p:cNvPr>
+            <p:cNvSpPr txBox="1"/>
+            <p:nvPr/>
+          </p:nvSpPr>
+          <p:spPr>
+            <a:xfrm>
+              <a:off x="7147290" y="5693624"/>
+              <a:ext cx="785793" cy="338554"/>
+            </a:xfrm>
+            <a:prstGeom prst="rect">
+              <a:avLst/>
+            </a:prstGeom>
+            <a:noFill/>
+          </p:spPr>
+          <p:txBody>
+            <a:bodyPr wrap="none" rtlCol="0">
+              <a:spAutoFit/>
+            </a:bodyPr>
+            <a:lstStyle/>
+            <a:p>
+              <a:r>
+                <a:rPr lang="en-US" sz="1600" dirty="0"/>
+                <a:t>HCO</a:t>
+              </a:r>
+              <a:r>
+                <a:rPr lang="en-US" sz="1600" baseline="-25000" dirty="0"/>
+                <a:t>3</a:t>
+              </a:r>
+              <a:r>
+                <a:rPr lang="en-US" sz="1600" baseline="30000" dirty="0"/>
+                <a:t>–</a:t>
+              </a:r>
+            </a:p>
+          </p:txBody>
+        </p:sp>
+      </p:grpSp>
+      <p:grpSp>
+        <p:nvGrpSpPr>
+          <p:cNvPr id="26" name="Group 25">
+            <a:extLst>
+              <a:ext uri="{FF2B5EF4-FFF2-40B4-BE49-F238E27FC236}">
+                <a16:creationId xmlns:a16="http://schemas.microsoft.com/office/drawing/2014/main" id="{7ECFED94-6161-8B7C-47CE-181AB3D2CDA2}"/>
+              </a:ext>
+            </a:extLst>
+          </p:cNvPr>
+          <p:cNvGrpSpPr/>
+          <p:nvPr/>
+        </p:nvGrpSpPr>
+        <p:grpSpPr>
+          <a:xfrm>
+            <a:off x="546543" y="1921885"/>
+            <a:ext cx="3218947" cy="3365940"/>
+            <a:chOff x="597841" y="2581892"/>
+            <a:chExt cx="3562709" cy="3725400"/>
+          </a:xfrm>
+        </p:grpSpPr>
+        <p:grpSp>
+          <p:nvGrpSpPr>
+            <p:cNvPr id="8" name="Group 7">
+              <a:extLst>
+                <a:ext uri="{FF2B5EF4-FFF2-40B4-BE49-F238E27FC236}">
+                  <a16:creationId xmlns:a16="http://schemas.microsoft.com/office/drawing/2014/main" id="{99B07C01-30DA-8690-797E-C2C0E97CFC7E}"/>
+                </a:ext>
+              </a:extLst>
+            </p:cNvPr>
+            <p:cNvGrpSpPr/>
+            <p:nvPr/>
+          </p:nvGrpSpPr>
+          <p:grpSpPr>
+            <a:xfrm>
+              <a:off x="597841" y="2581892"/>
+              <a:ext cx="2584084" cy="3296945"/>
+              <a:chOff x="607318" y="1980757"/>
+              <a:chExt cx="1929601" cy="2461912"/>
+            </a:xfrm>
+          </p:grpSpPr>
+          <p:sp>
+            <p:nvSpPr>
+              <p:cNvPr id="7" name="Freeform 6">
+                <a:extLst>
+                  <a:ext uri="{FF2B5EF4-FFF2-40B4-BE49-F238E27FC236}">
+                    <a16:creationId xmlns:a16="http://schemas.microsoft.com/office/drawing/2014/main" id="{BB7CB4C5-1198-C78D-613F-A87C2BC0BE29}"/>
+                  </a:ext>
+                </a:extLst>
+              </p:cNvPr>
+              <p:cNvSpPr/>
+              <p:nvPr/>
+            </p:nvSpPr>
+            <p:spPr>
+              <a:xfrm>
+                <a:off x="1166273" y="3699400"/>
+                <a:ext cx="1370646" cy="537083"/>
+              </a:xfrm>
+              <a:custGeom>
+                <a:avLst/>
+                <a:gdLst>
+                  <a:gd name="csX0" fmla="*/ 6204 w 1370646"/>
+                  <a:gd name="csY0" fmla="*/ 277483 h 537083"/>
+                  <a:gd name="csX1" fmla="*/ 126973 w 1370646"/>
+                  <a:gd name="csY1" fmla="*/ 122207 h 537083"/>
+                  <a:gd name="csX2" fmla="*/ 316755 w 1370646"/>
+                  <a:gd name="csY2" fmla="*/ 173966 h 537083"/>
+                  <a:gd name="csX3" fmla="*/ 489283 w 1370646"/>
+                  <a:gd name="csY3" fmla="*/ 139460 h 537083"/>
+                  <a:gd name="csX4" fmla="*/ 679064 w 1370646"/>
+                  <a:gd name="csY4" fmla="*/ 139460 h 537083"/>
+                  <a:gd name="csX5" fmla="*/ 799834 w 1370646"/>
+                  <a:gd name="csY5" fmla="*/ 70449 h 537083"/>
+                  <a:gd name="csX6" fmla="*/ 1041373 w 1370646"/>
+                  <a:gd name="csY6" fmla="*/ 70449 h 537083"/>
+                  <a:gd name="csX7" fmla="*/ 1162143 w 1370646"/>
+                  <a:gd name="csY7" fmla="*/ 1437 h 537083"/>
+                  <a:gd name="csX8" fmla="*/ 1369177 w 1370646"/>
+                  <a:gd name="csY8" fmla="*/ 35943 h 537083"/>
+                  <a:gd name="csX9" fmla="*/ 1248407 w 1370646"/>
+                  <a:gd name="csY9" fmla="*/ 173966 h 537083"/>
+                  <a:gd name="csX10" fmla="*/ 1127638 w 1370646"/>
+                  <a:gd name="csY10" fmla="*/ 191218 h 537083"/>
+                  <a:gd name="csX11" fmla="*/ 972362 w 1370646"/>
+                  <a:gd name="csY11" fmla="*/ 381000 h 537083"/>
+                  <a:gd name="csX12" fmla="*/ 782581 w 1370646"/>
+                  <a:gd name="csY12" fmla="*/ 346494 h 537083"/>
+                  <a:gd name="csX13" fmla="*/ 679064 w 1370646"/>
+                  <a:gd name="csY13" fmla="*/ 484517 h 537083"/>
+                  <a:gd name="csX14" fmla="*/ 472030 w 1370646"/>
+                  <a:gd name="csY14" fmla="*/ 398252 h 537083"/>
+                  <a:gd name="csX15" fmla="*/ 351260 w 1370646"/>
+                  <a:gd name="csY15" fmla="*/ 536275 h 537083"/>
+                  <a:gd name="csX16" fmla="*/ 161479 w 1370646"/>
+                  <a:gd name="csY16" fmla="*/ 432758 h 537083"/>
+                  <a:gd name="csX17" fmla="*/ 92468 w 1370646"/>
+                  <a:gd name="csY17" fmla="*/ 536275 h 537083"/>
+                  <a:gd name="csX18" fmla="*/ 23456 w 1370646"/>
+                  <a:gd name="csY18" fmla="*/ 363747 h 537083"/>
+                  <a:gd name="csX19" fmla="*/ 6204 w 1370646"/>
+                  <a:gd name="csY19" fmla="*/ 277483 h 537083"/>
+                </a:gdLst>
+                <a:ahLst/>
+                <a:cxnLst>
+                  <a:cxn ang="0">
+                    <a:pos x="csX0" y="csY0"/>
+                  </a:cxn>
+                  <a:cxn ang="0">
+                    <a:pos x="csX1" y="csY1"/>
+                  </a:cxn>
+                  <a:cxn ang="0">
+                    <a:pos x="csX2" y="csY2"/>
+                  </a:cxn>
+                  <a:cxn ang="0">
+                    <a:pos x="csX3" y="csY3"/>
+                  </a:cxn>
+                  <a:cxn ang="0">
+                    <a:pos x="csX4" y="csY4"/>
+                  </a:cxn>
+                  <a:cxn ang="0">
+                    <a:pos x="csX5" y="csY5"/>
+                  </a:cxn>
+                  <a:cxn ang="0">
+                    <a:pos x="csX6" y="csY6"/>
+                  </a:cxn>
+                  <a:cxn ang="0">
+                    <a:pos x="csX7" y="csY7"/>
+                  </a:cxn>
+                  <a:cxn ang="0">
+                    <a:pos x="csX8" y="csY8"/>
+                  </a:cxn>
+                  <a:cxn ang="0">
+                    <a:pos x="csX9" y="csY9"/>
+                  </a:cxn>
+                  <a:cxn ang="0">
+                    <a:pos x="csX10" y="csY10"/>
+                  </a:cxn>
+                  <a:cxn ang="0">
+                    <a:pos x="csX11" y="csY11"/>
+                  </a:cxn>
+                  <a:cxn ang="0">
+                    <a:pos x="csX12" y="csY12"/>
+                  </a:cxn>
+                  <a:cxn ang="0">
+                    <a:pos x="csX13" y="csY13"/>
+                  </a:cxn>
+                  <a:cxn ang="0">
+                    <a:pos x="csX14" y="csY14"/>
+                  </a:cxn>
+                  <a:cxn ang="0">
+                    <a:pos x="csX15" y="csY15"/>
+                  </a:cxn>
+                  <a:cxn ang="0">
+                    <a:pos x="csX16" y="csY16"/>
+                  </a:cxn>
+                  <a:cxn ang="0">
+                    <a:pos x="csX17" y="csY17"/>
+                  </a:cxn>
+                  <a:cxn ang="0">
+                    <a:pos x="csX18" y="csY18"/>
+                  </a:cxn>
+                  <a:cxn ang="0">
+                    <a:pos x="csX19" y="csY19"/>
+                  </a:cxn>
+                </a:cxnLst>
+                <a:rect l="l" t="t" r="r" b="b"/>
+                <a:pathLst>
+                  <a:path w="1370646" h="537083">
+                    <a:moveTo>
+                      <a:pt x="6204" y="277483"/>
+                    </a:moveTo>
+                    <a:cubicBezTo>
+                      <a:pt x="23457" y="237226"/>
+                      <a:pt x="75215" y="139460"/>
+                      <a:pt x="126973" y="122207"/>
+                    </a:cubicBezTo>
+                    <a:cubicBezTo>
+                      <a:pt x="178732" y="104954"/>
+                      <a:pt x="256370" y="171091"/>
+                      <a:pt x="316755" y="173966"/>
+                    </a:cubicBezTo>
+                    <a:cubicBezTo>
+                      <a:pt x="377140" y="176841"/>
+                      <a:pt x="428898" y="145211"/>
+                      <a:pt x="489283" y="139460"/>
+                    </a:cubicBezTo>
+                    <a:cubicBezTo>
+                      <a:pt x="549668" y="133709"/>
+                      <a:pt x="627306" y="150962"/>
+                      <a:pt x="679064" y="139460"/>
+                    </a:cubicBezTo>
+                    <a:cubicBezTo>
+                      <a:pt x="730823" y="127958"/>
+                      <a:pt x="739449" y="81951"/>
+                      <a:pt x="799834" y="70449"/>
+                    </a:cubicBezTo>
+                    <a:cubicBezTo>
+                      <a:pt x="860219" y="58947"/>
+                      <a:pt x="980988" y="81951"/>
+                      <a:pt x="1041373" y="70449"/>
+                    </a:cubicBezTo>
+                    <a:cubicBezTo>
+                      <a:pt x="1101758" y="58947"/>
+                      <a:pt x="1107509" y="7188"/>
+                      <a:pt x="1162143" y="1437"/>
+                    </a:cubicBezTo>
+                    <a:cubicBezTo>
+                      <a:pt x="1216777" y="-4314"/>
+                      <a:pt x="1354800" y="7188"/>
+                      <a:pt x="1369177" y="35943"/>
+                    </a:cubicBezTo>
+                    <a:cubicBezTo>
+                      <a:pt x="1383554" y="64698"/>
+                      <a:pt x="1288664" y="148087"/>
+                      <a:pt x="1248407" y="173966"/>
+                    </a:cubicBezTo>
+                    <a:cubicBezTo>
+                      <a:pt x="1208151" y="199845"/>
+                      <a:pt x="1173645" y="156712"/>
+                      <a:pt x="1127638" y="191218"/>
+                    </a:cubicBezTo>
+                    <a:cubicBezTo>
+                      <a:pt x="1081631" y="225724"/>
+                      <a:pt x="1029871" y="355121"/>
+                      <a:pt x="972362" y="381000"/>
+                    </a:cubicBezTo>
+                    <a:cubicBezTo>
+                      <a:pt x="914853" y="406879"/>
+                      <a:pt x="831464" y="329241"/>
+                      <a:pt x="782581" y="346494"/>
+                    </a:cubicBezTo>
+                    <a:cubicBezTo>
+                      <a:pt x="733698" y="363747"/>
+                      <a:pt x="730822" y="475891"/>
+                      <a:pt x="679064" y="484517"/>
+                    </a:cubicBezTo>
+                    <a:cubicBezTo>
+                      <a:pt x="627306" y="493143"/>
+                      <a:pt x="526664" y="389626"/>
+                      <a:pt x="472030" y="398252"/>
+                    </a:cubicBezTo>
+                    <a:cubicBezTo>
+                      <a:pt x="417396" y="406878"/>
+                      <a:pt x="403018" y="530524"/>
+                      <a:pt x="351260" y="536275"/>
+                    </a:cubicBezTo>
+                    <a:cubicBezTo>
+                      <a:pt x="299502" y="542026"/>
+                      <a:pt x="161479" y="432758"/>
+                      <a:pt x="161479" y="432758"/>
+                    </a:cubicBezTo>
+                    <a:cubicBezTo>
+                      <a:pt x="118347" y="432758"/>
+                      <a:pt x="115472" y="547777"/>
+                      <a:pt x="92468" y="536275"/>
+                    </a:cubicBezTo>
+                    <a:cubicBezTo>
+                      <a:pt x="69464" y="524773"/>
+                      <a:pt x="34958" y="409754"/>
+                      <a:pt x="23456" y="363747"/>
+                    </a:cubicBezTo>
+                    <a:cubicBezTo>
+                      <a:pt x="11954" y="317740"/>
+                      <a:pt x="-11049" y="317740"/>
+                      <a:pt x="6204" y="277483"/>
+                    </a:cubicBezTo>
+                    <a:close/>
+                  </a:path>
+                </a:pathLst>
+              </a:custGeom>
+              <a:solidFill>
+                <a:srgbClr val="FFC000"/>
+              </a:solidFill>
+              <a:ln>
+                <a:noFill/>
+              </a:ln>
+              <a:effectLst/>
+            </p:spPr>
+            <p:style>
+              <a:lnRef idx="1">
+                <a:schemeClr val="accent1"/>
+              </a:lnRef>
+              <a:fillRef idx="3">
+                <a:schemeClr val="accent1"/>
+              </a:fillRef>
+              <a:effectRef idx="2">
+                <a:schemeClr val="accent1"/>
+              </a:effectRef>
+              <a:fontRef idx="minor">
+                <a:schemeClr val="lt1"/>
+              </a:fontRef>
+            </p:style>
+            <p:txBody>
+              <a:bodyPr rtlCol="0" anchor="ctr"/>
+              <a:lstStyle/>
+              <a:p>
+                <a:pPr algn="ctr"/>
+                <a:endParaRPr lang="en-US"/>
+              </a:p>
+            </p:txBody>
+          </p:sp>
+          <p:sp>
+            <p:nvSpPr>
+              <p:cNvPr id="4" name="Freeform 3">
+                <a:extLst>
+                  <a:ext uri="{FF2B5EF4-FFF2-40B4-BE49-F238E27FC236}">
+                    <a16:creationId xmlns:a16="http://schemas.microsoft.com/office/drawing/2014/main" id="{85438EBF-0C2F-549D-9E7C-1183D0E5218E}"/>
+                  </a:ext>
+                </a:extLst>
+              </p:cNvPr>
+              <p:cNvSpPr/>
+              <p:nvPr/>
+            </p:nvSpPr>
+            <p:spPr>
+              <a:xfrm>
+                <a:off x="739649" y="3743864"/>
+                <a:ext cx="1732743" cy="311828"/>
+              </a:xfrm>
+              <a:custGeom>
+                <a:avLst/>
+                <a:gdLst>
+                  <a:gd name="csX0" fmla="*/ 88487 w 1732743"/>
+                  <a:gd name="csY0" fmla="*/ 207034 h 311828"/>
+                  <a:gd name="csX1" fmla="*/ 433543 w 1732743"/>
+                  <a:gd name="csY1" fmla="*/ 241540 h 311828"/>
+                  <a:gd name="csX2" fmla="*/ 1123657 w 1732743"/>
+                  <a:gd name="csY2" fmla="*/ 172528 h 311828"/>
+                  <a:gd name="csX3" fmla="*/ 1727506 w 1732743"/>
+                  <a:gd name="csY3" fmla="*/ 0 h 311828"/>
+                  <a:gd name="csX4" fmla="*/ 1382449 w 1732743"/>
+                  <a:gd name="csY4" fmla="*/ 172528 h 311828"/>
+                  <a:gd name="csX5" fmla="*/ 795853 w 1732743"/>
+                  <a:gd name="csY5" fmla="*/ 293298 h 311828"/>
+                  <a:gd name="csX6" fmla="*/ 243762 w 1732743"/>
+                  <a:gd name="csY6" fmla="*/ 310551 h 311828"/>
+                  <a:gd name="csX7" fmla="*/ 19476 w 1732743"/>
+                  <a:gd name="csY7" fmla="*/ 310551 h 311828"/>
+                  <a:gd name="csX8" fmla="*/ 19476 w 1732743"/>
+                  <a:gd name="csY8" fmla="*/ 276045 h 311828"/>
+                  <a:gd name="csX9" fmla="*/ 88487 w 1732743"/>
+                  <a:gd name="csY9" fmla="*/ 207034 h 311828"/>
+                </a:gdLst>
+                <a:ahLst/>
+                <a:cxnLst>
+                  <a:cxn ang="0">
+                    <a:pos x="csX0" y="csY0"/>
+                  </a:cxn>
+                  <a:cxn ang="0">
+                    <a:pos x="csX1" y="csY1"/>
+                  </a:cxn>
+                  <a:cxn ang="0">
+                    <a:pos x="csX2" y="csY2"/>
+                  </a:cxn>
+                  <a:cxn ang="0">
+                    <a:pos x="csX3" y="csY3"/>
+                  </a:cxn>
+                  <a:cxn ang="0">
+                    <a:pos x="csX4" y="csY4"/>
+                  </a:cxn>
+                  <a:cxn ang="0">
+                    <a:pos x="csX5" y="csY5"/>
+                  </a:cxn>
+                  <a:cxn ang="0">
+                    <a:pos x="csX6" y="csY6"/>
+                  </a:cxn>
+                  <a:cxn ang="0">
+                    <a:pos x="csX7" y="csY7"/>
+                  </a:cxn>
+                  <a:cxn ang="0">
+                    <a:pos x="csX8" y="csY8"/>
+                  </a:cxn>
+                  <a:cxn ang="0">
+                    <a:pos x="csX9" y="csY9"/>
+                  </a:cxn>
+                </a:cxnLst>
+                <a:rect l="l" t="t" r="r" b="b"/>
+                <a:pathLst>
+                  <a:path w="1732743" h="311828">
+                    <a:moveTo>
+                      <a:pt x="88487" y="207034"/>
+                    </a:moveTo>
+                    <a:cubicBezTo>
+                      <a:pt x="157498" y="201283"/>
+                      <a:pt x="261015" y="247291"/>
+                      <a:pt x="433543" y="241540"/>
+                    </a:cubicBezTo>
+                    <a:cubicBezTo>
+                      <a:pt x="606071" y="235789"/>
+                      <a:pt x="907997" y="212785"/>
+                      <a:pt x="1123657" y="172528"/>
+                    </a:cubicBezTo>
+                    <a:cubicBezTo>
+                      <a:pt x="1339318" y="132271"/>
+                      <a:pt x="1684374" y="0"/>
+                      <a:pt x="1727506" y="0"/>
+                    </a:cubicBezTo>
+                    <a:cubicBezTo>
+                      <a:pt x="1770638" y="0"/>
+                      <a:pt x="1537724" y="123645"/>
+                      <a:pt x="1382449" y="172528"/>
+                    </a:cubicBezTo>
+                    <a:cubicBezTo>
+                      <a:pt x="1227174" y="221411"/>
+                      <a:pt x="985634" y="270294"/>
+                      <a:pt x="795853" y="293298"/>
+                    </a:cubicBezTo>
+                    <a:cubicBezTo>
+                      <a:pt x="606072" y="316302"/>
+                      <a:pt x="373158" y="307676"/>
+                      <a:pt x="243762" y="310551"/>
+                    </a:cubicBezTo>
+                    <a:cubicBezTo>
+                      <a:pt x="114366" y="313426"/>
+                      <a:pt x="19476" y="310551"/>
+                      <a:pt x="19476" y="310551"/>
+                    </a:cubicBezTo>
+                    <a:cubicBezTo>
+                      <a:pt x="-17905" y="304800"/>
+                      <a:pt x="7974" y="290422"/>
+                      <a:pt x="19476" y="276045"/>
+                    </a:cubicBezTo>
+                    <a:cubicBezTo>
+                      <a:pt x="30978" y="261668"/>
+                      <a:pt x="19476" y="212785"/>
+                      <a:pt x="88487" y="207034"/>
+                    </a:cubicBezTo>
+                    <a:close/>
+                  </a:path>
+                </a:pathLst>
+              </a:custGeom>
+              <a:solidFill>
+                <a:schemeClr val="accent6">
+                  <a:lumMod val="75000"/>
+                </a:schemeClr>
+              </a:solidFill>
+              <a:ln>
+                <a:noFill/>
+              </a:ln>
+              <a:effectLst/>
+            </p:spPr>
+            <p:style>
+              <a:lnRef idx="1">
+                <a:schemeClr val="accent1"/>
+              </a:lnRef>
+              <a:fillRef idx="3">
+                <a:schemeClr val="accent1"/>
+              </a:fillRef>
+              <a:effectRef idx="2">
+                <a:schemeClr val="accent1"/>
+              </a:effectRef>
+              <a:fontRef idx="minor">
+                <a:schemeClr val="lt1"/>
+              </a:fontRef>
+            </p:style>
+            <p:txBody>
+              <a:bodyPr rtlCol="0" anchor="ctr"/>
+              <a:lstStyle/>
+              <a:p>
+                <a:pPr algn="ctr"/>
+                <a:endParaRPr lang="en-US"/>
+              </a:p>
+            </p:txBody>
+          </p:sp>
+          <p:sp>
+            <p:nvSpPr>
+              <p:cNvPr id="3" name="Freeform 2">
+                <a:extLst>
+                  <a:ext uri="{FF2B5EF4-FFF2-40B4-BE49-F238E27FC236}">
+                    <a16:creationId xmlns:a16="http://schemas.microsoft.com/office/drawing/2014/main" id="{B24017A3-8C15-DE89-40E4-42185B98EA5B}"/>
+                  </a:ext>
+                </a:extLst>
+              </p:cNvPr>
+              <p:cNvSpPr/>
+              <p:nvPr/>
+            </p:nvSpPr>
+            <p:spPr>
+              <a:xfrm>
+                <a:off x="607318" y="1980757"/>
+                <a:ext cx="1569640" cy="2461912"/>
+              </a:xfrm>
+              <a:custGeom>
+                <a:avLst/>
+                <a:gdLst>
+                  <a:gd name="csX0" fmla="*/ 1466123 w 2467512"/>
+                  <a:gd name="csY0" fmla="*/ 70422 h 3574713"/>
+                  <a:gd name="csX1" fmla="*/ 1517882 w 2467512"/>
+                  <a:gd name="csY1" fmla="*/ 553501 h 3574713"/>
+                  <a:gd name="csX2" fmla="*/ 1483376 w 2467512"/>
+                  <a:gd name="csY2" fmla="*/ 777788 h 3574713"/>
+                  <a:gd name="csX3" fmla="*/ 1259089 w 2467512"/>
+                  <a:gd name="csY3" fmla="*/ 777788 h 3574713"/>
+                  <a:gd name="csX4" fmla="*/ 983044 w 2467512"/>
+                  <a:gd name="csY4" fmla="*/ 1002074 h 3574713"/>
+                  <a:gd name="csX5" fmla="*/ 914033 w 2467512"/>
+                  <a:gd name="csY5" fmla="*/ 1588671 h 3574713"/>
+                  <a:gd name="csX6" fmla="*/ 724252 w 2467512"/>
+                  <a:gd name="csY6" fmla="*/ 1950980 h 3574713"/>
+                  <a:gd name="csX7" fmla="*/ 517218 w 2467512"/>
+                  <a:gd name="csY7" fmla="*/ 2123508 h 3574713"/>
+                  <a:gd name="csX8" fmla="*/ 517218 w 2467512"/>
+                  <a:gd name="csY8" fmla="*/ 2244278 h 3574713"/>
+                  <a:gd name="csX9" fmla="*/ 223920 w 2467512"/>
+                  <a:gd name="csY9" fmla="*/ 2347795 h 3574713"/>
+                  <a:gd name="csX10" fmla="*/ 16886 w 2467512"/>
+                  <a:gd name="csY10" fmla="*/ 2744610 h 3574713"/>
+                  <a:gd name="csX11" fmla="*/ 51391 w 2467512"/>
+                  <a:gd name="csY11" fmla="*/ 3158678 h 3574713"/>
+                  <a:gd name="csX12" fmla="*/ 361942 w 2467512"/>
+                  <a:gd name="csY12" fmla="*/ 3417471 h 3574713"/>
+                  <a:gd name="csX13" fmla="*/ 672493 w 2467512"/>
+                  <a:gd name="csY13" fmla="*/ 3572746 h 3574713"/>
+                  <a:gd name="csX14" fmla="*/ 862274 w 2467512"/>
+                  <a:gd name="csY14" fmla="*/ 3486482 h 3574713"/>
+                  <a:gd name="csX15" fmla="*/ 603482 w 2467512"/>
+                  <a:gd name="csY15" fmla="*/ 3227690 h 3574713"/>
+                  <a:gd name="csX16" fmla="*/ 327437 w 2467512"/>
+                  <a:gd name="csY16" fmla="*/ 3020656 h 3574713"/>
+                  <a:gd name="csX17" fmla="*/ 379195 w 2467512"/>
+                  <a:gd name="csY17" fmla="*/ 2658346 h 3574713"/>
+                  <a:gd name="csX18" fmla="*/ 603482 w 2467512"/>
+                  <a:gd name="csY18" fmla="*/ 2537576 h 3574713"/>
+                  <a:gd name="csX19" fmla="*/ 741504 w 2467512"/>
+                  <a:gd name="csY19" fmla="*/ 2572082 h 3574713"/>
+                  <a:gd name="csX20" fmla="*/ 1121067 w 2467512"/>
+                  <a:gd name="csY20" fmla="*/ 2485818 h 3574713"/>
+                  <a:gd name="csX21" fmla="*/ 1638652 w 2467512"/>
+                  <a:gd name="csY21" fmla="*/ 2572082 h 3574713"/>
+                  <a:gd name="csX22" fmla="*/ 2242501 w 2467512"/>
+                  <a:gd name="csY22" fmla="*/ 1933727 h 3574713"/>
+                  <a:gd name="csX23" fmla="*/ 2466788 w 2467512"/>
+                  <a:gd name="csY23" fmla="*/ 933063 h 3574713"/>
+                  <a:gd name="csX24" fmla="*/ 2294259 w 2467512"/>
+                  <a:gd name="csY24" fmla="*/ 518995 h 3574713"/>
+                  <a:gd name="csX25" fmla="*/ 1793927 w 2467512"/>
+                  <a:gd name="csY25" fmla="*/ 691524 h 3574713"/>
+                  <a:gd name="csX26" fmla="*/ 1707663 w 2467512"/>
+                  <a:gd name="csY26" fmla="*/ 726029 h 3574713"/>
+                  <a:gd name="csX27" fmla="*/ 1673157 w 2467512"/>
+                  <a:gd name="csY27" fmla="*/ 70422 h 3574713"/>
+                  <a:gd name="csX28" fmla="*/ 1466123 w 2467512"/>
+                  <a:gd name="csY28" fmla="*/ 70422 h 3574713"/>
+                </a:gdLst>
+                <a:ahLst/>
+                <a:cxnLst>
+                  <a:cxn ang="0">
+                    <a:pos x="csX0" y="csY0"/>
+                  </a:cxn>
+                  <a:cxn ang="0">
+                    <a:pos x="csX1" y="csY1"/>
+                  </a:cxn>
+                  <a:cxn ang="0">
+                    <a:pos x="csX2" y="csY2"/>
+                  </a:cxn>
+                  <a:cxn ang="0">
+                    <a:pos x="csX3" y="csY3"/>
+                  </a:cxn>
+                  <a:cxn ang="0">
+                    <a:pos x="csX4" y="csY4"/>
+                  </a:cxn>
+                  <a:cxn ang="0">
+                    <a:pos x="csX5" y="csY5"/>
+                  </a:cxn>
+                  <a:cxn ang="0">
+                    <a:pos x="csX6" y="csY6"/>
+                  </a:cxn>
+                  <a:cxn ang="0">
+                    <a:pos x="csX7" y="csY7"/>
+                  </a:cxn>
+                  <a:cxn ang="0">
+                    <a:pos x="csX8" y="csY8"/>
+                  </a:cxn>
+                  <a:cxn ang="0">
+                    <a:pos x="csX9" y="csY9"/>
+                  </a:cxn>
+                  <a:cxn ang="0">
+                    <a:pos x="csX10" y="csY10"/>
+                  </a:cxn>
+                  <a:cxn ang="0">
+                    <a:pos x="csX11" y="csY11"/>
+                  </a:cxn>
+                  <a:cxn ang="0">
+                    <a:pos x="csX12" y="csY12"/>
+                  </a:cxn>
+                  <a:cxn ang="0">
+                    <a:pos x="csX13" y="csY13"/>
+                  </a:cxn>
+                  <a:cxn ang="0">
+                    <a:pos x="csX14" y="csY14"/>
+                  </a:cxn>
+                  <a:cxn ang="0">
+                    <a:pos x="csX15" y="csY15"/>
+                  </a:cxn>
+                  <a:cxn ang="0">
+                    <a:pos x="csX16" y="csY16"/>
+                  </a:cxn>
+                  <a:cxn ang="0">
+                    <a:pos x="csX17" y="csY17"/>
+                  </a:cxn>
+                  <a:cxn ang="0">
+                    <a:pos x="csX18" y="csY18"/>
+                  </a:cxn>
+                  <a:cxn ang="0">
+                    <a:pos x="csX19" y="csY19"/>
+                  </a:cxn>
+                  <a:cxn ang="0">
+                    <a:pos x="csX20" y="csY20"/>
+                  </a:cxn>
+                  <a:cxn ang="0">
+                    <a:pos x="csX21" y="csY21"/>
+                  </a:cxn>
+                  <a:cxn ang="0">
+                    <a:pos x="csX22" y="csY22"/>
+                  </a:cxn>
+                  <a:cxn ang="0">
+                    <a:pos x="csX23" y="csY23"/>
+                  </a:cxn>
+                  <a:cxn ang="0">
+                    <a:pos x="csX24" y="csY24"/>
+                  </a:cxn>
+                  <a:cxn ang="0">
+                    <a:pos x="csX25" y="csY25"/>
+                  </a:cxn>
+                  <a:cxn ang="0">
+                    <a:pos x="csX26" y="csY26"/>
+                  </a:cxn>
+                  <a:cxn ang="0">
+                    <a:pos x="csX27" y="csY27"/>
+                  </a:cxn>
+                  <a:cxn ang="0">
+                    <a:pos x="csX28" y="csY28"/>
+                  </a:cxn>
+                </a:cxnLst>
+                <a:rect l="l" t="t" r="r" b="b"/>
+                <a:pathLst>
+                  <a:path w="2467512" h="3574713">
+                    <a:moveTo>
+                      <a:pt x="1466123" y="70422"/>
+                    </a:moveTo>
+                    <a:cubicBezTo>
+                      <a:pt x="1440244" y="150935"/>
+                      <a:pt x="1515006" y="435607"/>
+                      <a:pt x="1517882" y="553501"/>
+                    </a:cubicBezTo>
+                    <a:cubicBezTo>
+                      <a:pt x="1520758" y="671395"/>
+                      <a:pt x="1526508" y="740407"/>
+                      <a:pt x="1483376" y="777788"/>
+                    </a:cubicBezTo>
+                    <a:cubicBezTo>
+                      <a:pt x="1440244" y="815169"/>
+                      <a:pt x="1342478" y="740407"/>
+                      <a:pt x="1259089" y="777788"/>
+                    </a:cubicBezTo>
+                    <a:cubicBezTo>
+                      <a:pt x="1175700" y="815169"/>
+                      <a:pt x="1040553" y="866927"/>
+                      <a:pt x="983044" y="1002074"/>
+                    </a:cubicBezTo>
+                    <a:cubicBezTo>
+                      <a:pt x="925535" y="1137221"/>
+                      <a:pt x="957165" y="1430520"/>
+                      <a:pt x="914033" y="1588671"/>
+                    </a:cubicBezTo>
+                    <a:cubicBezTo>
+                      <a:pt x="870901" y="1746822"/>
+                      <a:pt x="790388" y="1861841"/>
+                      <a:pt x="724252" y="1950980"/>
+                    </a:cubicBezTo>
+                    <a:cubicBezTo>
+                      <a:pt x="658116" y="2040119"/>
+                      <a:pt x="551724" y="2074625"/>
+                      <a:pt x="517218" y="2123508"/>
+                    </a:cubicBezTo>
+                    <a:cubicBezTo>
+                      <a:pt x="482712" y="2172391"/>
+                      <a:pt x="566101" y="2206897"/>
+                      <a:pt x="517218" y="2244278"/>
+                    </a:cubicBezTo>
+                    <a:cubicBezTo>
+                      <a:pt x="468335" y="2281659"/>
+                      <a:pt x="307309" y="2264406"/>
+                      <a:pt x="223920" y="2347795"/>
+                    </a:cubicBezTo>
+                    <a:cubicBezTo>
+                      <a:pt x="140531" y="2431184"/>
+                      <a:pt x="45641" y="2609463"/>
+                      <a:pt x="16886" y="2744610"/>
+                    </a:cubicBezTo>
+                    <a:cubicBezTo>
+                      <a:pt x="-11869" y="2879757"/>
+                      <a:pt x="-6118" y="3046535"/>
+                      <a:pt x="51391" y="3158678"/>
+                    </a:cubicBezTo>
+                    <a:cubicBezTo>
+                      <a:pt x="108900" y="3270822"/>
+                      <a:pt x="258425" y="3348460"/>
+                      <a:pt x="361942" y="3417471"/>
+                    </a:cubicBezTo>
+                    <a:cubicBezTo>
+                      <a:pt x="465459" y="3486482"/>
+                      <a:pt x="589104" y="3561244"/>
+                      <a:pt x="672493" y="3572746"/>
+                    </a:cubicBezTo>
+                    <a:cubicBezTo>
+                      <a:pt x="755882" y="3584248"/>
+                      <a:pt x="873776" y="3543991"/>
+                      <a:pt x="862274" y="3486482"/>
+                    </a:cubicBezTo>
+                    <a:cubicBezTo>
+                      <a:pt x="850772" y="3428973"/>
+                      <a:pt x="692621" y="3305328"/>
+                      <a:pt x="603482" y="3227690"/>
+                    </a:cubicBezTo>
+                    <a:cubicBezTo>
+                      <a:pt x="514342" y="3150052"/>
+                      <a:pt x="364818" y="3115547"/>
+                      <a:pt x="327437" y="3020656"/>
+                    </a:cubicBezTo>
+                    <a:cubicBezTo>
+                      <a:pt x="290056" y="2925765"/>
+                      <a:pt x="333188" y="2738859"/>
+                      <a:pt x="379195" y="2658346"/>
+                    </a:cubicBezTo>
+                    <a:cubicBezTo>
+                      <a:pt x="425202" y="2577833"/>
+                      <a:pt x="543097" y="2551953"/>
+                      <a:pt x="603482" y="2537576"/>
+                    </a:cubicBezTo>
+                    <a:cubicBezTo>
+                      <a:pt x="663867" y="2523199"/>
+                      <a:pt x="655240" y="2580708"/>
+                      <a:pt x="741504" y="2572082"/>
+                    </a:cubicBezTo>
+                    <a:cubicBezTo>
+                      <a:pt x="827768" y="2563456"/>
+                      <a:pt x="971542" y="2485818"/>
+                      <a:pt x="1121067" y="2485818"/>
+                    </a:cubicBezTo>
+                    <a:cubicBezTo>
+                      <a:pt x="1270592" y="2485818"/>
+                      <a:pt x="1451746" y="2664097"/>
+                      <a:pt x="1638652" y="2572082"/>
+                    </a:cubicBezTo>
+                    <a:cubicBezTo>
+                      <a:pt x="1825558" y="2480067"/>
+                      <a:pt x="2104478" y="2206897"/>
+                      <a:pt x="2242501" y="1933727"/>
+                    </a:cubicBezTo>
+                    <a:cubicBezTo>
+                      <a:pt x="2380524" y="1660557"/>
+                      <a:pt x="2458162" y="1168852"/>
+                      <a:pt x="2466788" y="933063"/>
+                    </a:cubicBezTo>
+                    <a:cubicBezTo>
+                      <a:pt x="2475414" y="697274"/>
+                      <a:pt x="2406402" y="559251"/>
+                      <a:pt x="2294259" y="518995"/>
+                    </a:cubicBezTo>
+                    <a:cubicBezTo>
+                      <a:pt x="2182116" y="478739"/>
+                      <a:pt x="1793927" y="691524"/>
+                      <a:pt x="1793927" y="691524"/>
+                    </a:cubicBezTo>
+                    <a:cubicBezTo>
+                      <a:pt x="1696161" y="726030"/>
+                      <a:pt x="1727791" y="829546"/>
+                      <a:pt x="1707663" y="726029"/>
+                    </a:cubicBezTo>
+                    <a:cubicBezTo>
+                      <a:pt x="1687535" y="622512"/>
+                      <a:pt x="1710538" y="176815"/>
+                      <a:pt x="1673157" y="70422"/>
+                    </a:cubicBezTo>
+                    <a:cubicBezTo>
+                      <a:pt x="1635776" y="-35971"/>
+                      <a:pt x="1492002" y="-10091"/>
+                      <a:pt x="1466123" y="70422"/>
+                    </a:cubicBezTo>
+                    <a:close/>
+                  </a:path>
+                </a:pathLst>
+              </a:custGeom>
+              <a:solidFill>
+                <a:schemeClr val="accent2">
+                  <a:lumMod val="60000"/>
+                  <a:lumOff val="40000"/>
+                </a:schemeClr>
+              </a:solidFill>
+              <a:ln>
+                <a:noFill/>
+              </a:ln>
+              <a:effectLst/>
+            </p:spPr>
+            <p:style>
+              <a:lnRef idx="1">
+                <a:schemeClr val="accent1"/>
+              </a:lnRef>
+              <a:fillRef idx="3">
+                <a:schemeClr val="accent1"/>
+              </a:fillRef>
+              <a:effectRef idx="2">
+                <a:schemeClr val="accent1"/>
+              </a:effectRef>
+              <a:fontRef idx="minor">
+                <a:schemeClr val="lt1"/>
+              </a:fontRef>
+            </p:style>
+            <p:txBody>
+              <a:bodyPr rtlCol="0" anchor="ctr"/>
+              <a:lstStyle/>
+              <a:p>
+                <a:pPr algn="ctr"/>
+                <a:endParaRPr lang="en-US" dirty="0"/>
+              </a:p>
+            </p:txBody>
+          </p:sp>
+        </p:grpSp>
+        <p:sp>
+          <p:nvSpPr>
+            <p:cNvPr id="9" name="TextBox 8">
+              <a:extLst>
+                <a:ext uri="{FF2B5EF4-FFF2-40B4-BE49-F238E27FC236}">
+                  <a16:creationId xmlns:a16="http://schemas.microsoft.com/office/drawing/2014/main" id="{5C4B2AE3-2D54-DB00-2189-09CDB71C6B09}"/>
+                </a:ext>
+              </a:extLst>
+            </p:cNvPr>
+            <p:cNvSpPr txBox="1"/>
+            <p:nvPr/>
+          </p:nvSpPr>
+          <p:spPr>
+            <a:xfrm>
+              <a:off x="3225679" y="3582602"/>
+              <a:ext cx="934871" cy="400110"/>
+            </a:xfrm>
+            <a:prstGeom prst="rect">
+              <a:avLst/>
+            </a:prstGeom>
+            <a:noFill/>
+          </p:spPr>
+          <p:txBody>
+            <a:bodyPr wrap="none" rtlCol="0">
+              <a:spAutoFit/>
+            </a:bodyPr>
+            <a:lstStyle/>
+            <a:p>
+              <a:r>
+                <a:rPr lang="en-US" sz="2000" dirty="0"/>
+                <a:t>HCO</a:t>
+              </a:r>
+              <a:r>
+                <a:rPr lang="en-US" sz="2000" baseline="-25000" dirty="0"/>
+                <a:t>3</a:t>
+              </a:r>
+              <a:r>
+                <a:rPr lang="en-US" sz="2000" baseline="30000" dirty="0"/>
+                <a:t>–</a:t>
+              </a:r>
+            </a:p>
+          </p:txBody>
+        </p:sp>
+        <p:sp>
+          <p:nvSpPr>
+            <p:cNvPr id="10" name="TextBox 9">
+              <a:extLst>
+                <a:ext uri="{FF2B5EF4-FFF2-40B4-BE49-F238E27FC236}">
+                  <a16:creationId xmlns:a16="http://schemas.microsoft.com/office/drawing/2014/main" id="{BEB99697-4E3B-7DC8-C69F-B6516BB3BCEE}"/>
+                </a:ext>
+              </a:extLst>
+            </p:cNvPr>
+            <p:cNvSpPr txBox="1"/>
+            <p:nvPr/>
+          </p:nvSpPr>
+          <p:spPr>
+            <a:xfrm>
+              <a:off x="1436571" y="4352000"/>
+              <a:ext cx="471604" cy="400110"/>
+            </a:xfrm>
+            <a:prstGeom prst="rect">
+              <a:avLst/>
+            </a:prstGeom>
+            <a:noFill/>
+          </p:spPr>
+          <p:txBody>
+            <a:bodyPr wrap="none" rtlCol="0">
+              <a:spAutoFit/>
+            </a:bodyPr>
+            <a:lstStyle/>
+            <a:p>
+              <a:r>
+                <a:rPr lang="en-US" sz="2000" dirty="0"/>
+                <a:t>H</a:t>
+              </a:r>
+              <a:r>
+                <a:rPr lang="en-US" sz="2000" baseline="30000" dirty="0"/>
+                <a:t>+</a:t>
+              </a:r>
+            </a:p>
+          </p:txBody>
+        </p:sp>
+        <p:sp>
+          <p:nvSpPr>
+            <p:cNvPr id="11" name="TextBox 10">
+              <a:extLst>
+                <a:ext uri="{FF2B5EF4-FFF2-40B4-BE49-F238E27FC236}">
+                  <a16:creationId xmlns:a16="http://schemas.microsoft.com/office/drawing/2014/main" id="{C6D2EBEC-4B20-EF8E-32D3-F5E5926D3239}"/>
+                </a:ext>
+              </a:extLst>
+            </p:cNvPr>
+            <p:cNvSpPr txBox="1"/>
+            <p:nvPr/>
+          </p:nvSpPr>
+          <p:spPr>
+            <a:xfrm>
+              <a:off x="1202058" y="5907182"/>
+              <a:ext cx="934871" cy="400110"/>
+            </a:xfrm>
+            <a:prstGeom prst="rect">
+              <a:avLst/>
+            </a:prstGeom>
+            <a:noFill/>
+          </p:spPr>
+          <p:txBody>
+            <a:bodyPr wrap="none" rtlCol="0">
+              <a:spAutoFit/>
+            </a:bodyPr>
+            <a:lstStyle/>
+            <a:p>
+              <a:r>
+                <a:rPr lang="en-US" sz="2000" dirty="0"/>
+                <a:t>HCO</a:t>
+              </a:r>
+              <a:r>
+                <a:rPr lang="en-US" sz="2000" baseline="-25000" dirty="0"/>
+                <a:t>3</a:t>
+              </a:r>
+              <a:r>
+                <a:rPr lang="en-US" sz="2000" baseline="30000" dirty="0"/>
+                <a:t>–</a:t>
+              </a:r>
+            </a:p>
+          </p:txBody>
+        </p:sp>
+        <p:sp>
+          <p:nvSpPr>
+            <p:cNvPr id="12" name="TextBox 11">
+              <a:extLst>
+                <a:ext uri="{FF2B5EF4-FFF2-40B4-BE49-F238E27FC236}">
+                  <a16:creationId xmlns:a16="http://schemas.microsoft.com/office/drawing/2014/main" id="{05C42BE3-6F30-A09E-E705-DEAAE45D9977}"/>
+                </a:ext>
+              </a:extLst>
+            </p:cNvPr>
+            <p:cNvSpPr txBox="1"/>
+            <p:nvPr/>
+          </p:nvSpPr>
+          <p:spPr>
+            <a:xfrm>
+              <a:off x="3452702" y="4328636"/>
+              <a:ext cx="471604" cy="400110"/>
+            </a:xfrm>
+            <a:prstGeom prst="rect">
+              <a:avLst/>
+            </a:prstGeom>
+            <a:noFill/>
+          </p:spPr>
+          <p:txBody>
+            <a:bodyPr wrap="none" rtlCol="0">
+              <a:spAutoFit/>
+            </a:bodyPr>
+            <a:lstStyle/>
+            <a:p>
+              <a:r>
+                <a:rPr lang="en-US" sz="2000" dirty="0"/>
+                <a:t>H</a:t>
+              </a:r>
+              <a:r>
+                <a:rPr lang="en-US" sz="2000" baseline="30000" dirty="0"/>
+                <a:t>+</a:t>
+              </a:r>
+            </a:p>
+          </p:txBody>
+        </p:sp>
+        <p:cxnSp>
+          <p:nvCxnSpPr>
+            <p:cNvPr id="14" name="Straight Arrow Connector 13">
+              <a:extLst>
+                <a:ext uri="{FF2B5EF4-FFF2-40B4-BE49-F238E27FC236}">
+                  <a16:creationId xmlns:a16="http://schemas.microsoft.com/office/drawing/2014/main" id="{881F5547-1E76-740C-0998-213C15612EDA}"/>
+                </a:ext>
+              </a:extLst>
+            </p:cNvPr>
+            <p:cNvCxnSpPr>
+              <a:endCxn id="9" idx="1"/>
+            </p:cNvCxnSpPr>
+            <p:nvPr/>
+          </p:nvCxnSpPr>
+          <p:spPr>
+            <a:xfrm>
+              <a:off x="2743626" y="3767268"/>
+              <a:ext cx="482053" cy="15389"/>
+            </a:xfrm>
+            <a:prstGeom prst="straightConnector1">
+              <a:avLst/>
+            </a:prstGeom>
+            <a:ln w="38100">
+              <a:solidFill>
+                <a:schemeClr val="tx1"/>
+              </a:solidFill>
+              <a:headEnd type="none" w="med" len="med"/>
+              <a:tailEnd type="arrow" w="med" len="med"/>
+            </a:ln>
+            <a:effectLst/>
+          </p:spPr>
+          <p:style>
+            <a:lnRef idx="2">
+              <a:schemeClr val="accent1"/>
+            </a:lnRef>
+            <a:fillRef idx="0">
+              <a:schemeClr val="accent1"/>
+            </a:fillRef>
+            <a:effectRef idx="1">
+              <a:schemeClr val="accent1"/>
+            </a:effectRef>
+            <a:fontRef idx="minor">
+              <a:schemeClr val="tx1"/>
+            </a:fontRef>
+          </p:style>
+        </p:cxnSp>
+        <p:sp>
+          <p:nvSpPr>
+            <p:cNvPr id="15" name="Freeform 14">
+              <a:extLst>
+                <a:ext uri="{FF2B5EF4-FFF2-40B4-BE49-F238E27FC236}">
+                  <a16:creationId xmlns:a16="http://schemas.microsoft.com/office/drawing/2014/main" id="{7487470C-4578-501B-068E-163FEEB928B3}"/>
+                </a:ext>
+              </a:extLst>
+            </p:cNvPr>
+            <p:cNvSpPr/>
+            <p:nvPr/>
+          </p:nvSpPr>
+          <p:spPr>
+            <a:xfrm>
+              <a:off x="2768229" y="4559034"/>
+              <a:ext cx="603849" cy="500332"/>
+            </a:xfrm>
+            <a:custGeom>
+              <a:avLst/>
+              <a:gdLst>
+                <a:gd name="csX0" fmla="*/ 0 w 603849"/>
+                <a:gd name="csY0" fmla="*/ 500332 h 500332"/>
+                <a:gd name="csX1" fmla="*/ 207034 w 603849"/>
+                <a:gd name="csY1" fmla="*/ 120770 h 500332"/>
+                <a:gd name="csX2" fmla="*/ 603849 w 603849"/>
+                <a:gd name="csY2" fmla="*/ 0 h 500332"/>
+              </a:gdLst>
+              <a:ahLst/>
+              <a:cxnLst>
+                <a:cxn ang="0">
+                  <a:pos x="csX0" y="csY0"/>
+                </a:cxn>
+                <a:cxn ang="0">
+                  <a:pos x="csX1" y="csY1"/>
+                </a:cxn>
+                <a:cxn ang="0">
+                  <a:pos x="csX2" y="csY2"/>
+                </a:cxn>
+              </a:cxnLst>
+              <a:rect l="l" t="t" r="r" b="b"/>
+              <a:pathLst>
+                <a:path w="603849" h="500332">
+                  <a:moveTo>
+                    <a:pt x="0" y="500332"/>
+                  </a:moveTo>
+                  <a:cubicBezTo>
+                    <a:pt x="53196" y="352245"/>
+                    <a:pt x="106393" y="204159"/>
+                    <a:pt x="207034" y="120770"/>
+                  </a:cubicBezTo>
+                  <a:cubicBezTo>
+                    <a:pt x="307676" y="37381"/>
+                    <a:pt x="455762" y="18690"/>
+                    <a:pt x="603849" y="0"/>
+                  </a:cubicBezTo>
+                </a:path>
+              </a:pathLst>
+            </a:custGeom>
+            <a:noFill/>
+            <a:ln w="38100">
+              <a:solidFill>
+                <a:schemeClr val="tx1"/>
+              </a:solidFill>
+              <a:headEnd type="none" w="med" len="med"/>
+              <a:tailEnd type="arrow" w="med" len="med"/>
+            </a:ln>
+            <a:effectLst/>
+          </p:spPr>
+          <p:style>
+            <a:lnRef idx="1">
+              <a:schemeClr val="accent1"/>
+            </a:lnRef>
+            <a:fillRef idx="3">
+              <a:schemeClr val="accent1"/>
+            </a:fillRef>
+            <a:effectRef idx="2">
+              <a:schemeClr val="accent1"/>
+            </a:effectRef>
+            <a:fontRef idx="minor">
+              <a:schemeClr val="lt1"/>
+            </a:fontRef>
+          </p:style>
+          <p:txBody>
+            <a:bodyPr rtlCol="0" anchor="ctr"/>
+            <a:lstStyle/>
+            <a:p>
+              <a:pPr algn="ctr"/>
+              <a:endParaRPr lang="en-US"/>
+            </a:p>
+          </p:txBody>
+        </p:sp>
+        <p:sp>
+          <p:nvSpPr>
+            <p:cNvPr id="16" name="Freeform 15">
+              <a:extLst>
+                <a:ext uri="{FF2B5EF4-FFF2-40B4-BE49-F238E27FC236}">
+                  <a16:creationId xmlns:a16="http://schemas.microsoft.com/office/drawing/2014/main" id="{609C52BE-DC98-0ABF-62FD-C493115676C0}"/>
+                </a:ext>
+              </a:extLst>
+            </p:cNvPr>
+            <p:cNvSpPr/>
+            <p:nvPr/>
+          </p:nvSpPr>
+          <p:spPr>
+            <a:xfrm>
+              <a:off x="718979" y="5297586"/>
+              <a:ext cx="807046" cy="365629"/>
+            </a:xfrm>
+            <a:custGeom>
+              <a:avLst/>
+              <a:gdLst>
+                <a:gd name="csX0" fmla="*/ 807046 w 807046"/>
+                <a:gd name="csY0" fmla="*/ 3320 h 365629"/>
+                <a:gd name="csX1" fmla="*/ 272208 w 807046"/>
+                <a:gd name="csY1" fmla="*/ 3320 h 365629"/>
+                <a:gd name="csX2" fmla="*/ 13416 w 807046"/>
+                <a:gd name="csY2" fmla="*/ 37825 h 365629"/>
+                <a:gd name="csX3" fmla="*/ 65174 w 807046"/>
+                <a:gd name="csY3" fmla="*/ 244859 h 365629"/>
+                <a:gd name="csX4" fmla="*/ 306714 w 807046"/>
+                <a:gd name="csY4" fmla="*/ 365629 h 365629"/>
+              </a:gdLst>
+              <a:ahLst/>
+              <a:cxnLst>
+                <a:cxn ang="0">
+                  <a:pos x="csX0" y="csY0"/>
+                </a:cxn>
+                <a:cxn ang="0">
+                  <a:pos x="csX1" y="csY1"/>
+                </a:cxn>
+                <a:cxn ang="0">
+                  <a:pos x="csX2" y="csY2"/>
+                </a:cxn>
+                <a:cxn ang="0">
+                  <a:pos x="csX3" y="csY3"/>
+                </a:cxn>
+                <a:cxn ang="0">
+                  <a:pos x="csX4" y="csY4"/>
+                </a:cxn>
+              </a:cxnLst>
+              <a:rect l="l" t="t" r="r" b="b"/>
+              <a:pathLst>
+                <a:path w="807046" h="365629">
+                  <a:moveTo>
+                    <a:pt x="807046" y="3320"/>
+                  </a:moveTo>
+                  <a:cubicBezTo>
+                    <a:pt x="605763" y="444"/>
+                    <a:pt x="404480" y="-2431"/>
+                    <a:pt x="272208" y="3320"/>
+                  </a:cubicBezTo>
+                  <a:cubicBezTo>
+                    <a:pt x="139936" y="9071"/>
+                    <a:pt x="47922" y="-2431"/>
+                    <a:pt x="13416" y="37825"/>
+                  </a:cubicBezTo>
+                  <a:cubicBezTo>
+                    <a:pt x="-21090" y="78081"/>
+                    <a:pt x="16291" y="190225"/>
+                    <a:pt x="65174" y="244859"/>
+                  </a:cubicBezTo>
+                  <a:cubicBezTo>
+                    <a:pt x="114057" y="299493"/>
+                    <a:pt x="210385" y="332561"/>
+                    <a:pt x="306714" y="365629"/>
+                  </a:cubicBezTo>
+                </a:path>
+              </a:pathLst>
+            </a:custGeom>
+            <a:noFill/>
+            <a:ln w="38100">
+              <a:solidFill>
+                <a:schemeClr val="tx1"/>
+              </a:solidFill>
+              <a:headEnd type="none" w="med" len="med"/>
+              <a:tailEnd type="arrow" w="med" len="med"/>
+            </a:ln>
+            <a:effectLst/>
+          </p:spPr>
+          <p:style>
+            <a:lnRef idx="1">
+              <a:schemeClr val="accent1"/>
+            </a:lnRef>
+            <a:fillRef idx="3">
+              <a:schemeClr val="accent1"/>
+            </a:fillRef>
+            <a:effectRef idx="2">
+              <a:schemeClr val="accent1"/>
+            </a:effectRef>
+            <a:fontRef idx="minor">
+              <a:schemeClr val="lt1"/>
+            </a:fontRef>
+          </p:style>
+          <p:txBody>
+            <a:bodyPr rtlCol="0" anchor="ctr"/>
+            <a:lstStyle/>
+            <a:p>
+              <a:pPr algn="ctr"/>
+              <a:endParaRPr lang="en-US"/>
+            </a:p>
+          </p:txBody>
+        </p:sp>
+        <p:sp>
+          <p:nvSpPr>
+            <p:cNvPr id="17" name="Freeform 16">
+              <a:extLst>
+                <a:ext uri="{FF2B5EF4-FFF2-40B4-BE49-F238E27FC236}">
+                  <a16:creationId xmlns:a16="http://schemas.microsoft.com/office/drawing/2014/main" id="{488F534A-406A-50BF-6E36-A600259CA497}"/>
+                </a:ext>
+              </a:extLst>
+            </p:cNvPr>
+            <p:cNvSpPr/>
+            <p:nvPr/>
+          </p:nvSpPr>
+          <p:spPr>
+            <a:xfrm>
+              <a:off x="1799561" y="3782657"/>
+              <a:ext cx="692622" cy="569343"/>
+            </a:xfrm>
+            <a:custGeom>
+              <a:avLst/>
+              <a:gdLst>
+                <a:gd name="csX0" fmla="*/ 692622 w 692622"/>
+                <a:gd name="csY0" fmla="*/ 0 h 569343"/>
+                <a:gd name="csX1" fmla="*/ 106026 w 692622"/>
+                <a:gd name="csY1" fmla="*/ 258792 h 569343"/>
+                <a:gd name="csX2" fmla="*/ 2509 w 692622"/>
+                <a:gd name="csY2" fmla="*/ 569343 h 569343"/>
+              </a:gdLst>
+              <a:ahLst/>
+              <a:cxnLst>
+                <a:cxn ang="0">
+                  <a:pos x="csX0" y="csY0"/>
+                </a:cxn>
+                <a:cxn ang="0">
+                  <a:pos x="csX1" y="csY1"/>
+                </a:cxn>
+                <a:cxn ang="0">
+                  <a:pos x="csX2" y="csY2"/>
+                </a:cxn>
+              </a:cxnLst>
+              <a:rect l="l" t="t" r="r" b="b"/>
+              <a:pathLst>
+                <a:path w="692622" h="569343">
+                  <a:moveTo>
+                    <a:pt x="692622" y="0"/>
+                  </a:moveTo>
+                  <a:cubicBezTo>
+                    <a:pt x="456833" y="81951"/>
+                    <a:pt x="221045" y="163902"/>
+                    <a:pt x="106026" y="258792"/>
+                  </a:cubicBezTo>
+                  <a:cubicBezTo>
+                    <a:pt x="-8993" y="353683"/>
+                    <a:pt x="-3242" y="461513"/>
+                    <a:pt x="2509" y="569343"/>
+                  </a:cubicBezTo>
+                </a:path>
+              </a:pathLst>
+            </a:custGeom>
+            <a:noFill/>
+            <a:ln w="38100">
+              <a:solidFill>
+                <a:schemeClr val="tx1"/>
+              </a:solidFill>
+              <a:headEnd type="none" w="med" len="med"/>
+              <a:tailEnd type="arrow" w="med" len="med"/>
+            </a:ln>
+            <a:effectLst/>
+          </p:spPr>
+          <p:style>
+            <a:lnRef idx="1">
+              <a:schemeClr val="accent1"/>
+            </a:lnRef>
+            <a:fillRef idx="3">
+              <a:schemeClr val="accent1"/>
+            </a:fillRef>
+            <a:effectRef idx="2">
+              <a:schemeClr val="accent1"/>
+            </a:effectRef>
+            <a:fontRef idx="minor">
+              <a:schemeClr val="lt1"/>
+            </a:fontRef>
+          </p:style>
+          <p:txBody>
+            <a:bodyPr rtlCol="0" anchor="ctr"/>
+            <a:lstStyle/>
+            <a:p>
+              <a:pPr algn="ctr"/>
+              <a:endParaRPr lang="en-US"/>
+            </a:p>
+          </p:txBody>
+        </p:sp>
+      </p:grpSp>
+      <p:sp>
+        <p:nvSpPr>
+          <p:cNvPr id="18" name="TextBox 17">
+            <a:extLst>
+              <a:ext uri="{FF2B5EF4-FFF2-40B4-BE49-F238E27FC236}">
+                <a16:creationId xmlns:a16="http://schemas.microsoft.com/office/drawing/2014/main" id="{76097729-61A2-636E-F713-5E2E5B5C65AD}"/>
+              </a:ext>
+            </a:extLst>
+          </p:cNvPr>
+          <p:cNvSpPr txBox="1"/>
+          <p:nvPr/>
+        </p:nvSpPr>
+        <p:spPr>
+          <a:xfrm>
+            <a:off x="858217" y="1242519"/>
+            <a:ext cx="1734770" cy="523220"/>
+          </a:xfrm>
+          <a:prstGeom prst="rect">
+            <a:avLst/>
+          </a:prstGeom>
+          <a:noFill/>
+        </p:spPr>
+        <p:txBody>
+          <a:bodyPr wrap="none" rtlCol="0">
+            <a:spAutoFit/>
+          </a:bodyPr>
+          <a:lstStyle/>
+          <a:p>
+            <a:r>
+              <a:rPr lang="en-US" sz="2800" dirty="0">
+                <a:solidFill>
+                  <a:srgbClr val="0070C0"/>
+                </a:solidFill>
+              </a:rPr>
+              <a:t>generation</a:t>
+            </a:r>
+          </a:p>
+        </p:txBody>
+      </p:sp>
+      <p:sp>
+        <p:nvSpPr>
+          <p:cNvPr id="19" name="TextBox 18">
+            <a:extLst>
+              <a:ext uri="{FF2B5EF4-FFF2-40B4-BE49-F238E27FC236}">
+                <a16:creationId xmlns:a16="http://schemas.microsoft.com/office/drawing/2014/main" id="{E8F767AD-9C16-9202-96AA-5F34F014A9C1}"/>
+              </a:ext>
+            </a:extLst>
+          </p:cNvPr>
+          <p:cNvSpPr txBox="1"/>
+          <p:nvPr/>
+        </p:nvSpPr>
+        <p:spPr>
+          <a:xfrm>
+            <a:off x="5026641" y="1242519"/>
+            <a:ext cx="2007281" cy="523220"/>
+          </a:xfrm>
+          <a:prstGeom prst="rect">
+            <a:avLst/>
+          </a:prstGeom>
+          <a:noFill/>
+        </p:spPr>
+        <p:txBody>
+          <a:bodyPr wrap="none" rtlCol="0">
+            <a:spAutoFit/>
+          </a:bodyPr>
+          <a:lstStyle/>
+          <a:p>
+            <a:r>
+              <a:rPr lang="en-US" sz="2800" dirty="0">
+                <a:solidFill>
+                  <a:srgbClr val="0070C0"/>
+                </a:solidFill>
+              </a:rPr>
+              <a:t>maintenance</a:t>
+            </a:r>
+          </a:p>
+        </p:txBody>
+      </p:sp>
+      <p:sp>
+        <p:nvSpPr>
+          <p:cNvPr id="20" name="Right Arrow 19">
+            <a:extLst>
+              <a:ext uri="{FF2B5EF4-FFF2-40B4-BE49-F238E27FC236}">
+                <a16:creationId xmlns:a16="http://schemas.microsoft.com/office/drawing/2014/main" id="{B4F6B8C5-76A9-D19E-C4E2-1D3E534A491A}"/>
+              </a:ext>
+            </a:extLst>
+          </p:cNvPr>
+          <p:cNvSpPr/>
+          <p:nvPr/>
+        </p:nvSpPr>
+        <p:spPr>
+          <a:xfrm>
+            <a:off x="2881838" y="1310089"/>
+            <a:ext cx="1851732" cy="388081"/>
+          </a:xfrm>
+          <a:prstGeom prst="rightArrow">
+            <a:avLst/>
+          </a:prstGeom>
+          <a:solidFill>
+            <a:srgbClr val="0070C0"/>
+          </a:solidFill>
+          <a:ln>
+            <a:noFill/>
+          </a:ln>
+          <a:effectLst/>
+        </p:spPr>
+        <p:style>
+          <a:lnRef idx="1">
+            <a:schemeClr val="accent1"/>
+          </a:lnRef>
+          <a:fillRef idx="3">
+            <a:schemeClr val="accent1"/>
+          </a:fillRef>
+          <a:effectRef idx="2">
+            <a:schemeClr val="accent1"/>
+          </a:effectRef>
+          <a:fontRef idx="minor">
+            <a:schemeClr val="lt1"/>
+          </a:fontRef>
+        </p:style>
+        <p:txBody>
+          <a:bodyPr rtlCol="0" anchor="ctr"/>
+          <a:lstStyle/>
+          <a:p>
+            <a:pPr algn="ctr"/>
+            <a:endParaRPr lang="en-US"/>
+          </a:p>
+        </p:txBody>
+      </p:sp>
+      <p:sp>
+        <p:nvSpPr>
+          <p:cNvPr id="6" name="Oval 5">
+            <a:extLst>
+              <a:ext uri="{FF2B5EF4-FFF2-40B4-BE49-F238E27FC236}">
+                <a16:creationId xmlns:a16="http://schemas.microsoft.com/office/drawing/2014/main" id="{AF8F9BE6-D720-E0DC-4703-346A3C0063B3}"/>
+              </a:ext>
+            </a:extLst>
+          </p:cNvPr>
+          <p:cNvSpPr/>
+          <p:nvPr/>
+        </p:nvSpPr>
+        <p:spPr>
+          <a:xfrm>
+            <a:off x="5589899" y="3802657"/>
+            <a:ext cx="540000" cy="540000"/>
+          </a:xfrm>
+          <a:prstGeom prst="ellipse">
+            <a:avLst/>
+          </a:prstGeom>
+          <a:solidFill>
+            <a:srgbClr val="0070C0"/>
+          </a:solidFill>
+          <a:ln>
+            <a:noFill/>
+          </a:ln>
+          <a:effectLst/>
+        </p:spPr>
+        <p:style>
+          <a:lnRef idx="1">
+            <a:schemeClr val="accent1"/>
+          </a:lnRef>
+          <a:fillRef idx="3">
+            <a:schemeClr val="accent1"/>
+          </a:fillRef>
+          <a:effectRef idx="2">
+            <a:schemeClr val="accent1"/>
+          </a:effectRef>
+          <a:fontRef idx="minor">
+            <a:schemeClr val="lt1"/>
+          </a:fontRef>
+        </p:style>
+        <p:txBody>
+          <a:bodyPr rtlCol="0" anchor="ctr"/>
+          <a:lstStyle/>
+          <a:p>
+            <a:pPr algn="ctr"/>
+            <a:r>
+              <a:rPr lang="en-US" dirty="0"/>
+              <a:t>2</a:t>
+            </a:r>
+          </a:p>
+        </p:txBody>
+      </p:sp>
+    </p:spTree>
+    <p:extLst>
+      <p:ext uri="{BB962C8B-B14F-4D97-AF65-F5344CB8AC3E}">
+        <p14:creationId xmlns:p14="http://schemas.microsoft.com/office/powerpoint/2010/main" val="2892234403"/>
+      </p:ext>
+    </p:extLst>
+  </p:cSld>
+  <p:clrMapOvr>
+    <a:masterClrMapping/>
+  </p:clrMapOvr>
+</p:sld>
+</file>
+
+<file path=ppt/slides/slide3.xml><?xml version="1.0" encoding="utf-8"?>
 <p:sld xmlns:a="http://schemas.openxmlformats.org/drawingml/2006/main" xmlns:r="http://schemas.openxmlformats.org/officeDocument/2006/relationships" xmlns:p="http://schemas.openxmlformats.org/presentationml/2006/main">
   <p:cSld>
     <p:spTree>
@@ -20065,799 +22374,6 @@
 </p:sld>
 </file>
 
-<file path=ppt/slides/slide3.xml><?xml version="1.0" encoding="utf-8"?>
-<p:sld xmlns:a="http://schemas.openxmlformats.org/drawingml/2006/main" xmlns:r="http://schemas.openxmlformats.org/officeDocument/2006/relationships" xmlns:p="http://schemas.openxmlformats.org/presentationml/2006/main">
-  <p:cSld>
-    <p:spTree>
-      <p:nvGrpSpPr>
-        <p:cNvPr id="1" name=""/>
-        <p:cNvGrpSpPr/>
-        <p:nvPr/>
-      </p:nvGrpSpPr>
-      <p:grpSpPr>
-        <a:xfrm>
-          <a:off x="0" y="0"/>
-          <a:ext cx="0" cy="0"/>
-          <a:chOff x="0" y="0"/>
-          <a:chExt cx="0" cy="0"/>
-        </a:xfrm>
-      </p:grpSpPr>
-      <p:sp>
-        <p:nvSpPr>
-          <p:cNvPr id="3" name="Arc 2"/>
-          <p:cNvSpPr/>
-          <p:nvPr/>
-        </p:nvSpPr>
-        <p:spPr>
-          <a:xfrm>
-            <a:off x="2131619" y="3798429"/>
-            <a:ext cx="2520461" cy="2520461"/>
-          </a:xfrm>
-          <a:prstGeom prst="arc">
-            <a:avLst>
-              <a:gd name="adj1" fmla="val 16200000"/>
-              <a:gd name="adj2" fmla="val 14517589"/>
-            </a:avLst>
-          </a:prstGeom>
-          <a:ln w="76200" cmpd="sng">
-            <a:solidFill>
-              <a:srgbClr val="000000"/>
-            </a:solidFill>
-            <a:headEnd type="none"/>
-            <a:tailEnd type="arrow" w="lg" len="lg"/>
-          </a:ln>
-          <a:effectLst/>
-        </p:spPr>
-        <p:style>
-          <a:lnRef idx="2">
-            <a:schemeClr val="accent1"/>
-          </a:lnRef>
-          <a:fillRef idx="0">
-            <a:schemeClr val="accent1"/>
-          </a:fillRef>
-          <a:effectRef idx="1">
-            <a:schemeClr val="accent1"/>
-          </a:effectRef>
-          <a:fontRef idx="minor">
-            <a:schemeClr val="tx1"/>
-          </a:fontRef>
-        </p:style>
-        <p:txBody>
-          <a:bodyPr rtlCol="0" anchor="ctr"/>
-          <a:lstStyle/>
-          <a:p>
-            <a:pPr algn="ctr"/>
-            <a:endParaRPr lang="en-US"/>
-          </a:p>
-        </p:txBody>
-      </p:sp>
-      <p:sp>
-        <p:nvSpPr>
-          <p:cNvPr id="5" name="TextBox 4"/>
-          <p:cNvSpPr txBox="1"/>
-          <p:nvPr/>
-        </p:nvSpPr>
-        <p:spPr>
-          <a:xfrm>
-            <a:off x="2557050" y="4827827"/>
-            <a:ext cx="1669598" cy="461665"/>
-          </a:xfrm>
-          <a:prstGeom prst="rect">
-            <a:avLst/>
-          </a:prstGeom>
-          <a:noFill/>
-        </p:spPr>
-        <p:txBody>
-          <a:bodyPr wrap="none" rtlCol="0">
-            <a:spAutoFit/>
-          </a:bodyPr>
-          <a:lstStyle/>
-          <a:p>
-            <a:r>
-              <a:rPr lang="en-US" sz="2400" dirty="0" err="1"/>
-              <a:t>Kreb’s</a:t>
-            </a:r>
-            <a:r>
-              <a:rPr lang="en-US" sz="2400" dirty="0"/>
-              <a:t> cycle</a:t>
-            </a:r>
-          </a:p>
-        </p:txBody>
-      </p:sp>
-      <p:sp>
-        <p:nvSpPr>
-          <p:cNvPr id="6" name="TextBox 5"/>
-          <p:cNvSpPr txBox="1"/>
-          <p:nvPr/>
-        </p:nvSpPr>
-        <p:spPr>
-          <a:xfrm>
-            <a:off x="783673" y="1467009"/>
-            <a:ext cx="1178403" cy="400110"/>
-          </a:xfrm>
-          <a:prstGeom prst="rect">
-            <a:avLst/>
-          </a:prstGeom>
-          <a:noFill/>
-        </p:spPr>
-        <p:txBody>
-          <a:bodyPr wrap="none" rtlCol="0">
-            <a:spAutoFit/>
-          </a:bodyPr>
-          <a:lstStyle/>
-          <a:p>
-            <a:r>
-              <a:rPr lang="en-US" sz="2000" dirty="0" err="1"/>
-              <a:t>gluconate</a:t>
-            </a:r>
-            <a:endParaRPr lang="en-US" sz="2000" dirty="0"/>
-          </a:p>
-        </p:txBody>
-      </p:sp>
-      <p:sp>
-        <p:nvSpPr>
-          <p:cNvPr id="8" name="TextBox 7"/>
-          <p:cNvSpPr txBox="1"/>
-          <p:nvPr/>
-        </p:nvSpPr>
-        <p:spPr>
-          <a:xfrm>
-            <a:off x="6924577" y="1467009"/>
-            <a:ext cx="865817" cy="400110"/>
-          </a:xfrm>
-          <a:prstGeom prst="rect">
-            <a:avLst/>
-          </a:prstGeom>
-          <a:noFill/>
-        </p:spPr>
-        <p:txBody>
-          <a:bodyPr wrap="none" rtlCol="0">
-            <a:spAutoFit/>
-          </a:bodyPr>
-          <a:lstStyle/>
-          <a:p>
-            <a:r>
-              <a:rPr lang="en-US" sz="2000" dirty="0"/>
-              <a:t>lactate</a:t>
-            </a:r>
-          </a:p>
-        </p:txBody>
-      </p:sp>
-      <p:sp>
-        <p:nvSpPr>
-          <p:cNvPr id="9" name="TextBox 8"/>
-          <p:cNvSpPr txBox="1"/>
-          <p:nvPr/>
-        </p:nvSpPr>
-        <p:spPr>
-          <a:xfrm>
-            <a:off x="4871014" y="2177463"/>
-            <a:ext cx="932442" cy="400110"/>
-          </a:xfrm>
-          <a:prstGeom prst="rect">
-            <a:avLst/>
-          </a:prstGeom>
-          <a:noFill/>
-        </p:spPr>
-        <p:txBody>
-          <a:bodyPr wrap="none" rtlCol="0">
-            <a:spAutoFit/>
-          </a:bodyPr>
-          <a:lstStyle/>
-          <a:p>
-            <a:r>
-              <a:rPr lang="en-US" sz="2000" dirty="0"/>
-              <a:t>acetate</a:t>
-            </a:r>
-          </a:p>
-        </p:txBody>
-      </p:sp>
-      <p:sp>
-        <p:nvSpPr>
-          <p:cNvPr id="10" name="TextBox 9"/>
-          <p:cNvSpPr txBox="1"/>
-          <p:nvPr/>
-        </p:nvSpPr>
-        <p:spPr>
-          <a:xfrm>
-            <a:off x="4871014" y="3598374"/>
-            <a:ext cx="857927" cy="400110"/>
-          </a:xfrm>
-          <a:prstGeom prst="rect">
-            <a:avLst/>
-          </a:prstGeom>
-          <a:noFill/>
-        </p:spPr>
-        <p:txBody>
-          <a:bodyPr wrap="none" rtlCol="0">
-            <a:spAutoFit/>
-          </a:bodyPr>
-          <a:lstStyle/>
-          <a:p>
-            <a:r>
-              <a:rPr lang="en-US" sz="2000" dirty="0"/>
-              <a:t>citrate</a:t>
-            </a:r>
-          </a:p>
-        </p:txBody>
-      </p:sp>
-      <p:sp>
-        <p:nvSpPr>
-          <p:cNvPr id="11" name="TextBox 10"/>
-          <p:cNvSpPr txBox="1"/>
-          <p:nvPr/>
-        </p:nvSpPr>
-        <p:spPr>
-          <a:xfrm>
-            <a:off x="2939554" y="1467009"/>
-            <a:ext cx="953982" cy="400110"/>
-          </a:xfrm>
-          <a:prstGeom prst="rect">
-            <a:avLst/>
-          </a:prstGeom>
-          <a:noFill/>
-        </p:spPr>
-        <p:txBody>
-          <a:bodyPr wrap="none" rtlCol="0">
-            <a:spAutoFit/>
-          </a:bodyPr>
-          <a:lstStyle/>
-          <a:p>
-            <a:r>
-              <a:rPr lang="en-US" sz="2000" dirty="0"/>
-              <a:t>glucose</a:t>
-            </a:r>
-          </a:p>
-        </p:txBody>
-      </p:sp>
-      <p:sp>
-        <p:nvSpPr>
-          <p:cNvPr id="12" name="TextBox 11"/>
-          <p:cNvSpPr txBox="1"/>
-          <p:nvPr/>
-        </p:nvSpPr>
-        <p:spPr>
-          <a:xfrm>
-            <a:off x="4871014" y="1467009"/>
-            <a:ext cx="1076086" cy="400110"/>
-          </a:xfrm>
-          <a:prstGeom prst="rect">
-            <a:avLst/>
-          </a:prstGeom>
-          <a:noFill/>
-        </p:spPr>
-        <p:txBody>
-          <a:bodyPr wrap="none" rtlCol="0">
-            <a:spAutoFit/>
-          </a:bodyPr>
-          <a:lstStyle/>
-          <a:p>
-            <a:r>
-              <a:rPr lang="en-US" sz="2000" dirty="0"/>
-              <a:t>pyruvate</a:t>
-            </a:r>
-          </a:p>
-        </p:txBody>
-      </p:sp>
-      <p:sp>
-        <p:nvSpPr>
-          <p:cNvPr id="13" name="TextBox 12"/>
-          <p:cNvSpPr txBox="1"/>
-          <p:nvPr/>
-        </p:nvSpPr>
-        <p:spPr>
-          <a:xfrm>
-            <a:off x="5352809" y="5065988"/>
-            <a:ext cx="471495" cy="400110"/>
-          </a:xfrm>
-          <a:prstGeom prst="rect">
-            <a:avLst/>
-          </a:prstGeom>
-          <a:noFill/>
-        </p:spPr>
-        <p:txBody>
-          <a:bodyPr wrap="none" rtlCol="0">
-            <a:spAutoFit/>
-          </a:bodyPr>
-          <a:lstStyle/>
-          <a:p>
-            <a:r>
-              <a:rPr lang="en-US" sz="2000" dirty="0"/>
-              <a:t>H</a:t>
-            </a:r>
-            <a:r>
-              <a:rPr lang="en-US" sz="2000" baseline="30000" dirty="0"/>
-              <a:t>+</a:t>
-            </a:r>
-          </a:p>
-        </p:txBody>
-      </p:sp>
-      <p:sp>
-        <p:nvSpPr>
-          <p:cNvPr id="14" name="TextBox 13"/>
-          <p:cNvSpPr txBox="1"/>
-          <p:nvPr/>
-        </p:nvSpPr>
-        <p:spPr>
-          <a:xfrm>
-            <a:off x="4807776" y="5952326"/>
-            <a:ext cx="662895" cy="400110"/>
-          </a:xfrm>
-          <a:prstGeom prst="rect">
-            <a:avLst/>
-          </a:prstGeom>
-          <a:noFill/>
-        </p:spPr>
-        <p:txBody>
-          <a:bodyPr wrap="none" rtlCol="0">
-            <a:spAutoFit/>
-          </a:bodyPr>
-          <a:lstStyle/>
-          <a:p>
-            <a:r>
-              <a:rPr lang="en-US" sz="2000" dirty="0"/>
-              <a:t>CO</a:t>
-            </a:r>
-            <a:r>
-              <a:rPr lang="en-US" sz="2000" baseline="-25000" dirty="0"/>
-              <a:t>2</a:t>
-            </a:r>
-          </a:p>
-        </p:txBody>
-      </p:sp>
-      <p:sp>
-        <p:nvSpPr>
-          <p:cNvPr id="15" name="TextBox 14"/>
-          <p:cNvSpPr txBox="1"/>
-          <p:nvPr/>
-        </p:nvSpPr>
-        <p:spPr>
-          <a:xfrm>
-            <a:off x="4871014" y="2887917"/>
-            <a:ext cx="1360368" cy="400110"/>
-          </a:xfrm>
-          <a:prstGeom prst="rect">
-            <a:avLst/>
-          </a:prstGeom>
-          <a:noFill/>
-        </p:spPr>
-        <p:txBody>
-          <a:bodyPr wrap="none" rtlCol="0">
-            <a:spAutoFit/>
-          </a:bodyPr>
-          <a:lstStyle/>
-          <a:p>
-            <a:r>
-              <a:rPr lang="en-US" sz="2000" dirty="0"/>
-              <a:t>acetyl-CoA</a:t>
-            </a:r>
-          </a:p>
-        </p:txBody>
-      </p:sp>
-      <p:sp>
-        <p:nvSpPr>
-          <p:cNvPr id="16" name="Arc 15"/>
-          <p:cNvSpPr/>
-          <p:nvPr/>
-        </p:nvSpPr>
-        <p:spPr>
-          <a:xfrm rot="3614405">
-            <a:off x="4560566" y="5111975"/>
-            <a:ext cx="1002818" cy="1002818"/>
-          </a:xfrm>
-          <a:prstGeom prst="arc">
-            <a:avLst>
-              <a:gd name="adj1" fmla="val 3365742"/>
-              <a:gd name="adj2" fmla="val 14517589"/>
-            </a:avLst>
-          </a:prstGeom>
-          <a:ln w="38100" cmpd="sng">
-            <a:solidFill>
-              <a:srgbClr val="FF0000"/>
-            </a:solidFill>
-            <a:headEnd type="arrow" w="med" len="med"/>
-            <a:tailEnd type="none" w="lg" len="lg"/>
-          </a:ln>
-          <a:effectLst/>
-        </p:spPr>
-        <p:style>
-          <a:lnRef idx="2">
-            <a:schemeClr val="accent1"/>
-          </a:lnRef>
-          <a:fillRef idx="0">
-            <a:schemeClr val="accent1"/>
-          </a:fillRef>
-          <a:effectRef idx="1">
-            <a:schemeClr val="accent1"/>
-          </a:effectRef>
-          <a:fontRef idx="minor">
-            <a:schemeClr val="tx1"/>
-          </a:fontRef>
-        </p:style>
-        <p:txBody>
-          <a:bodyPr rtlCol="0" anchor="ctr"/>
-          <a:lstStyle/>
-          <a:p>
-            <a:pPr algn="ctr"/>
-            <a:endParaRPr lang="en-US"/>
-          </a:p>
-        </p:txBody>
-      </p:sp>
-      <p:cxnSp>
-        <p:nvCxnSpPr>
-          <p:cNvPr id="18" name="Straight Arrow Connector 17"/>
-          <p:cNvCxnSpPr/>
-          <p:nvPr/>
-        </p:nvCxnSpPr>
-        <p:spPr>
-          <a:xfrm>
-            <a:off x="2156434" y="1689244"/>
-            <a:ext cx="588762" cy="0"/>
-          </a:xfrm>
-          <a:prstGeom prst="straightConnector1">
-            <a:avLst/>
-          </a:prstGeom>
-          <a:ln w="12700" cmpd="sng">
-            <a:solidFill>
-              <a:schemeClr val="tx1"/>
-            </a:solidFill>
-            <a:tailEnd type="arrow"/>
-          </a:ln>
-          <a:effectLst/>
-        </p:spPr>
-        <p:style>
-          <a:lnRef idx="2">
-            <a:schemeClr val="accent1"/>
-          </a:lnRef>
-          <a:fillRef idx="0">
-            <a:schemeClr val="accent1"/>
-          </a:fillRef>
-          <a:effectRef idx="1">
-            <a:schemeClr val="accent1"/>
-          </a:effectRef>
-          <a:fontRef idx="minor">
-            <a:schemeClr val="tx1"/>
-          </a:fontRef>
-        </p:style>
-      </p:cxnSp>
-      <p:cxnSp>
-        <p:nvCxnSpPr>
-          <p:cNvPr id="19" name="Straight Arrow Connector 18"/>
-          <p:cNvCxnSpPr/>
-          <p:nvPr/>
-        </p:nvCxnSpPr>
-        <p:spPr>
-          <a:xfrm>
-            <a:off x="4087894" y="1689244"/>
-            <a:ext cx="588762" cy="0"/>
-          </a:xfrm>
-          <a:prstGeom prst="straightConnector1">
-            <a:avLst/>
-          </a:prstGeom>
-          <a:ln w="12700" cmpd="sng">
-            <a:solidFill>
-              <a:schemeClr val="tx1"/>
-            </a:solidFill>
-            <a:tailEnd type="arrow"/>
-          </a:ln>
-          <a:effectLst/>
-        </p:spPr>
-        <p:style>
-          <a:lnRef idx="2">
-            <a:schemeClr val="accent1"/>
-          </a:lnRef>
-          <a:fillRef idx="0">
-            <a:schemeClr val="accent1"/>
-          </a:fillRef>
-          <a:effectRef idx="1">
-            <a:schemeClr val="accent1"/>
-          </a:effectRef>
-          <a:fontRef idx="minor">
-            <a:schemeClr val="tx1"/>
-          </a:fontRef>
-        </p:style>
-      </p:cxnSp>
-      <p:cxnSp>
-        <p:nvCxnSpPr>
-          <p:cNvPr id="20" name="Straight Arrow Connector 19"/>
-          <p:cNvCxnSpPr/>
-          <p:nvPr/>
-        </p:nvCxnSpPr>
-        <p:spPr>
-          <a:xfrm flipH="1">
-            <a:off x="6141458" y="1689244"/>
-            <a:ext cx="588762" cy="0"/>
-          </a:xfrm>
-          <a:prstGeom prst="straightConnector1">
-            <a:avLst/>
-          </a:prstGeom>
-          <a:ln w="12700" cmpd="sng">
-            <a:solidFill>
-              <a:schemeClr val="tx1"/>
-            </a:solidFill>
-            <a:tailEnd type="arrow"/>
-          </a:ln>
-          <a:effectLst/>
-        </p:spPr>
-        <p:style>
-          <a:lnRef idx="2">
-            <a:schemeClr val="accent1"/>
-          </a:lnRef>
-          <a:fillRef idx="0">
-            <a:schemeClr val="accent1"/>
-          </a:fillRef>
-          <a:effectRef idx="1">
-            <a:schemeClr val="accent1"/>
-          </a:effectRef>
-          <a:fontRef idx="minor">
-            <a:schemeClr val="tx1"/>
-          </a:fontRef>
-        </p:style>
-      </p:cxnSp>
-      <p:cxnSp>
-        <p:nvCxnSpPr>
-          <p:cNvPr id="21" name="Straight Arrow Connector 20"/>
-          <p:cNvCxnSpPr/>
-          <p:nvPr/>
-        </p:nvCxnSpPr>
-        <p:spPr>
-          <a:xfrm>
-            <a:off x="5364598" y="1857170"/>
-            <a:ext cx="0" cy="305676"/>
-          </a:xfrm>
-          <a:prstGeom prst="straightConnector1">
-            <a:avLst/>
-          </a:prstGeom>
-          <a:ln w="12700" cmpd="sng">
-            <a:solidFill>
-              <a:schemeClr val="tx1"/>
-            </a:solidFill>
-            <a:tailEnd type="arrow"/>
-          </a:ln>
-          <a:effectLst/>
-        </p:spPr>
-        <p:style>
-          <a:lnRef idx="2">
-            <a:schemeClr val="accent1"/>
-          </a:lnRef>
-          <a:fillRef idx="0">
-            <a:schemeClr val="accent1"/>
-          </a:fillRef>
-          <a:effectRef idx="1">
-            <a:schemeClr val="accent1"/>
-          </a:effectRef>
-          <a:fontRef idx="minor">
-            <a:schemeClr val="tx1"/>
-          </a:fontRef>
-        </p:style>
-      </p:cxnSp>
-      <p:cxnSp>
-        <p:nvCxnSpPr>
-          <p:cNvPr id="23" name="Straight Arrow Connector 22"/>
-          <p:cNvCxnSpPr/>
-          <p:nvPr/>
-        </p:nvCxnSpPr>
-        <p:spPr>
-          <a:xfrm>
-            <a:off x="5364598" y="2577672"/>
-            <a:ext cx="0" cy="305676"/>
-          </a:xfrm>
-          <a:prstGeom prst="straightConnector1">
-            <a:avLst/>
-          </a:prstGeom>
-          <a:ln w="12700" cmpd="sng">
-            <a:solidFill>
-              <a:schemeClr val="tx1"/>
-            </a:solidFill>
-            <a:tailEnd type="arrow"/>
-          </a:ln>
-          <a:effectLst/>
-        </p:spPr>
-        <p:style>
-          <a:lnRef idx="2">
-            <a:schemeClr val="accent1"/>
-          </a:lnRef>
-          <a:fillRef idx="0">
-            <a:schemeClr val="accent1"/>
-          </a:fillRef>
-          <a:effectRef idx="1">
-            <a:schemeClr val="accent1"/>
-          </a:effectRef>
-          <a:fontRef idx="minor">
-            <a:schemeClr val="tx1"/>
-          </a:fontRef>
-        </p:style>
-      </p:cxnSp>
-      <p:cxnSp>
-        <p:nvCxnSpPr>
-          <p:cNvPr id="24" name="Straight Arrow Connector 23"/>
-          <p:cNvCxnSpPr/>
-          <p:nvPr/>
-        </p:nvCxnSpPr>
-        <p:spPr>
-          <a:xfrm>
-            <a:off x="5364598" y="3308222"/>
-            <a:ext cx="0" cy="305676"/>
-          </a:xfrm>
-          <a:prstGeom prst="straightConnector1">
-            <a:avLst/>
-          </a:prstGeom>
-          <a:ln w="12700" cmpd="sng">
-            <a:solidFill>
-              <a:schemeClr val="tx1"/>
-            </a:solidFill>
-            <a:tailEnd type="arrow"/>
-          </a:ln>
-          <a:effectLst/>
-        </p:spPr>
-        <p:style>
-          <a:lnRef idx="2">
-            <a:schemeClr val="accent1"/>
-          </a:lnRef>
-          <a:fillRef idx="0">
-            <a:schemeClr val="accent1"/>
-          </a:fillRef>
-          <a:effectRef idx="1">
-            <a:schemeClr val="accent1"/>
-          </a:effectRef>
-          <a:fontRef idx="minor">
-            <a:schemeClr val="tx1"/>
-          </a:fontRef>
-        </p:style>
-      </p:cxnSp>
-      <p:cxnSp>
-        <p:nvCxnSpPr>
-          <p:cNvPr id="25" name="Straight Arrow Connector 24"/>
-          <p:cNvCxnSpPr/>
-          <p:nvPr/>
-        </p:nvCxnSpPr>
-        <p:spPr>
-          <a:xfrm flipH="1">
-            <a:off x="4675522" y="4052236"/>
-            <a:ext cx="283800" cy="305676"/>
-          </a:xfrm>
-          <a:prstGeom prst="straightConnector1">
-            <a:avLst/>
-          </a:prstGeom>
-          <a:ln w="12700" cmpd="sng">
-            <a:solidFill>
-              <a:schemeClr val="tx1"/>
-            </a:solidFill>
-            <a:tailEnd type="arrow"/>
-          </a:ln>
-          <a:effectLst/>
-        </p:spPr>
-        <p:style>
-          <a:lnRef idx="2">
-            <a:schemeClr val="accent1"/>
-          </a:lnRef>
-          <a:fillRef idx="0">
-            <a:schemeClr val="accent1"/>
-          </a:fillRef>
-          <a:effectRef idx="1">
-            <a:schemeClr val="accent1"/>
-          </a:effectRef>
-          <a:fontRef idx="minor">
-            <a:schemeClr val="tx1"/>
-          </a:fontRef>
-        </p:style>
-      </p:cxnSp>
-      <p:sp>
-        <p:nvSpPr>
-          <p:cNvPr id="27" name="Right Brace 26"/>
-          <p:cNvSpPr/>
-          <p:nvPr/>
-        </p:nvSpPr>
-        <p:spPr>
-          <a:xfrm>
-            <a:off x="5804752" y="4968297"/>
-            <a:ext cx="428016" cy="1423215"/>
-          </a:xfrm>
-          <a:prstGeom prst="rightBrace">
-            <a:avLst>
-              <a:gd name="adj1" fmla="val 54975"/>
-              <a:gd name="adj2" fmla="val 50000"/>
-            </a:avLst>
-          </a:prstGeom>
-          <a:ln w="6350" cmpd="sng">
-            <a:solidFill>
-              <a:schemeClr val="tx1"/>
-            </a:solidFill>
-            <a:prstDash val="solid"/>
-          </a:ln>
-        </p:spPr>
-        <p:style>
-          <a:lnRef idx="2">
-            <a:schemeClr val="accent1"/>
-          </a:lnRef>
-          <a:fillRef idx="0">
-            <a:schemeClr val="accent1"/>
-          </a:fillRef>
-          <a:effectRef idx="1">
-            <a:schemeClr val="accent1"/>
-          </a:effectRef>
-          <a:fontRef idx="minor">
-            <a:schemeClr val="tx1"/>
-          </a:fontRef>
-        </p:style>
-        <p:txBody>
-          <a:bodyPr rtlCol="0" anchor="ctr"/>
-          <a:lstStyle/>
-          <a:p>
-            <a:pPr algn="ctr"/>
-            <a:endParaRPr lang="en-US"/>
-          </a:p>
-        </p:txBody>
-      </p:sp>
-      <p:sp>
-        <p:nvSpPr>
-          <p:cNvPr id="29" name="TextBox 28"/>
-          <p:cNvSpPr txBox="1"/>
-          <p:nvPr/>
-        </p:nvSpPr>
-        <p:spPr>
-          <a:xfrm>
-            <a:off x="6261231" y="5466098"/>
-            <a:ext cx="2319872" cy="846386"/>
-          </a:xfrm>
-          <a:prstGeom prst="rect">
-            <a:avLst/>
-          </a:prstGeom>
-          <a:noFill/>
-        </p:spPr>
-        <p:txBody>
-          <a:bodyPr wrap="none" rtlCol="0">
-            <a:spAutoFit/>
-          </a:bodyPr>
-          <a:lstStyle/>
-          <a:p>
-            <a:pPr algn="r"/>
-            <a:r>
-              <a:rPr lang="en-US" sz="2000" dirty="0"/>
-              <a:t>= HCO</a:t>
-            </a:r>
-            <a:r>
-              <a:rPr lang="en-US" sz="2000" baseline="-25000" dirty="0"/>
-              <a:t>3</a:t>
-            </a:r>
-            <a:r>
-              <a:rPr lang="en-US" sz="2000" dirty="0"/>
-              <a:t> production</a:t>
-            </a:r>
-          </a:p>
-          <a:p>
-            <a:pPr algn="r"/>
-            <a:endParaRPr lang="en-US" sz="800" dirty="0"/>
-          </a:p>
-          <a:p>
-            <a:pPr algn="r"/>
-            <a:r>
-              <a:rPr lang="en-US" sz="2000" i="1" dirty="0">
-                <a:solidFill>
-                  <a:schemeClr val="tx2">
-                    <a:lumMod val="50000"/>
-                    <a:lumOff val="50000"/>
-                  </a:schemeClr>
-                </a:solidFill>
-              </a:rPr>
-              <a:t>(1:1 molar ratio)</a:t>
-            </a:r>
-          </a:p>
-        </p:txBody>
-      </p:sp>
-    </p:spTree>
-    <p:extLst>
-      <p:ext uri="{BB962C8B-B14F-4D97-AF65-F5344CB8AC3E}">
-        <p14:creationId xmlns:p14="http://schemas.microsoft.com/office/powerpoint/2010/main" val="721384016"/>
-      </p:ext>
-    </p:extLst>
-  </p:cSld>
-  <p:clrMapOvr>
-    <a:masterClrMapping/>
-  </p:clrMapOvr>
-</p:sld>
-</file>
-
 <file path=ppt/slides/slide4.xml><?xml version="1.0" encoding="utf-8"?>
 <p:sld xmlns:a="http://schemas.openxmlformats.org/drawingml/2006/main" xmlns:r="http://schemas.openxmlformats.org/officeDocument/2006/relationships" xmlns:p="http://schemas.openxmlformats.org/presentationml/2006/main">
   <p:cSld>
@@ -20875,295 +22391,773 @@
           <a:chExt cx="0" cy="0"/>
         </a:xfrm>
       </p:grpSpPr>
-      <p:pic>
-        <p:nvPicPr>
-          <p:cNvPr id="4" name="Picture 3" descr="Screen Shot 2016-03-28 at 22.02.23.png"/>
-          <p:cNvPicPr>
-            <a:picLocks noChangeAspect="1"/>
-          </p:cNvPicPr>
-          <p:nvPr/>
-        </p:nvPicPr>
-        <p:blipFill>
-          <a:blip r:embed="rId2" cstate="screen">
-            <a:extLst>
-              <a:ext uri="{28A0092B-C50C-407E-A947-70E740481C1C}">
-                <a14:useLocalDpi xmlns:a14="http://schemas.microsoft.com/office/drawing/2010/main" val="0"/>
-              </a:ext>
-            </a:extLst>
-          </a:blip>
-          <a:stretch>
-            <a:fillRect/>
-          </a:stretch>
-        </p:blipFill>
+      <p:sp>
+        <p:nvSpPr>
+          <p:cNvPr id="3" name="Arc 2"/>
+          <p:cNvSpPr/>
+          <p:nvPr/>
+        </p:nvSpPr>
         <p:spPr>
           <a:xfrm>
-            <a:off x="5604786" y="1417638"/>
-            <a:ext cx="3352941" cy="4708525"/>
+            <a:off x="2131619" y="3798429"/>
+            <a:ext cx="2520461" cy="2520461"/>
+          </a:xfrm>
+          <a:prstGeom prst="arc">
+            <a:avLst>
+              <a:gd name="adj1" fmla="val 16200000"/>
+              <a:gd name="adj2" fmla="val 14517589"/>
+            </a:avLst>
+          </a:prstGeom>
+          <a:ln w="76200" cmpd="sng">
+            <a:solidFill>
+              <a:srgbClr val="000000"/>
+            </a:solidFill>
+            <a:headEnd type="none"/>
+            <a:tailEnd type="arrow" w="lg" len="lg"/>
+          </a:ln>
+          <a:effectLst/>
+        </p:spPr>
+        <p:style>
+          <a:lnRef idx="2">
+            <a:schemeClr val="accent1"/>
+          </a:lnRef>
+          <a:fillRef idx="0">
+            <a:schemeClr val="accent1"/>
+          </a:fillRef>
+          <a:effectRef idx="1">
+            <a:schemeClr val="accent1"/>
+          </a:effectRef>
+          <a:fontRef idx="minor">
+            <a:schemeClr val="tx1"/>
+          </a:fontRef>
+        </p:style>
+        <p:txBody>
+          <a:bodyPr rtlCol="0" anchor="ctr"/>
+          <a:lstStyle/>
+          <a:p>
+            <a:pPr algn="ctr"/>
+            <a:endParaRPr lang="en-US"/>
+          </a:p>
+        </p:txBody>
+      </p:sp>
+      <p:sp>
+        <p:nvSpPr>
+          <p:cNvPr id="5" name="TextBox 4"/>
+          <p:cNvSpPr txBox="1"/>
+          <p:nvPr/>
+        </p:nvSpPr>
+        <p:spPr>
+          <a:xfrm>
+            <a:off x="2557050" y="4827827"/>
+            <a:ext cx="1669598" cy="461665"/>
           </a:xfrm>
           <a:prstGeom prst="rect">
             <a:avLst/>
           </a:prstGeom>
-        </p:spPr>
-      </p:pic>
-      <p:sp>
-        <p:nvSpPr>
-          <p:cNvPr id="6" name="Content Placeholder 4"/>
-          <p:cNvSpPr>
-            <a:spLocks noGrp="1"/>
-          </p:cNvSpPr>
-          <p:nvPr>
-            <p:ph idx="1"/>
-          </p:nvPr>
+          <a:noFill/>
+        </p:spPr>
+        <p:txBody>
+          <a:bodyPr wrap="none" rtlCol="0">
+            <a:spAutoFit/>
+          </a:bodyPr>
+          <a:lstStyle/>
+          <a:p>
+            <a:r>
+              <a:rPr lang="en-US" sz="2400" dirty="0" err="1"/>
+              <a:t>Kreb’s</a:t>
+            </a:r>
+            <a:r>
+              <a:rPr lang="en-US" sz="2400" dirty="0"/>
+              <a:t> cycle</a:t>
+            </a:r>
+          </a:p>
+        </p:txBody>
+      </p:sp>
+      <p:sp>
+        <p:nvSpPr>
+          <p:cNvPr id="6" name="TextBox 5"/>
+          <p:cNvSpPr txBox="1"/>
+          <p:nvPr/>
         </p:nvSpPr>
         <p:spPr>
           <a:xfrm>
-            <a:off x="359510" y="1600200"/>
-            <a:ext cx="4769853" cy="4525963"/>
-          </a:xfrm>
-        </p:spPr>
-        <p:txBody>
-          <a:bodyPr>
-            <a:noAutofit/>
+            <a:off x="783673" y="1467009"/>
+            <a:ext cx="1178403" cy="400110"/>
+          </a:xfrm>
+          <a:prstGeom prst="rect">
+            <a:avLst/>
+          </a:prstGeom>
+          <a:noFill/>
+        </p:spPr>
+        <p:txBody>
+          <a:bodyPr wrap="none" rtlCol="0">
+            <a:spAutoFit/>
           </a:bodyPr>
           <a:lstStyle/>
           <a:p>
-            <a:pPr marL="0" indent="0">
-              <a:buNone/>
-            </a:pPr>
-            <a:r>
-              <a:rPr lang="en-GB" sz="2400" dirty="0"/>
-              <a:t>Sources of error</a:t>
-            </a:r>
-            <a:r>
-              <a:rPr lang="is-IS" sz="2400" dirty="0"/>
-              <a:t>…</a:t>
-            </a:r>
-            <a:endParaRPr lang="en-US" sz="2400" dirty="0"/>
-          </a:p>
-          <a:p>
-            <a:endParaRPr lang="en-US" sz="1400" dirty="0"/>
-          </a:p>
-          <a:p>
-            <a:r>
-              <a:rPr lang="en-US" sz="2400" dirty="0">
+            <a:r>
+              <a:rPr lang="en-US" sz="2000" dirty="0" err="1"/>
+              <a:t>gluconate</a:t>
+            </a:r>
+            <a:endParaRPr lang="en-US" sz="2000" dirty="0"/>
+          </a:p>
+        </p:txBody>
+      </p:sp>
+      <p:sp>
+        <p:nvSpPr>
+          <p:cNvPr id="8" name="TextBox 7"/>
+          <p:cNvSpPr txBox="1"/>
+          <p:nvPr/>
+        </p:nvSpPr>
+        <p:spPr>
+          <a:xfrm>
+            <a:off x="6924577" y="1467009"/>
+            <a:ext cx="865817" cy="400110"/>
+          </a:xfrm>
+          <a:prstGeom prst="rect">
+            <a:avLst/>
+          </a:prstGeom>
+          <a:noFill/>
+        </p:spPr>
+        <p:txBody>
+          <a:bodyPr wrap="none" rtlCol="0">
+            <a:spAutoFit/>
+          </a:bodyPr>
+          <a:lstStyle/>
+          <a:p>
+            <a:r>
+              <a:rPr lang="en-US" sz="2000" dirty="0"/>
+              <a:t>lactate</a:t>
+            </a:r>
+          </a:p>
+        </p:txBody>
+      </p:sp>
+      <p:sp>
+        <p:nvSpPr>
+          <p:cNvPr id="9" name="TextBox 8"/>
+          <p:cNvSpPr txBox="1"/>
+          <p:nvPr/>
+        </p:nvSpPr>
+        <p:spPr>
+          <a:xfrm>
+            <a:off x="4871014" y="2177463"/>
+            <a:ext cx="932442" cy="400110"/>
+          </a:xfrm>
+          <a:prstGeom prst="rect">
+            <a:avLst/>
+          </a:prstGeom>
+          <a:noFill/>
+        </p:spPr>
+        <p:txBody>
+          <a:bodyPr wrap="none" rtlCol="0">
+            <a:spAutoFit/>
+          </a:bodyPr>
+          <a:lstStyle/>
+          <a:p>
+            <a:r>
+              <a:rPr lang="en-US" sz="2000" dirty="0"/>
+              <a:t>acetate</a:t>
+            </a:r>
+          </a:p>
+        </p:txBody>
+      </p:sp>
+      <p:sp>
+        <p:nvSpPr>
+          <p:cNvPr id="10" name="TextBox 9"/>
+          <p:cNvSpPr txBox="1"/>
+          <p:nvPr/>
+        </p:nvSpPr>
+        <p:spPr>
+          <a:xfrm>
+            <a:off x="4871014" y="3598374"/>
+            <a:ext cx="857927" cy="400110"/>
+          </a:xfrm>
+          <a:prstGeom prst="rect">
+            <a:avLst/>
+          </a:prstGeom>
+          <a:noFill/>
+        </p:spPr>
+        <p:txBody>
+          <a:bodyPr wrap="none" rtlCol="0">
+            <a:spAutoFit/>
+          </a:bodyPr>
+          <a:lstStyle/>
+          <a:p>
+            <a:r>
+              <a:rPr lang="en-US" sz="2000" dirty="0"/>
+              <a:t>citrate</a:t>
+            </a:r>
+          </a:p>
+        </p:txBody>
+      </p:sp>
+      <p:sp>
+        <p:nvSpPr>
+          <p:cNvPr id="11" name="TextBox 10"/>
+          <p:cNvSpPr txBox="1"/>
+          <p:nvPr/>
+        </p:nvSpPr>
+        <p:spPr>
+          <a:xfrm>
+            <a:off x="2939554" y="1467009"/>
+            <a:ext cx="953982" cy="400110"/>
+          </a:xfrm>
+          <a:prstGeom prst="rect">
+            <a:avLst/>
+          </a:prstGeom>
+          <a:noFill/>
+        </p:spPr>
+        <p:txBody>
+          <a:bodyPr wrap="none" rtlCol="0">
+            <a:spAutoFit/>
+          </a:bodyPr>
+          <a:lstStyle/>
+          <a:p>
+            <a:r>
+              <a:rPr lang="en-US" sz="2000" dirty="0"/>
+              <a:t>glucose</a:t>
+            </a:r>
+          </a:p>
+        </p:txBody>
+      </p:sp>
+      <p:sp>
+        <p:nvSpPr>
+          <p:cNvPr id="12" name="TextBox 11"/>
+          <p:cNvSpPr txBox="1"/>
+          <p:nvPr/>
+        </p:nvSpPr>
+        <p:spPr>
+          <a:xfrm>
+            <a:off x="4871014" y="1467009"/>
+            <a:ext cx="1076086" cy="400110"/>
+          </a:xfrm>
+          <a:prstGeom prst="rect">
+            <a:avLst/>
+          </a:prstGeom>
+          <a:noFill/>
+        </p:spPr>
+        <p:txBody>
+          <a:bodyPr wrap="none" rtlCol="0">
+            <a:spAutoFit/>
+          </a:bodyPr>
+          <a:lstStyle/>
+          <a:p>
+            <a:r>
+              <a:rPr lang="en-US" sz="2000" dirty="0"/>
+              <a:t>pyruvate</a:t>
+            </a:r>
+          </a:p>
+        </p:txBody>
+      </p:sp>
+      <p:sp>
+        <p:nvSpPr>
+          <p:cNvPr id="13" name="TextBox 12"/>
+          <p:cNvSpPr txBox="1"/>
+          <p:nvPr/>
+        </p:nvSpPr>
+        <p:spPr>
+          <a:xfrm>
+            <a:off x="5352809" y="5065988"/>
+            <a:ext cx="471495" cy="400110"/>
+          </a:xfrm>
+          <a:prstGeom prst="rect">
+            <a:avLst/>
+          </a:prstGeom>
+          <a:noFill/>
+        </p:spPr>
+        <p:txBody>
+          <a:bodyPr wrap="none" rtlCol="0">
+            <a:spAutoFit/>
+          </a:bodyPr>
+          <a:lstStyle/>
+          <a:p>
+            <a:r>
+              <a:rPr lang="en-US" sz="2000" dirty="0"/>
+              <a:t>H</a:t>
+            </a:r>
+            <a:r>
+              <a:rPr lang="en-US" sz="2000" baseline="30000" dirty="0"/>
+              <a:t>+</a:t>
+            </a:r>
+          </a:p>
+        </p:txBody>
+      </p:sp>
+      <p:sp>
+        <p:nvSpPr>
+          <p:cNvPr id="14" name="TextBox 13"/>
+          <p:cNvSpPr txBox="1"/>
+          <p:nvPr/>
+        </p:nvSpPr>
+        <p:spPr>
+          <a:xfrm>
+            <a:off x="4807776" y="5952326"/>
+            <a:ext cx="662895" cy="400110"/>
+          </a:xfrm>
+          <a:prstGeom prst="rect">
+            <a:avLst/>
+          </a:prstGeom>
+          <a:noFill/>
+        </p:spPr>
+        <p:txBody>
+          <a:bodyPr wrap="none" rtlCol="0">
+            <a:spAutoFit/>
+          </a:bodyPr>
+          <a:lstStyle/>
+          <a:p>
+            <a:r>
+              <a:rPr lang="en-US" sz="2000" dirty="0"/>
+              <a:t>CO</a:t>
+            </a:r>
+            <a:r>
+              <a:rPr lang="en-US" sz="2000" baseline="-25000" dirty="0"/>
+              <a:t>2</a:t>
+            </a:r>
+          </a:p>
+        </p:txBody>
+      </p:sp>
+      <p:sp>
+        <p:nvSpPr>
+          <p:cNvPr id="15" name="TextBox 14"/>
+          <p:cNvSpPr txBox="1"/>
+          <p:nvPr/>
+        </p:nvSpPr>
+        <p:spPr>
+          <a:xfrm>
+            <a:off x="4871014" y="2887917"/>
+            <a:ext cx="1360368" cy="400110"/>
+          </a:xfrm>
+          <a:prstGeom prst="rect">
+            <a:avLst/>
+          </a:prstGeom>
+          <a:noFill/>
+        </p:spPr>
+        <p:txBody>
+          <a:bodyPr wrap="none" rtlCol="0">
+            <a:spAutoFit/>
+          </a:bodyPr>
+          <a:lstStyle/>
+          <a:p>
+            <a:r>
+              <a:rPr lang="en-US" sz="2000" dirty="0"/>
+              <a:t>acetyl-CoA</a:t>
+            </a:r>
+          </a:p>
+        </p:txBody>
+      </p:sp>
+      <p:sp>
+        <p:nvSpPr>
+          <p:cNvPr id="16" name="Arc 15"/>
+          <p:cNvSpPr/>
+          <p:nvPr/>
+        </p:nvSpPr>
+        <p:spPr>
+          <a:xfrm rot="3614405">
+            <a:off x="4560566" y="5111975"/>
+            <a:ext cx="1002818" cy="1002818"/>
+          </a:xfrm>
+          <a:prstGeom prst="arc">
+            <a:avLst>
+              <a:gd name="adj1" fmla="val 3365742"/>
+              <a:gd name="adj2" fmla="val 14517589"/>
+            </a:avLst>
+          </a:prstGeom>
+          <a:ln w="38100" cmpd="sng">
+            <a:solidFill>
+              <a:srgbClr val="FF0000"/>
+            </a:solidFill>
+            <a:headEnd type="arrow" w="med" len="med"/>
+            <a:tailEnd type="none" w="lg" len="lg"/>
+          </a:ln>
+          <a:effectLst/>
+        </p:spPr>
+        <p:style>
+          <a:lnRef idx="2">
+            <a:schemeClr val="accent1"/>
+          </a:lnRef>
+          <a:fillRef idx="0">
+            <a:schemeClr val="accent1"/>
+          </a:fillRef>
+          <a:effectRef idx="1">
+            <a:schemeClr val="accent1"/>
+          </a:effectRef>
+          <a:fontRef idx="minor">
+            <a:schemeClr val="tx1"/>
+          </a:fontRef>
+        </p:style>
+        <p:txBody>
+          <a:bodyPr rtlCol="0" anchor="ctr"/>
+          <a:lstStyle/>
+          <a:p>
+            <a:pPr algn="ctr"/>
+            <a:endParaRPr lang="en-US"/>
+          </a:p>
+        </p:txBody>
+      </p:sp>
+      <p:cxnSp>
+        <p:nvCxnSpPr>
+          <p:cNvPr id="18" name="Straight Arrow Connector 17"/>
+          <p:cNvCxnSpPr/>
+          <p:nvPr/>
+        </p:nvCxnSpPr>
+        <p:spPr>
+          <a:xfrm>
+            <a:off x="2156434" y="1689244"/>
+            <a:ext cx="588762" cy="0"/>
+          </a:xfrm>
+          <a:prstGeom prst="straightConnector1">
+            <a:avLst/>
+          </a:prstGeom>
+          <a:ln w="12700" cmpd="sng">
+            <a:solidFill>
+              <a:schemeClr val="tx1"/>
+            </a:solidFill>
+            <a:tailEnd type="arrow"/>
+          </a:ln>
+          <a:effectLst/>
+        </p:spPr>
+        <p:style>
+          <a:lnRef idx="2">
+            <a:schemeClr val="accent1"/>
+          </a:lnRef>
+          <a:fillRef idx="0">
+            <a:schemeClr val="accent1"/>
+          </a:fillRef>
+          <a:effectRef idx="1">
+            <a:schemeClr val="accent1"/>
+          </a:effectRef>
+          <a:fontRef idx="minor">
+            <a:schemeClr val="tx1"/>
+          </a:fontRef>
+        </p:style>
+      </p:cxnSp>
+      <p:cxnSp>
+        <p:nvCxnSpPr>
+          <p:cNvPr id="19" name="Straight Arrow Connector 18"/>
+          <p:cNvCxnSpPr/>
+          <p:nvPr/>
+        </p:nvCxnSpPr>
+        <p:spPr>
+          <a:xfrm>
+            <a:off x="4087894" y="1689244"/>
+            <a:ext cx="588762" cy="0"/>
+          </a:xfrm>
+          <a:prstGeom prst="straightConnector1">
+            <a:avLst/>
+          </a:prstGeom>
+          <a:ln w="12700" cmpd="sng">
+            <a:solidFill>
+              <a:schemeClr val="tx1"/>
+            </a:solidFill>
+            <a:tailEnd type="arrow"/>
+          </a:ln>
+          <a:effectLst/>
+        </p:spPr>
+        <p:style>
+          <a:lnRef idx="2">
+            <a:schemeClr val="accent1"/>
+          </a:lnRef>
+          <a:fillRef idx="0">
+            <a:schemeClr val="accent1"/>
+          </a:fillRef>
+          <a:effectRef idx="1">
+            <a:schemeClr val="accent1"/>
+          </a:effectRef>
+          <a:fontRef idx="minor">
+            <a:schemeClr val="tx1"/>
+          </a:fontRef>
+        </p:style>
+      </p:cxnSp>
+      <p:cxnSp>
+        <p:nvCxnSpPr>
+          <p:cNvPr id="20" name="Straight Arrow Connector 19"/>
+          <p:cNvCxnSpPr/>
+          <p:nvPr/>
+        </p:nvCxnSpPr>
+        <p:spPr>
+          <a:xfrm flipH="1">
+            <a:off x="6141458" y="1689244"/>
+            <a:ext cx="588762" cy="0"/>
+          </a:xfrm>
+          <a:prstGeom prst="straightConnector1">
+            <a:avLst/>
+          </a:prstGeom>
+          <a:ln w="12700" cmpd="sng">
+            <a:solidFill>
+              <a:schemeClr val="tx1"/>
+            </a:solidFill>
+            <a:tailEnd type="arrow"/>
+          </a:ln>
+          <a:effectLst/>
+        </p:spPr>
+        <p:style>
+          <a:lnRef idx="2">
+            <a:schemeClr val="accent1"/>
+          </a:lnRef>
+          <a:fillRef idx="0">
+            <a:schemeClr val="accent1"/>
+          </a:fillRef>
+          <a:effectRef idx="1">
+            <a:schemeClr val="accent1"/>
+          </a:effectRef>
+          <a:fontRef idx="minor">
+            <a:schemeClr val="tx1"/>
+          </a:fontRef>
+        </p:style>
+      </p:cxnSp>
+      <p:cxnSp>
+        <p:nvCxnSpPr>
+          <p:cNvPr id="21" name="Straight Arrow Connector 20"/>
+          <p:cNvCxnSpPr/>
+          <p:nvPr/>
+        </p:nvCxnSpPr>
+        <p:spPr>
+          <a:xfrm>
+            <a:off x="5364598" y="1857170"/>
+            <a:ext cx="0" cy="305676"/>
+          </a:xfrm>
+          <a:prstGeom prst="straightConnector1">
+            <a:avLst/>
+          </a:prstGeom>
+          <a:ln w="12700" cmpd="sng">
+            <a:solidFill>
+              <a:schemeClr val="tx1"/>
+            </a:solidFill>
+            <a:tailEnd type="arrow"/>
+          </a:ln>
+          <a:effectLst/>
+        </p:spPr>
+        <p:style>
+          <a:lnRef idx="2">
+            <a:schemeClr val="accent1"/>
+          </a:lnRef>
+          <a:fillRef idx="0">
+            <a:schemeClr val="accent1"/>
+          </a:fillRef>
+          <a:effectRef idx="1">
+            <a:schemeClr val="accent1"/>
+          </a:effectRef>
+          <a:fontRef idx="minor">
+            <a:schemeClr val="tx1"/>
+          </a:fontRef>
+        </p:style>
+      </p:cxnSp>
+      <p:cxnSp>
+        <p:nvCxnSpPr>
+          <p:cNvPr id="23" name="Straight Arrow Connector 22"/>
+          <p:cNvCxnSpPr/>
+          <p:nvPr/>
+        </p:nvCxnSpPr>
+        <p:spPr>
+          <a:xfrm>
+            <a:off x="5364598" y="2577672"/>
+            <a:ext cx="0" cy="305676"/>
+          </a:xfrm>
+          <a:prstGeom prst="straightConnector1">
+            <a:avLst/>
+          </a:prstGeom>
+          <a:ln w="12700" cmpd="sng">
+            <a:solidFill>
+              <a:schemeClr val="tx1"/>
+            </a:solidFill>
+            <a:tailEnd type="arrow"/>
+          </a:ln>
+          <a:effectLst/>
+        </p:spPr>
+        <p:style>
+          <a:lnRef idx="2">
+            <a:schemeClr val="accent1"/>
+          </a:lnRef>
+          <a:fillRef idx="0">
+            <a:schemeClr val="accent1"/>
+          </a:fillRef>
+          <a:effectRef idx="1">
+            <a:schemeClr val="accent1"/>
+          </a:effectRef>
+          <a:fontRef idx="minor">
+            <a:schemeClr val="tx1"/>
+          </a:fontRef>
+        </p:style>
+      </p:cxnSp>
+      <p:cxnSp>
+        <p:nvCxnSpPr>
+          <p:cNvPr id="24" name="Straight Arrow Connector 23"/>
+          <p:cNvCxnSpPr/>
+          <p:nvPr/>
+        </p:nvCxnSpPr>
+        <p:spPr>
+          <a:xfrm>
+            <a:off x="5364598" y="3308222"/>
+            <a:ext cx="0" cy="305676"/>
+          </a:xfrm>
+          <a:prstGeom prst="straightConnector1">
+            <a:avLst/>
+          </a:prstGeom>
+          <a:ln w="12700" cmpd="sng">
+            <a:solidFill>
+              <a:schemeClr val="tx1"/>
+            </a:solidFill>
+            <a:tailEnd type="arrow"/>
+          </a:ln>
+          <a:effectLst/>
+        </p:spPr>
+        <p:style>
+          <a:lnRef idx="2">
+            <a:schemeClr val="accent1"/>
+          </a:lnRef>
+          <a:fillRef idx="0">
+            <a:schemeClr val="accent1"/>
+          </a:fillRef>
+          <a:effectRef idx="1">
+            <a:schemeClr val="accent1"/>
+          </a:effectRef>
+          <a:fontRef idx="minor">
+            <a:schemeClr val="tx1"/>
+          </a:fontRef>
+        </p:style>
+      </p:cxnSp>
+      <p:cxnSp>
+        <p:nvCxnSpPr>
+          <p:cNvPr id="25" name="Straight Arrow Connector 24"/>
+          <p:cNvCxnSpPr/>
+          <p:nvPr/>
+        </p:nvCxnSpPr>
+        <p:spPr>
+          <a:xfrm flipH="1">
+            <a:off x="4675522" y="4052236"/>
+            <a:ext cx="283800" cy="305676"/>
+          </a:xfrm>
+          <a:prstGeom prst="straightConnector1">
+            <a:avLst/>
+          </a:prstGeom>
+          <a:ln w="12700" cmpd="sng">
+            <a:solidFill>
+              <a:schemeClr val="tx1"/>
+            </a:solidFill>
+            <a:tailEnd type="arrow"/>
+          </a:ln>
+          <a:effectLst/>
+        </p:spPr>
+        <p:style>
+          <a:lnRef idx="2">
+            <a:schemeClr val="accent1"/>
+          </a:lnRef>
+          <a:fillRef idx="0">
+            <a:schemeClr val="accent1"/>
+          </a:fillRef>
+          <a:effectRef idx="1">
+            <a:schemeClr val="accent1"/>
+          </a:effectRef>
+          <a:fontRef idx="minor">
+            <a:schemeClr val="tx1"/>
+          </a:fontRef>
+        </p:style>
+      </p:cxnSp>
+      <p:sp>
+        <p:nvSpPr>
+          <p:cNvPr id="27" name="Right Brace 26"/>
+          <p:cNvSpPr/>
+          <p:nvPr/>
+        </p:nvSpPr>
+        <p:spPr>
+          <a:xfrm>
+            <a:off x="5804752" y="4968297"/>
+            <a:ext cx="428016" cy="1423215"/>
+          </a:xfrm>
+          <a:prstGeom prst="rightBrace">
+            <a:avLst>
+              <a:gd name="adj1" fmla="val 54975"/>
+              <a:gd name="adj2" fmla="val 50000"/>
+            </a:avLst>
+          </a:prstGeom>
+          <a:ln w="6350" cmpd="sng">
+            <a:solidFill>
+              <a:schemeClr val="tx1"/>
+            </a:solidFill>
+            <a:prstDash val="solid"/>
+          </a:ln>
+        </p:spPr>
+        <p:style>
+          <a:lnRef idx="2">
+            <a:schemeClr val="accent1"/>
+          </a:lnRef>
+          <a:fillRef idx="0">
+            <a:schemeClr val="accent1"/>
+          </a:fillRef>
+          <a:effectRef idx="1">
+            <a:schemeClr val="accent1"/>
+          </a:effectRef>
+          <a:fontRef idx="minor">
+            <a:schemeClr val="tx1"/>
+          </a:fontRef>
+        </p:style>
+        <p:txBody>
+          <a:bodyPr rtlCol="0" anchor="ctr"/>
+          <a:lstStyle/>
+          <a:p>
+            <a:pPr algn="ctr"/>
+            <a:endParaRPr lang="en-US"/>
+          </a:p>
+        </p:txBody>
+      </p:sp>
+      <p:sp>
+        <p:nvSpPr>
+          <p:cNvPr id="29" name="TextBox 28"/>
+          <p:cNvSpPr txBox="1"/>
+          <p:nvPr/>
+        </p:nvSpPr>
+        <p:spPr>
+          <a:xfrm>
+            <a:off x="6261231" y="5466098"/>
+            <a:ext cx="2319872" cy="846386"/>
+          </a:xfrm>
+          <a:prstGeom prst="rect">
+            <a:avLst/>
+          </a:prstGeom>
+          <a:noFill/>
+        </p:spPr>
+        <p:txBody>
+          <a:bodyPr wrap="none" rtlCol="0">
+            <a:spAutoFit/>
+          </a:bodyPr>
+          <a:lstStyle/>
+          <a:p>
+            <a:pPr algn="r"/>
+            <a:r>
+              <a:rPr lang="en-US" sz="2000" dirty="0"/>
+              <a:t>= HCO</a:t>
+            </a:r>
+            <a:r>
+              <a:rPr lang="en-US" sz="2000" baseline="-25000" dirty="0"/>
+              <a:t>3</a:t>
+            </a:r>
+            <a:r>
+              <a:rPr lang="en-US" sz="2000" dirty="0"/>
+              <a:t> production</a:t>
+            </a:r>
+          </a:p>
+          <a:p>
+            <a:pPr algn="r"/>
+            <a:endParaRPr lang="en-US" sz="800" dirty="0"/>
+          </a:p>
+          <a:p>
+            <a:pPr algn="r"/>
+            <a:r>
+              <a:rPr lang="en-US" sz="2000" i="1" dirty="0">
                 <a:solidFill>
-                  <a:srgbClr val="3F8DE2"/>
+                  <a:schemeClr val="tx2">
+                    <a:lumMod val="50000"/>
+                    <a:lumOff val="50000"/>
+                  </a:schemeClr>
                 </a:solidFill>
               </a:rPr>
-              <a:t>unmeasured anions</a:t>
-            </a:r>
-          </a:p>
-          <a:p>
-            <a:pPr lvl="1"/>
-            <a:r>
-              <a:rPr lang="en-US" sz="1800" i="1" dirty="0">
-                <a:solidFill>
-                  <a:srgbClr val="3F8DE2"/>
-                </a:solidFill>
-              </a:rPr>
-              <a:t>albumin</a:t>
-            </a:r>
-          </a:p>
-          <a:p>
-            <a:pPr lvl="1"/>
-            <a:endParaRPr lang="is-IS" sz="1400" dirty="0">
-              <a:solidFill>
-                <a:srgbClr val="3F8DE2"/>
-              </a:solidFill>
-            </a:endParaRPr>
-          </a:p>
-          <a:p>
-            <a:r>
-              <a:rPr lang="en-GB" sz="2400" dirty="0">
-                <a:solidFill>
-                  <a:srgbClr val="3F8DE2"/>
-                </a:solidFill>
-              </a:rPr>
-              <a:t>unmeasured </a:t>
-            </a:r>
-            <a:r>
-              <a:rPr lang="en-GB" sz="2400" dirty="0" err="1">
-                <a:solidFill>
-                  <a:srgbClr val="3F8DE2"/>
-                </a:solidFill>
-              </a:rPr>
-              <a:t>cations</a:t>
-            </a:r>
-            <a:endParaRPr lang="en-GB" sz="2400" dirty="0">
-              <a:solidFill>
-                <a:srgbClr val="3F8DE2"/>
-              </a:solidFill>
-            </a:endParaRPr>
-          </a:p>
-          <a:p>
-            <a:pPr lvl="1"/>
-            <a:r>
-              <a:rPr lang="en-GB" sz="1800" i="1" dirty="0" err="1">
-                <a:solidFill>
-                  <a:srgbClr val="3F8DE2"/>
-                </a:solidFill>
-              </a:rPr>
-              <a:t>IgG</a:t>
-            </a:r>
-            <a:r>
-              <a:rPr lang="en-GB" sz="1800" i="1" dirty="0">
-                <a:solidFill>
-                  <a:srgbClr val="3F8DE2"/>
-                </a:solidFill>
-              </a:rPr>
-              <a:t> </a:t>
-            </a:r>
-            <a:r>
-              <a:rPr lang="en-GB" sz="1800" i="1" dirty="0" err="1">
-                <a:solidFill>
-                  <a:srgbClr val="3F8DE2"/>
-                </a:solidFill>
-              </a:rPr>
-              <a:t>paraprotein</a:t>
-            </a:r>
-            <a:endParaRPr lang="en-GB" sz="1800" i="1" dirty="0">
-              <a:solidFill>
-                <a:srgbClr val="3F8DE2"/>
-              </a:solidFill>
-            </a:endParaRPr>
-          </a:p>
-          <a:p>
-            <a:pPr lvl="1"/>
-            <a:r>
-              <a:rPr lang="en-GB" sz="1800" i="1" dirty="0">
-                <a:solidFill>
-                  <a:srgbClr val="3F8DE2"/>
-                </a:solidFill>
-              </a:rPr>
-              <a:t>Ca</a:t>
-            </a:r>
-            <a:r>
-              <a:rPr lang="en-GB" sz="1800" i="1" baseline="30000" dirty="0">
-                <a:solidFill>
-                  <a:srgbClr val="3F8DE2"/>
-                </a:solidFill>
-              </a:rPr>
-              <a:t>2+</a:t>
-            </a:r>
-            <a:r>
-              <a:rPr lang="en-GB" sz="1800" i="1" dirty="0">
-                <a:solidFill>
-                  <a:srgbClr val="3F8DE2"/>
-                </a:solidFill>
-              </a:rPr>
-              <a:t>, Mg</a:t>
-            </a:r>
-            <a:r>
-              <a:rPr lang="en-GB" sz="1800" i="1" baseline="30000" dirty="0">
-                <a:solidFill>
-                  <a:srgbClr val="3F8DE2"/>
-                </a:solidFill>
-              </a:rPr>
-              <a:t>2+</a:t>
-            </a:r>
-            <a:r>
-              <a:rPr lang="en-GB" sz="1800" i="1" dirty="0">
-                <a:solidFill>
-                  <a:srgbClr val="3F8DE2"/>
-                </a:solidFill>
-              </a:rPr>
-              <a:t>, K</a:t>
-            </a:r>
-            <a:r>
-              <a:rPr lang="en-GB" sz="1800" i="1" baseline="30000" dirty="0">
-                <a:solidFill>
-                  <a:srgbClr val="3F8DE2"/>
-                </a:solidFill>
-              </a:rPr>
-              <a:t>+</a:t>
-            </a:r>
-          </a:p>
-          <a:p>
-            <a:pPr lvl="1"/>
-            <a:r>
-              <a:rPr lang="en-GB" sz="1800" i="1" dirty="0">
-                <a:solidFill>
-                  <a:srgbClr val="3F8DE2"/>
-                </a:solidFill>
-              </a:rPr>
-              <a:t>Li</a:t>
-            </a:r>
-            <a:r>
-              <a:rPr lang="en-GB" sz="1800" i="1" baseline="30000" dirty="0">
-                <a:solidFill>
-                  <a:srgbClr val="3F8DE2"/>
-                </a:solidFill>
-              </a:rPr>
-              <a:t>+</a:t>
-            </a:r>
-          </a:p>
-          <a:p>
-            <a:pPr lvl="1"/>
-            <a:endParaRPr lang="en-US" sz="1400" dirty="0">
-              <a:solidFill>
-                <a:srgbClr val="3F8DE2"/>
-              </a:solidFill>
-            </a:endParaRPr>
-          </a:p>
-          <a:p>
-            <a:r>
-              <a:rPr lang="en-US" sz="2400" dirty="0">
-                <a:solidFill>
-                  <a:srgbClr val="3F8DE2"/>
-                </a:solidFill>
-              </a:rPr>
-              <a:t>pseudo-chloride</a:t>
-            </a:r>
-          </a:p>
-          <a:p>
-            <a:pPr lvl="1"/>
-            <a:r>
-              <a:rPr lang="en-US" sz="1800" i="1" dirty="0" err="1">
-                <a:solidFill>
-                  <a:srgbClr val="3F8DE2"/>
-                </a:solidFill>
-              </a:rPr>
-              <a:t>hyperlipidaemia</a:t>
-            </a:r>
-            <a:endParaRPr lang="en-US" sz="1800" i="1" dirty="0">
-              <a:solidFill>
-                <a:srgbClr val="3F8DE2"/>
-              </a:solidFill>
-            </a:endParaRPr>
-          </a:p>
-          <a:p>
-            <a:pPr lvl="1"/>
-            <a:r>
-              <a:rPr lang="en-US" sz="1800" i="1" dirty="0">
-                <a:solidFill>
-                  <a:srgbClr val="3F8DE2"/>
-                </a:solidFill>
-              </a:rPr>
-              <a:t>bromide, iodide, </a:t>
-            </a:r>
-            <a:r>
-              <a:rPr lang="en-US" sz="1800" i="1" dirty="0" err="1">
-                <a:solidFill>
-                  <a:srgbClr val="3F8DE2"/>
-                </a:solidFill>
-              </a:rPr>
-              <a:t>salycilate</a:t>
-            </a:r>
-            <a:endParaRPr lang="en-US" sz="1800" i="1" dirty="0">
-              <a:solidFill>
-                <a:srgbClr val="3F8DE2"/>
-              </a:solidFill>
-            </a:endParaRPr>
-          </a:p>
-          <a:p>
-            <a:endParaRPr lang="en-US" sz="2800" dirty="0"/>
+              <a:t>(1:1 molar ratio)</a:t>
+            </a:r>
           </a:p>
         </p:txBody>
       </p:sp>
     </p:spTree>
     <p:extLst>
       <p:ext uri="{BB962C8B-B14F-4D97-AF65-F5344CB8AC3E}">
-        <p14:creationId xmlns:p14="http://schemas.microsoft.com/office/powerpoint/2010/main" val="1718055002"/>
+        <p14:creationId xmlns:p14="http://schemas.microsoft.com/office/powerpoint/2010/main" val="721384016"/>
       </p:ext>
     </p:extLst>
   </p:cSld>
@@ -21190,129 +23184,6 @@
           <a:chExt cx="0" cy="0"/>
         </a:xfrm>
       </p:grpSpPr>
-      <p:sp>
-        <p:nvSpPr>
-          <p:cNvPr id="3" name="Content Placeholder 2"/>
-          <p:cNvSpPr>
-            <a:spLocks noGrp="1"/>
-          </p:cNvSpPr>
-          <p:nvPr>
-            <p:ph idx="1"/>
-          </p:nvPr>
-        </p:nvSpPr>
-        <p:spPr>
-          <a:xfrm>
-            <a:off x="359510" y="1600200"/>
-            <a:ext cx="8229600" cy="4525963"/>
-          </a:xfrm>
-        </p:spPr>
-        <p:txBody>
-          <a:bodyPr>
-            <a:normAutofit/>
-          </a:bodyPr>
-          <a:lstStyle/>
-          <a:p>
-            <a:r>
-              <a:rPr lang="en-US" sz="2400" dirty="0"/>
-              <a:t>correct AG for albumin</a:t>
-            </a:r>
-          </a:p>
-          <a:p>
-            <a:endParaRPr lang="en-US" sz="2400" dirty="0"/>
-          </a:p>
-          <a:p>
-            <a:r>
-              <a:rPr lang="en-US" sz="2400" dirty="0"/>
-              <a:t>in a pure high AG acidosis</a:t>
-            </a:r>
-            <a:r>
-              <a:rPr lang="is-IS" sz="2400" dirty="0"/>
-              <a:t>…</a:t>
-            </a:r>
-          </a:p>
-          <a:p>
-            <a:pPr lvl="1"/>
-            <a:r>
-              <a:rPr lang="en-US" sz="2000" dirty="0" err="1">
-                <a:solidFill>
-                  <a:srgbClr val="3F8DE2"/>
-                </a:solidFill>
-              </a:rPr>
-              <a:t>Δ</a:t>
-            </a:r>
-            <a:r>
-              <a:rPr lang="is-IS" sz="2000" dirty="0">
-                <a:solidFill>
-                  <a:srgbClr val="3F8DE2"/>
-                </a:solidFill>
-              </a:rPr>
-              <a:t>AG = </a:t>
-            </a:r>
-            <a:r>
-              <a:rPr lang="en-US" sz="2000" dirty="0">
-                <a:solidFill>
-                  <a:srgbClr val="3F8DE2"/>
-                </a:solidFill>
-              </a:rPr>
-              <a:t>ΔHCO</a:t>
-            </a:r>
-            <a:r>
-              <a:rPr lang="en-US" sz="2000" baseline="-25000" dirty="0">
-                <a:solidFill>
-                  <a:srgbClr val="3F8DE2"/>
-                </a:solidFill>
-              </a:rPr>
-              <a:t>3</a:t>
-            </a:r>
-          </a:p>
-          <a:p>
-            <a:endParaRPr lang="en-US" sz="2400" dirty="0"/>
-          </a:p>
-          <a:p>
-            <a:r>
-              <a:rPr lang="en-US" sz="2400" dirty="0"/>
-              <a:t>ΔAG / ΔHCO</a:t>
-            </a:r>
-            <a:r>
-              <a:rPr lang="en-US" sz="2400" baseline="-25000" dirty="0"/>
-              <a:t>3</a:t>
-            </a:r>
-            <a:endParaRPr lang="en-US" sz="2400" dirty="0"/>
-          </a:p>
-          <a:p>
-            <a:pPr lvl="1"/>
-            <a:r>
-              <a:rPr lang="en-US" sz="2000" dirty="0">
-                <a:solidFill>
-                  <a:srgbClr val="3F8DE2"/>
-                </a:solidFill>
-              </a:rPr>
-              <a:t>&lt;&lt; 0.8 or &gt;&gt; 1.2 = mixed disorder</a:t>
-            </a:r>
-          </a:p>
-          <a:p>
-            <a:pPr lvl="1"/>
-            <a:endParaRPr lang="en-US" sz="2000" dirty="0"/>
-          </a:p>
-          <a:p>
-            <a:r>
-              <a:rPr lang="en-US" sz="2400" dirty="0"/>
-              <a:t>ΔΔ</a:t>
-            </a:r>
-          </a:p>
-          <a:p>
-            <a:pPr lvl="1"/>
-            <a:r>
-              <a:rPr lang="en-US" sz="2000" dirty="0">
-                <a:solidFill>
-                  <a:srgbClr val="3F8DE2"/>
-                </a:solidFill>
-              </a:rPr>
-              <a:t>- 5 or &gt; +5 = mixed disorder</a:t>
-            </a:r>
-          </a:p>
-        </p:txBody>
-      </p:sp>
       <p:pic>
         <p:nvPicPr>
           <p:cNvPr id="4" name="Picture 3" descr="Screen Shot 2016-03-28 at 22.02.23.png"/>
@@ -21343,10 +23214,265 @@
           </a:prstGeom>
         </p:spPr>
       </p:pic>
+      <p:sp>
+        <p:nvSpPr>
+          <p:cNvPr id="6" name="Content Placeholder 4"/>
+          <p:cNvSpPr>
+            <a:spLocks noGrp="1"/>
+          </p:cNvSpPr>
+          <p:nvPr>
+            <p:ph idx="1"/>
+          </p:nvPr>
+        </p:nvSpPr>
+        <p:spPr>
+          <a:xfrm>
+            <a:off x="359510" y="1600200"/>
+            <a:ext cx="4769853" cy="4525963"/>
+          </a:xfrm>
+        </p:spPr>
+        <p:txBody>
+          <a:bodyPr>
+            <a:noAutofit/>
+          </a:bodyPr>
+          <a:lstStyle/>
+          <a:p>
+            <a:pPr marL="0" indent="0">
+              <a:buNone/>
+            </a:pPr>
+            <a:r>
+              <a:rPr lang="en-GB" sz="2400" dirty="0"/>
+              <a:t>Sources of error</a:t>
+            </a:r>
+            <a:r>
+              <a:rPr lang="is-IS" sz="2400" dirty="0"/>
+              <a:t>…</a:t>
+            </a:r>
+            <a:endParaRPr lang="en-US" sz="2400" dirty="0"/>
+          </a:p>
+          <a:p>
+            <a:endParaRPr lang="en-US" sz="1400" dirty="0"/>
+          </a:p>
+          <a:p>
+            <a:r>
+              <a:rPr lang="en-US" sz="2400" dirty="0">
+                <a:solidFill>
+                  <a:srgbClr val="3F8DE2"/>
+                </a:solidFill>
+              </a:rPr>
+              <a:t>unmeasured anions</a:t>
+            </a:r>
+          </a:p>
+          <a:p>
+            <a:pPr lvl="1"/>
+            <a:r>
+              <a:rPr lang="en-US" sz="1800" i="1" dirty="0">
+                <a:solidFill>
+                  <a:srgbClr val="3F8DE2"/>
+                </a:solidFill>
+              </a:rPr>
+              <a:t>albumin</a:t>
+            </a:r>
+          </a:p>
+          <a:p>
+            <a:pPr lvl="1"/>
+            <a:endParaRPr lang="is-IS" sz="1400" dirty="0">
+              <a:solidFill>
+                <a:srgbClr val="3F8DE2"/>
+              </a:solidFill>
+            </a:endParaRPr>
+          </a:p>
+          <a:p>
+            <a:r>
+              <a:rPr lang="en-GB" sz="2400" dirty="0">
+                <a:solidFill>
+                  <a:srgbClr val="3F8DE2"/>
+                </a:solidFill>
+              </a:rPr>
+              <a:t>unmeasured </a:t>
+            </a:r>
+            <a:r>
+              <a:rPr lang="en-GB" sz="2400" dirty="0" err="1">
+                <a:solidFill>
+                  <a:srgbClr val="3F8DE2"/>
+                </a:solidFill>
+              </a:rPr>
+              <a:t>cations</a:t>
+            </a:r>
+            <a:endParaRPr lang="en-GB" sz="2400" dirty="0">
+              <a:solidFill>
+                <a:srgbClr val="3F8DE2"/>
+              </a:solidFill>
+            </a:endParaRPr>
+          </a:p>
+          <a:p>
+            <a:pPr lvl="1"/>
+            <a:r>
+              <a:rPr lang="en-GB" sz="1800" i="1" dirty="0" err="1">
+                <a:solidFill>
+                  <a:srgbClr val="3F8DE2"/>
+                </a:solidFill>
+              </a:rPr>
+              <a:t>IgG</a:t>
+            </a:r>
+            <a:r>
+              <a:rPr lang="en-GB" sz="1800" i="1" dirty="0">
+                <a:solidFill>
+                  <a:srgbClr val="3F8DE2"/>
+                </a:solidFill>
+              </a:rPr>
+              <a:t> </a:t>
+            </a:r>
+            <a:r>
+              <a:rPr lang="en-GB" sz="1800" i="1" dirty="0" err="1">
+                <a:solidFill>
+                  <a:srgbClr val="3F8DE2"/>
+                </a:solidFill>
+              </a:rPr>
+              <a:t>paraprotein</a:t>
+            </a:r>
+            <a:endParaRPr lang="en-GB" sz="1800" i="1" dirty="0">
+              <a:solidFill>
+                <a:srgbClr val="3F8DE2"/>
+              </a:solidFill>
+            </a:endParaRPr>
+          </a:p>
+          <a:p>
+            <a:pPr lvl="1"/>
+            <a:r>
+              <a:rPr lang="en-GB" sz="1800" i="1" dirty="0">
+                <a:solidFill>
+                  <a:srgbClr val="3F8DE2"/>
+                </a:solidFill>
+              </a:rPr>
+              <a:t>Ca</a:t>
+            </a:r>
+            <a:r>
+              <a:rPr lang="en-GB" sz="1800" i="1" baseline="30000" dirty="0">
+                <a:solidFill>
+                  <a:srgbClr val="3F8DE2"/>
+                </a:solidFill>
+              </a:rPr>
+              <a:t>2+</a:t>
+            </a:r>
+            <a:r>
+              <a:rPr lang="en-GB" sz="1800" i="1" dirty="0">
+                <a:solidFill>
+                  <a:srgbClr val="3F8DE2"/>
+                </a:solidFill>
+              </a:rPr>
+              <a:t>, Mg</a:t>
+            </a:r>
+            <a:r>
+              <a:rPr lang="en-GB" sz="1800" i="1" baseline="30000" dirty="0">
+                <a:solidFill>
+                  <a:srgbClr val="3F8DE2"/>
+                </a:solidFill>
+              </a:rPr>
+              <a:t>2+</a:t>
+            </a:r>
+            <a:r>
+              <a:rPr lang="en-GB" sz="1800" i="1" dirty="0">
+                <a:solidFill>
+                  <a:srgbClr val="3F8DE2"/>
+                </a:solidFill>
+              </a:rPr>
+              <a:t>, K</a:t>
+            </a:r>
+            <a:r>
+              <a:rPr lang="en-GB" sz="1800" i="1" baseline="30000" dirty="0">
+                <a:solidFill>
+                  <a:srgbClr val="3F8DE2"/>
+                </a:solidFill>
+              </a:rPr>
+              <a:t>+</a:t>
+            </a:r>
+          </a:p>
+          <a:p>
+            <a:pPr lvl="1"/>
+            <a:r>
+              <a:rPr lang="en-GB" sz="1800" i="1" dirty="0">
+                <a:solidFill>
+                  <a:srgbClr val="3F8DE2"/>
+                </a:solidFill>
+              </a:rPr>
+              <a:t>Li</a:t>
+            </a:r>
+            <a:r>
+              <a:rPr lang="en-GB" sz="1800" i="1" baseline="30000" dirty="0">
+                <a:solidFill>
+                  <a:srgbClr val="3F8DE2"/>
+                </a:solidFill>
+              </a:rPr>
+              <a:t>+</a:t>
+            </a:r>
+          </a:p>
+          <a:p>
+            <a:pPr lvl="1"/>
+            <a:endParaRPr lang="en-US" sz="1400" dirty="0">
+              <a:solidFill>
+                <a:srgbClr val="3F8DE2"/>
+              </a:solidFill>
+            </a:endParaRPr>
+          </a:p>
+          <a:p>
+            <a:r>
+              <a:rPr lang="en-US" sz="2400" dirty="0">
+                <a:solidFill>
+                  <a:srgbClr val="3F8DE2"/>
+                </a:solidFill>
+              </a:rPr>
+              <a:t>pseudo-chloride</a:t>
+            </a:r>
+          </a:p>
+          <a:p>
+            <a:pPr lvl="1"/>
+            <a:r>
+              <a:rPr lang="en-US" sz="1800" i="1" dirty="0" err="1">
+                <a:solidFill>
+                  <a:srgbClr val="3F8DE2"/>
+                </a:solidFill>
+              </a:rPr>
+              <a:t>hyperlipidaemia</a:t>
+            </a:r>
+            <a:endParaRPr lang="en-US" sz="1800" i="1" dirty="0">
+              <a:solidFill>
+                <a:srgbClr val="3F8DE2"/>
+              </a:solidFill>
+            </a:endParaRPr>
+          </a:p>
+          <a:p>
+            <a:pPr lvl="1"/>
+            <a:r>
+              <a:rPr lang="en-US" sz="1800" i="1" dirty="0">
+                <a:solidFill>
+                  <a:srgbClr val="3F8DE2"/>
+                </a:solidFill>
+              </a:rPr>
+              <a:t>bromide, iodide, </a:t>
+            </a:r>
+            <a:r>
+              <a:rPr lang="en-US" sz="1800" i="1" dirty="0" err="1">
+                <a:solidFill>
+                  <a:srgbClr val="3F8DE2"/>
+                </a:solidFill>
+              </a:rPr>
+              <a:t>salycilate</a:t>
+            </a:r>
+            <a:endParaRPr lang="en-US" sz="1800" i="1" dirty="0">
+              <a:solidFill>
+                <a:srgbClr val="3F8DE2"/>
+              </a:solidFill>
+            </a:endParaRPr>
+          </a:p>
+          <a:p>
+            <a:endParaRPr lang="en-US" sz="2800" dirty="0"/>
+          </a:p>
+        </p:txBody>
+      </p:sp>
     </p:spTree>
     <p:extLst>
       <p:ext uri="{BB962C8B-B14F-4D97-AF65-F5344CB8AC3E}">
-        <p14:creationId xmlns:p14="http://schemas.microsoft.com/office/powerpoint/2010/main" val="1355352353"/>
+        <p14:creationId xmlns:p14="http://schemas.microsoft.com/office/powerpoint/2010/main" val="1718055002"/>
       </p:ext>
     </p:extLst>
   </p:cSld>
@@ -21375,6 +23501,189 @@
       </p:grpSpPr>
       <p:sp>
         <p:nvSpPr>
+          <p:cNvPr id="3" name="Content Placeholder 2"/>
+          <p:cNvSpPr>
+            <a:spLocks noGrp="1"/>
+          </p:cNvSpPr>
+          <p:nvPr>
+            <p:ph idx="1"/>
+          </p:nvPr>
+        </p:nvSpPr>
+        <p:spPr>
+          <a:xfrm>
+            <a:off x="359510" y="1600200"/>
+            <a:ext cx="8229600" cy="4525963"/>
+          </a:xfrm>
+        </p:spPr>
+        <p:txBody>
+          <a:bodyPr>
+            <a:normAutofit/>
+          </a:bodyPr>
+          <a:lstStyle/>
+          <a:p>
+            <a:r>
+              <a:rPr lang="en-US" sz="2400" dirty="0"/>
+              <a:t>correct AG for albumin</a:t>
+            </a:r>
+          </a:p>
+          <a:p>
+            <a:endParaRPr lang="en-US" sz="2400" dirty="0"/>
+          </a:p>
+          <a:p>
+            <a:r>
+              <a:rPr lang="en-US" sz="2400" dirty="0"/>
+              <a:t>in a pure high AG acidosis</a:t>
+            </a:r>
+            <a:r>
+              <a:rPr lang="is-IS" sz="2400" dirty="0"/>
+              <a:t>…</a:t>
+            </a:r>
+          </a:p>
+          <a:p>
+            <a:pPr lvl="1"/>
+            <a:r>
+              <a:rPr lang="en-US" sz="2000" dirty="0" err="1">
+                <a:solidFill>
+                  <a:srgbClr val="3F8DE2"/>
+                </a:solidFill>
+              </a:rPr>
+              <a:t>Δ</a:t>
+            </a:r>
+            <a:r>
+              <a:rPr lang="is-IS" sz="2000" dirty="0">
+                <a:solidFill>
+                  <a:srgbClr val="3F8DE2"/>
+                </a:solidFill>
+              </a:rPr>
+              <a:t>AG = </a:t>
+            </a:r>
+            <a:r>
+              <a:rPr lang="en-US" sz="2000" dirty="0">
+                <a:solidFill>
+                  <a:srgbClr val="3F8DE2"/>
+                </a:solidFill>
+              </a:rPr>
+              <a:t>ΔHCO</a:t>
+            </a:r>
+            <a:r>
+              <a:rPr lang="en-US" sz="2000" baseline="-25000" dirty="0">
+                <a:solidFill>
+                  <a:srgbClr val="3F8DE2"/>
+                </a:solidFill>
+              </a:rPr>
+              <a:t>3</a:t>
+            </a:r>
+          </a:p>
+          <a:p>
+            <a:endParaRPr lang="en-US" sz="2400" dirty="0"/>
+          </a:p>
+          <a:p>
+            <a:r>
+              <a:rPr lang="en-US" sz="2400" dirty="0"/>
+              <a:t>ΔAG / ΔHCO</a:t>
+            </a:r>
+            <a:r>
+              <a:rPr lang="en-US" sz="2400" baseline="-25000" dirty="0"/>
+              <a:t>3</a:t>
+            </a:r>
+            <a:endParaRPr lang="en-US" sz="2400" dirty="0"/>
+          </a:p>
+          <a:p>
+            <a:pPr lvl="1"/>
+            <a:r>
+              <a:rPr lang="en-US" sz="2000" dirty="0">
+                <a:solidFill>
+                  <a:srgbClr val="3F8DE2"/>
+                </a:solidFill>
+              </a:rPr>
+              <a:t>&lt;&lt; 0.8 or &gt;&gt; 1.2 = mixed disorder</a:t>
+            </a:r>
+          </a:p>
+          <a:p>
+            <a:pPr lvl="1"/>
+            <a:endParaRPr lang="en-US" sz="2000" dirty="0"/>
+          </a:p>
+          <a:p>
+            <a:r>
+              <a:rPr lang="en-US" sz="2400" dirty="0"/>
+              <a:t>ΔΔ</a:t>
+            </a:r>
+          </a:p>
+          <a:p>
+            <a:pPr lvl="1"/>
+            <a:r>
+              <a:rPr lang="en-US" sz="2000" dirty="0">
+                <a:solidFill>
+                  <a:srgbClr val="3F8DE2"/>
+                </a:solidFill>
+              </a:rPr>
+              <a:t>- 5 or &gt; +5 = mixed disorder</a:t>
+            </a:r>
+          </a:p>
+        </p:txBody>
+      </p:sp>
+      <p:pic>
+        <p:nvPicPr>
+          <p:cNvPr id="4" name="Picture 3" descr="Screen Shot 2016-03-28 at 22.02.23.png"/>
+          <p:cNvPicPr>
+            <a:picLocks noChangeAspect="1"/>
+          </p:cNvPicPr>
+          <p:nvPr/>
+        </p:nvPicPr>
+        <p:blipFill>
+          <a:blip r:embed="rId2" cstate="screen">
+            <a:extLst>
+              <a:ext uri="{28A0092B-C50C-407E-A947-70E740481C1C}">
+                <a14:useLocalDpi xmlns:a14="http://schemas.microsoft.com/office/drawing/2010/main" val="0"/>
+              </a:ext>
+            </a:extLst>
+          </a:blip>
+          <a:stretch>
+            <a:fillRect/>
+          </a:stretch>
+        </p:blipFill>
+        <p:spPr>
+          <a:xfrm>
+            <a:off x="5604786" y="1417638"/>
+            <a:ext cx="3352941" cy="4708525"/>
+          </a:xfrm>
+          <a:prstGeom prst="rect">
+            <a:avLst/>
+          </a:prstGeom>
+        </p:spPr>
+      </p:pic>
+    </p:spTree>
+    <p:extLst>
+      <p:ext uri="{BB962C8B-B14F-4D97-AF65-F5344CB8AC3E}">
+        <p14:creationId xmlns:p14="http://schemas.microsoft.com/office/powerpoint/2010/main" val="1355352353"/>
+      </p:ext>
+    </p:extLst>
+  </p:cSld>
+  <p:clrMapOvr>
+    <a:masterClrMapping/>
+  </p:clrMapOvr>
+</p:sld>
+</file>
+
+<file path=ppt/slides/slide7.xml><?xml version="1.0" encoding="utf-8"?>
+<p:sld xmlns:a="http://schemas.openxmlformats.org/drawingml/2006/main" xmlns:r="http://schemas.openxmlformats.org/officeDocument/2006/relationships" xmlns:p="http://schemas.openxmlformats.org/presentationml/2006/main">
+  <p:cSld>
+    <p:spTree>
+      <p:nvGrpSpPr>
+        <p:cNvPr id="1" name=""/>
+        <p:cNvGrpSpPr/>
+        <p:nvPr/>
+      </p:nvGrpSpPr>
+      <p:grpSpPr>
+        <a:xfrm>
+          <a:off x="0" y="0"/>
+          <a:ext cx="0" cy="0"/>
+          <a:chOff x="0" y="0"/>
+          <a:chExt cx="0" cy="0"/>
+        </a:xfrm>
+      </p:grpSpPr>
+      <p:sp>
+        <p:nvSpPr>
           <p:cNvPr id="7" name="Circular Arrow 6"/>
           <p:cNvSpPr/>
           <p:nvPr/>
@@ -22440,7 +24749,7 @@
 </p:sld>
 </file>
 
-<file path=ppt/slides/slide7.xml><?xml version="1.0" encoding="utf-8"?>
+<file path=ppt/slides/slide8.xml><?xml version="1.0" encoding="utf-8"?>
 <p:sld xmlns:a="http://schemas.openxmlformats.org/drawingml/2006/main" xmlns:r="http://schemas.openxmlformats.org/officeDocument/2006/relationships" xmlns:p="http://schemas.openxmlformats.org/presentationml/2006/main">
   <p:cSld>
     <p:spTree>
@@ -23111,7 +25420,7 @@
 </p:sld>
 </file>
 
-<file path=ppt/slides/slide8.xml><?xml version="1.0" encoding="utf-8"?>
+<file path=ppt/slides/slide9.xml><?xml version="1.0" encoding="utf-8"?>
 <p:sld xmlns:a="http://schemas.openxmlformats.org/drawingml/2006/main" xmlns:r="http://schemas.openxmlformats.org/officeDocument/2006/relationships" xmlns:p="http://schemas.openxmlformats.org/presentationml/2006/main">
   <p:cSld>
     <p:spTree>
@@ -23173,14 +25482,14 @@
           </a:ln>
           <a:extLst>
             <a:ext uri="{909E8E84-426E-40dd-AFC4-6F175D3DCCD1}">
-              <a14:hiddenFill xmlns:a14="http://schemas.microsoft.com/office/drawing/2010/main" xmlns="">
+              <a14:hiddenFill xmlns="" xmlns:a14="http://schemas.microsoft.com/office/drawing/2010/main">
                 <a:solidFill>
                   <a:srgbClr val="FFFFFF"/>
                 </a:solidFill>
               </a14:hiddenFill>
             </a:ext>
             <a:ext uri="{91240B29-F687-4f45-9708-019B960494DF}">
-              <a14:hiddenLine xmlns:a14="http://schemas.microsoft.com/office/drawing/2010/main" xmlns="" w="9525">
+              <a14:hiddenLine xmlns="" xmlns:a14="http://schemas.microsoft.com/office/drawing/2010/main" w="9525">
                 <a:solidFill>
                   <a:srgbClr val="000000"/>
                 </a:solidFill>
@@ -23196,706 +25505,6 @@
     <p:extLst>
       <p:ext uri="{BB962C8B-B14F-4D97-AF65-F5344CB8AC3E}">
         <p14:creationId xmlns:p14="http://schemas.microsoft.com/office/powerpoint/2010/main" val="2639225053"/>
-      </p:ext>
-    </p:extLst>
-  </p:cSld>
-  <p:clrMapOvr>
-    <a:masterClrMapping/>
-  </p:clrMapOvr>
-</p:sld>
-</file>
-
-<file path=ppt/slides/slide9.xml><?xml version="1.0" encoding="utf-8"?>
-<p:sld xmlns:a="http://schemas.openxmlformats.org/drawingml/2006/main" xmlns:r="http://schemas.openxmlformats.org/officeDocument/2006/relationships" xmlns:p="http://schemas.openxmlformats.org/presentationml/2006/main">
-  <p:cSld>
-    <p:spTree>
-      <p:nvGrpSpPr>
-        <p:cNvPr id="1" name=""/>
-        <p:cNvGrpSpPr/>
-        <p:nvPr/>
-      </p:nvGrpSpPr>
-      <p:grpSpPr>
-        <a:xfrm>
-          <a:off x="0" y="0"/>
-          <a:ext cx="0" cy="0"/>
-          <a:chOff x="0" y="0"/>
-          <a:chExt cx="0" cy="0"/>
-        </a:xfrm>
-      </p:grpSpPr>
-      <p:cxnSp>
-        <p:nvCxnSpPr>
-          <p:cNvPr id="5" name="Straight Arrow Connector 4"/>
-          <p:cNvCxnSpPr/>
-          <p:nvPr/>
-        </p:nvCxnSpPr>
-        <p:spPr>
-          <a:xfrm flipV="1">
-            <a:off x="2078551" y="2901428"/>
-            <a:ext cx="0" cy="1078840"/>
-          </a:xfrm>
-          <a:prstGeom prst="straightConnector1">
-            <a:avLst/>
-          </a:prstGeom>
-          <a:ln w="38100" cmpd="sng">
-            <a:solidFill>
-              <a:schemeClr val="tx1"/>
-            </a:solidFill>
-            <a:tailEnd type="arrow"/>
-          </a:ln>
-          <a:effectLst/>
-        </p:spPr>
-        <p:style>
-          <a:lnRef idx="2">
-            <a:schemeClr val="accent1"/>
-          </a:lnRef>
-          <a:fillRef idx="0">
-            <a:schemeClr val="accent1"/>
-          </a:fillRef>
-          <a:effectRef idx="1">
-            <a:schemeClr val="accent1"/>
-          </a:effectRef>
-          <a:fontRef idx="minor">
-            <a:schemeClr val="tx1"/>
-          </a:fontRef>
-        </p:style>
-      </p:cxnSp>
-      <p:cxnSp>
-        <p:nvCxnSpPr>
-          <p:cNvPr id="7" name="Straight Arrow Connector 6"/>
-          <p:cNvCxnSpPr/>
-          <p:nvPr/>
-        </p:nvCxnSpPr>
-        <p:spPr>
-          <a:xfrm>
-            <a:off x="627736" y="2290201"/>
-            <a:ext cx="833528" cy="0"/>
-          </a:xfrm>
-          <a:prstGeom prst="straightConnector1">
-            <a:avLst/>
-          </a:prstGeom>
-          <a:ln w="38100" cmpd="sng">
-            <a:solidFill>
-              <a:schemeClr val="tx1"/>
-            </a:solidFill>
-            <a:tailEnd type="arrow"/>
-          </a:ln>
-          <a:effectLst/>
-        </p:spPr>
-        <p:style>
-          <a:lnRef idx="2">
-            <a:schemeClr val="accent1"/>
-          </a:lnRef>
-          <a:fillRef idx="0">
-            <a:schemeClr val="accent1"/>
-          </a:fillRef>
-          <a:effectRef idx="1">
-            <a:schemeClr val="accent1"/>
-          </a:effectRef>
-          <a:fontRef idx="minor">
-            <a:schemeClr val="tx1"/>
-          </a:fontRef>
-        </p:style>
-      </p:cxnSp>
-      <p:cxnSp>
-        <p:nvCxnSpPr>
-          <p:cNvPr id="9" name="Straight Connector 8"/>
-          <p:cNvCxnSpPr/>
-          <p:nvPr/>
-        </p:nvCxnSpPr>
-        <p:spPr>
-          <a:xfrm>
-            <a:off x="2656015" y="2290201"/>
-            <a:ext cx="3568612" cy="0"/>
-          </a:xfrm>
-          <a:prstGeom prst="line">
-            <a:avLst/>
-          </a:prstGeom>
-          <a:ln w="38100" cmpd="sng">
-            <a:solidFill>
-              <a:schemeClr val="tx1"/>
-            </a:solidFill>
-          </a:ln>
-          <a:effectLst/>
-        </p:spPr>
-        <p:style>
-          <a:lnRef idx="2">
-            <a:schemeClr val="accent1"/>
-          </a:lnRef>
-          <a:fillRef idx="0">
-            <a:schemeClr val="accent1"/>
-          </a:fillRef>
-          <a:effectRef idx="1">
-            <a:schemeClr val="accent1"/>
-          </a:effectRef>
-          <a:fontRef idx="minor">
-            <a:schemeClr val="tx1"/>
-          </a:fontRef>
-        </p:style>
-      </p:cxnSp>
-      <p:cxnSp>
-        <p:nvCxnSpPr>
-          <p:cNvPr id="11" name="Straight Arrow Connector 10"/>
-          <p:cNvCxnSpPr/>
-          <p:nvPr/>
-        </p:nvCxnSpPr>
-        <p:spPr>
-          <a:xfrm>
-            <a:off x="6224627" y="2290201"/>
-            <a:ext cx="0" cy="938135"/>
-          </a:xfrm>
-          <a:prstGeom prst="straightConnector1">
-            <a:avLst/>
-          </a:prstGeom>
-          <a:ln w="38100" cmpd="sng">
-            <a:solidFill>
-              <a:schemeClr val="tx1"/>
-            </a:solidFill>
-            <a:tailEnd type="arrow"/>
-          </a:ln>
-          <a:effectLst/>
-        </p:spPr>
-        <p:style>
-          <a:lnRef idx="2">
-            <a:schemeClr val="accent1"/>
-          </a:lnRef>
-          <a:fillRef idx="0">
-            <a:schemeClr val="accent1"/>
-          </a:fillRef>
-          <a:effectRef idx="1">
-            <a:schemeClr val="accent1"/>
-          </a:effectRef>
-          <a:fontRef idx="minor">
-            <a:schemeClr val="tx1"/>
-          </a:fontRef>
-        </p:style>
-      </p:cxnSp>
-      <p:cxnSp>
-        <p:nvCxnSpPr>
-          <p:cNvPr id="13" name="Straight Arrow Connector 12"/>
-          <p:cNvCxnSpPr/>
-          <p:nvPr/>
-        </p:nvCxnSpPr>
-        <p:spPr>
-          <a:xfrm flipH="1">
-            <a:off x="2695707" y="4423745"/>
-            <a:ext cx="2339991" cy="0"/>
-          </a:xfrm>
-          <a:prstGeom prst="straightConnector1">
-            <a:avLst/>
-          </a:prstGeom>
-          <a:ln w="38100" cmpd="sng">
-            <a:solidFill>
-              <a:schemeClr val="tx1"/>
-            </a:solidFill>
-            <a:tailEnd type="arrow"/>
-          </a:ln>
-          <a:effectLst/>
-        </p:spPr>
-        <p:style>
-          <a:lnRef idx="2">
-            <a:schemeClr val="accent1"/>
-          </a:lnRef>
-          <a:fillRef idx="0">
-            <a:schemeClr val="accent1"/>
-          </a:fillRef>
-          <a:effectRef idx="1">
-            <a:schemeClr val="accent1"/>
-          </a:effectRef>
-          <a:fontRef idx="minor">
-            <a:schemeClr val="tx1"/>
-          </a:fontRef>
-        </p:style>
-      </p:cxnSp>
-      <p:sp>
-        <p:nvSpPr>
-          <p:cNvPr id="2" name="Oval 1"/>
-          <p:cNvSpPr/>
-          <p:nvPr/>
-        </p:nvSpPr>
-        <p:spPr>
-          <a:xfrm>
-            <a:off x="1642044" y="1827921"/>
-            <a:ext cx="872883" cy="872883"/>
-          </a:xfrm>
-          <a:prstGeom prst="ellipse">
-            <a:avLst/>
-          </a:prstGeom>
-          <a:noFill/>
-          <a:ln w="38100" cmpd="sng">
-            <a:solidFill>
-              <a:schemeClr val="tx1"/>
-            </a:solidFill>
-          </a:ln>
-          <a:effectLst/>
-        </p:spPr>
-        <p:style>
-          <a:lnRef idx="1">
-            <a:schemeClr val="accent1"/>
-          </a:lnRef>
-          <a:fillRef idx="3">
-            <a:schemeClr val="accent1"/>
-          </a:fillRef>
-          <a:effectRef idx="2">
-            <a:schemeClr val="accent1"/>
-          </a:effectRef>
-          <a:fontRef idx="minor">
-            <a:schemeClr val="lt1"/>
-          </a:fontRef>
-        </p:style>
-        <p:txBody>
-          <a:bodyPr rtlCol="0" anchor="ctr"/>
-          <a:lstStyle/>
-          <a:p>
-            <a:pPr algn="ctr"/>
-            <a:endParaRPr lang="en-US"/>
-          </a:p>
-        </p:txBody>
-      </p:sp>
-      <p:sp>
-        <p:nvSpPr>
-          <p:cNvPr id="3" name="Cross 2"/>
-          <p:cNvSpPr/>
-          <p:nvPr/>
-        </p:nvSpPr>
-        <p:spPr>
-          <a:xfrm rot="2700000">
-            <a:off x="1642044" y="1827921"/>
-            <a:ext cx="872883" cy="872883"/>
-          </a:xfrm>
-          <a:prstGeom prst="plus">
-            <a:avLst>
-              <a:gd name="adj" fmla="val 50000"/>
-            </a:avLst>
-          </a:prstGeom>
-          <a:ln w="38100" cmpd="sng">
-            <a:solidFill>
-              <a:srgbClr val="000000"/>
-            </a:solidFill>
-          </a:ln>
-          <a:effectLst/>
-        </p:spPr>
-        <p:style>
-          <a:lnRef idx="1">
-            <a:schemeClr val="accent1"/>
-          </a:lnRef>
-          <a:fillRef idx="3">
-            <a:schemeClr val="accent1"/>
-          </a:fillRef>
-          <a:effectRef idx="2">
-            <a:schemeClr val="accent1"/>
-          </a:effectRef>
-          <a:fontRef idx="minor">
-            <a:schemeClr val="lt1"/>
-          </a:fontRef>
-        </p:style>
-        <p:txBody>
-          <a:bodyPr rtlCol="0" anchor="ctr"/>
-          <a:lstStyle/>
-          <a:p>
-            <a:pPr algn="ctr"/>
-            <a:endParaRPr lang="en-US"/>
-          </a:p>
-        </p:txBody>
-      </p:sp>
-      <p:sp>
-        <p:nvSpPr>
-          <p:cNvPr id="15" name="TextBox 14"/>
-          <p:cNvSpPr txBox="1"/>
-          <p:nvPr/>
-        </p:nvSpPr>
-        <p:spPr>
-          <a:xfrm>
-            <a:off x="1659617" y="2085693"/>
-            <a:ext cx="319468" cy="369332"/>
-          </a:xfrm>
-          <a:prstGeom prst="rect">
-            <a:avLst/>
-          </a:prstGeom>
-          <a:noFill/>
-        </p:spPr>
-        <p:txBody>
-          <a:bodyPr wrap="none" rtlCol="0">
-            <a:spAutoFit/>
-          </a:bodyPr>
-          <a:lstStyle/>
-          <a:p>
-            <a:r>
-              <a:rPr lang="en-US" dirty="0"/>
-              <a:t>+</a:t>
-            </a:r>
-          </a:p>
-        </p:txBody>
-      </p:sp>
-      <p:sp>
-        <p:nvSpPr>
-          <p:cNvPr id="16" name="TextBox 15"/>
-          <p:cNvSpPr txBox="1"/>
-          <p:nvPr/>
-        </p:nvSpPr>
-        <p:spPr>
-          <a:xfrm>
-            <a:off x="1880091" y="2329885"/>
-            <a:ext cx="383601" cy="369332"/>
-          </a:xfrm>
-          <a:prstGeom prst="rect">
-            <a:avLst/>
-          </a:prstGeom>
-          <a:noFill/>
-        </p:spPr>
-        <p:txBody>
-          <a:bodyPr wrap="none" rtlCol="0">
-            <a:spAutoFit/>
-          </a:bodyPr>
-          <a:lstStyle/>
-          <a:p>
-            <a:r>
-              <a:rPr lang="en-US" dirty="0"/>
-              <a:t> </a:t>
-            </a:r>
-            <a:r>
-              <a:rPr lang="en-GB" dirty="0"/>
-              <a:t>+</a:t>
-            </a:r>
-            <a:r>
-              <a:rPr lang="en-US" dirty="0"/>
-              <a:t> </a:t>
-            </a:r>
-          </a:p>
-        </p:txBody>
-      </p:sp>
-      <p:sp>
-        <p:nvSpPr>
-          <p:cNvPr id="18" name="TextBox 17"/>
-          <p:cNvSpPr txBox="1"/>
-          <p:nvPr/>
-        </p:nvSpPr>
-        <p:spPr>
-          <a:xfrm>
-            <a:off x="1375962" y="1404968"/>
-            <a:ext cx="1422322" cy="369332"/>
-          </a:xfrm>
-          <a:prstGeom prst="rect">
-            <a:avLst/>
-          </a:prstGeom>
-          <a:noFill/>
-        </p:spPr>
-        <p:txBody>
-          <a:bodyPr wrap="none" rtlCol="0">
-            <a:spAutoFit/>
-          </a:bodyPr>
-          <a:lstStyle/>
-          <a:p>
-            <a:pPr algn="ctr"/>
-            <a:r>
-              <a:rPr lang="en-US" i="1" dirty="0"/>
-              <a:t>hypothalamus</a:t>
-            </a:r>
-          </a:p>
-        </p:txBody>
-      </p:sp>
-      <p:sp>
-        <p:nvSpPr>
-          <p:cNvPr id="20" name="Rounded Rectangle 19"/>
-          <p:cNvSpPr/>
-          <p:nvPr/>
-        </p:nvSpPr>
-        <p:spPr>
-          <a:xfrm>
-            <a:off x="5254003" y="3418129"/>
-            <a:ext cx="3499861" cy="2105236"/>
-          </a:xfrm>
-          <a:prstGeom prst="roundRect">
-            <a:avLst>
-              <a:gd name="adj" fmla="val 10481"/>
-            </a:avLst>
-          </a:prstGeom>
-          <a:noFill/>
-          <a:ln w="38100" cmpd="sng">
-            <a:solidFill>
-              <a:schemeClr val="tx1"/>
-            </a:solidFill>
-          </a:ln>
-          <a:effectLst/>
-        </p:spPr>
-        <p:style>
-          <a:lnRef idx="1">
-            <a:schemeClr val="accent1"/>
-          </a:lnRef>
-          <a:fillRef idx="3">
-            <a:schemeClr val="accent1"/>
-          </a:fillRef>
-          <a:effectRef idx="2">
-            <a:schemeClr val="accent1"/>
-          </a:effectRef>
-          <a:fontRef idx="minor">
-            <a:schemeClr val="lt1"/>
-          </a:fontRef>
-        </p:style>
-        <p:txBody>
-          <a:bodyPr rtlCol="0" anchor="ctr"/>
-          <a:lstStyle/>
-          <a:p>
-            <a:pPr algn="ctr"/>
-            <a:endParaRPr lang="en-US"/>
-          </a:p>
-        </p:txBody>
-      </p:sp>
-      <p:sp>
-        <p:nvSpPr>
-          <p:cNvPr id="21" name="TextBox 20"/>
-          <p:cNvSpPr txBox="1"/>
-          <p:nvPr/>
-        </p:nvSpPr>
-        <p:spPr>
-          <a:xfrm>
-            <a:off x="5412341" y="3570528"/>
-            <a:ext cx="3052826" cy="369332"/>
-          </a:xfrm>
-          <a:prstGeom prst="rect">
-            <a:avLst/>
-          </a:prstGeom>
-          <a:noFill/>
-        </p:spPr>
-        <p:txBody>
-          <a:bodyPr wrap="none" rtlCol="0">
-            <a:spAutoFit/>
-          </a:bodyPr>
-          <a:lstStyle/>
-          <a:p>
-            <a:pPr algn="ctr"/>
-            <a:r>
-              <a:rPr lang="en-US" b="1" dirty="0"/>
-              <a:t>Renal free water excretion</a:t>
-            </a:r>
-          </a:p>
-        </p:txBody>
-      </p:sp>
-      <p:sp>
-        <p:nvSpPr>
-          <p:cNvPr id="22" name="TextBox 21"/>
-          <p:cNvSpPr txBox="1"/>
-          <p:nvPr/>
-        </p:nvSpPr>
-        <p:spPr>
-          <a:xfrm>
-            <a:off x="1084539" y="4133386"/>
-            <a:ext cx="1937854" cy="966418"/>
-          </a:xfrm>
-          <a:prstGeom prst="rect">
-            <a:avLst/>
-          </a:prstGeom>
-          <a:noFill/>
-        </p:spPr>
-        <p:txBody>
-          <a:bodyPr wrap="square" rtlCol="0">
-            <a:spAutoFit/>
-          </a:bodyPr>
-          <a:lstStyle/>
-          <a:p>
-            <a:pPr algn="ctr">
-              <a:lnSpc>
-                <a:spcPct val="120000"/>
-              </a:lnSpc>
-            </a:pPr>
-            <a:r>
-              <a:rPr lang="en-US" sz="2400" dirty="0"/>
-              <a:t>[Na</a:t>
-            </a:r>
-            <a:r>
-              <a:rPr lang="en-US" sz="2400" baseline="30000" dirty="0"/>
-              <a:t>+</a:t>
-            </a:r>
-            <a:r>
-              <a:rPr lang="en-US" sz="2400" dirty="0"/>
-              <a:t>]</a:t>
-            </a:r>
-          </a:p>
-          <a:p>
-            <a:pPr algn="ctr">
-              <a:lnSpc>
-                <a:spcPct val="120000"/>
-              </a:lnSpc>
-            </a:pPr>
-            <a:r>
-              <a:rPr lang="en-US" sz="2400" dirty="0"/>
-              <a:t>(tonicity)</a:t>
-            </a:r>
-          </a:p>
-        </p:txBody>
-      </p:sp>
-      <p:sp>
-        <p:nvSpPr>
-          <p:cNvPr id="26" name="TextBox 25"/>
-          <p:cNvSpPr txBox="1"/>
-          <p:nvPr/>
-        </p:nvSpPr>
-        <p:spPr>
-          <a:xfrm>
-            <a:off x="5037215" y="1774300"/>
-            <a:ext cx="1187412" cy="369332"/>
-          </a:xfrm>
-          <a:prstGeom prst="rect">
-            <a:avLst/>
-          </a:prstGeom>
-          <a:noFill/>
-        </p:spPr>
-        <p:txBody>
-          <a:bodyPr wrap="none" rtlCol="0">
-            <a:spAutoFit/>
-          </a:bodyPr>
-          <a:lstStyle/>
-          <a:p>
-            <a:pPr algn="ctr"/>
-            <a:r>
-              <a:rPr lang="en-US" i="1" dirty="0"/>
-              <a:t>ADH (AVP)</a:t>
-            </a:r>
-          </a:p>
-        </p:txBody>
-      </p:sp>
-      <p:sp>
-        <p:nvSpPr>
-          <p:cNvPr id="4" name="TextBox 3"/>
-          <p:cNvSpPr txBox="1"/>
-          <p:nvPr/>
-        </p:nvSpPr>
-        <p:spPr>
-          <a:xfrm>
-            <a:off x="5472106" y="3994492"/>
-            <a:ext cx="3281758" cy="1412694"/>
-          </a:xfrm>
-          <a:prstGeom prst="rect">
-            <a:avLst/>
-          </a:prstGeom>
-          <a:noFill/>
-        </p:spPr>
-        <p:txBody>
-          <a:bodyPr wrap="square" rtlCol="0">
-            <a:spAutoFit/>
-          </a:bodyPr>
-          <a:lstStyle/>
-          <a:p>
-            <a:pPr marL="285750" indent="-285750">
-              <a:lnSpc>
-                <a:spcPct val="120000"/>
-              </a:lnSpc>
-              <a:buFont typeface="Arial"/>
-              <a:buChar char="•"/>
-            </a:pPr>
-            <a:r>
-              <a:rPr lang="en-US" dirty="0"/>
-              <a:t>GFR</a:t>
-            </a:r>
-          </a:p>
-          <a:p>
-            <a:pPr marL="285750" indent="-285750">
-              <a:lnSpc>
-                <a:spcPct val="120000"/>
-              </a:lnSpc>
-              <a:buFont typeface="Arial"/>
-              <a:buChar char="•"/>
-            </a:pPr>
-            <a:r>
-              <a:rPr lang="en-US" dirty="0"/>
-              <a:t>diluting segment</a:t>
-            </a:r>
-          </a:p>
-          <a:p>
-            <a:pPr marL="285750" indent="-285750">
-              <a:lnSpc>
-                <a:spcPct val="120000"/>
-              </a:lnSpc>
-              <a:buFont typeface="Arial"/>
-              <a:buChar char="•"/>
-            </a:pPr>
-            <a:r>
-              <a:rPr lang="en-US" dirty="0"/>
-              <a:t>ADH-responsive CDs</a:t>
-            </a:r>
-          </a:p>
-          <a:p>
-            <a:pPr marL="285750" indent="-285750">
-              <a:lnSpc>
-                <a:spcPct val="120000"/>
-              </a:lnSpc>
-              <a:buFont typeface="Arial"/>
-              <a:buChar char="•"/>
-            </a:pPr>
-            <a:r>
-              <a:rPr lang="en-US" dirty="0" err="1"/>
-              <a:t>osmolar</a:t>
-            </a:r>
-            <a:r>
-              <a:rPr lang="en-US" dirty="0"/>
-              <a:t> load</a:t>
-            </a:r>
-          </a:p>
-        </p:txBody>
-      </p:sp>
-      <p:sp>
-        <p:nvSpPr>
-          <p:cNvPr id="42" name="TextBox 41"/>
-          <p:cNvSpPr txBox="1"/>
-          <p:nvPr/>
-        </p:nvSpPr>
-        <p:spPr>
-          <a:xfrm>
-            <a:off x="6327932" y="2859004"/>
-            <a:ext cx="300082" cy="369332"/>
-          </a:xfrm>
-          <a:prstGeom prst="rect">
-            <a:avLst/>
-          </a:prstGeom>
-          <a:noFill/>
-        </p:spPr>
-        <p:txBody>
-          <a:bodyPr wrap="none" rtlCol="0">
-            <a:spAutoFit/>
-          </a:bodyPr>
-          <a:lstStyle/>
-          <a:p>
-            <a:r>
-              <a:rPr lang="mr-IN" dirty="0"/>
-              <a:t>–</a:t>
-            </a:r>
-            <a:endParaRPr lang="en-US" dirty="0"/>
-          </a:p>
-        </p:txBody>
-      </p:sp>
-      <p:sp>
-        <p:nvSpPr>
-          <p:cNvPr id="43" name="TextBox 42"/>
-          <p:cNvSpPr txBox="1"/>
-          <p:nvPr/>
-        </p:nvSpPr>
-        <p:spPr>
-          <a:xfrm>
-            <a:off x="2654046" y="3959702"/>
-            <a:ext cx="319468" cy="369332"/>
-          </a:xfrm>
-          <a:prstGeom prst="rect">
-            <a:avLst/>
-          </a:prstGeom>
-          <a:noFill/>
-        </p:spPr>
-        <p:txBody>
-          <a:bodyPr wrap="none" rtlCol="0">
-            <a:spAutoFit/>
-          </a:bodyPr>
-          <a:lstStyle/>
-          <a:p>
-            <a:r>
-              <a:rPr lang="en-GB" dirty="0"/>
-              <a:t>+</a:t>
-            </a:r>
-            <a:endParaRPr lang="en-US" dirty="0"/>
-          </a:p>
-        </p:txBody>
-      </p:sp>
-    </p:spTree>
-    <p:extLst>
-      <p:ext uri="{BB962C8B-B14F-4D97-AF65-F5344CB8AC3E}">
-        <p14:creationId xmlns:p14="http://schemas.microsoft.com/office/powerpoint/2010/main" val="2853650850"/>
       </p:ext>
     </p:extLst>
   </p:cSld>
